--- a/aula-01-imersao-agosto.pptx
+++ b/aula-01-imersao-agosto.pptx
@@ -30,6 +30,9 @@
     <p:sldId id="278" r:id="rId24"/>
     <p:sldId id="279" r:id="rId25"/>
     <p:sldId id="280" r:id="rId26"/>
+    <p:sldId id="308" r:id="rId59"/>
+    <p:sldId id="309" r:id="rId60"/>
+    <p:sldId id="310" r:id="rId61"/>
     <p:sldId id="281" r:id="rId27"/>
     <p:sldId id="282" r:id="rId28"/>
     <p:sldId id="283" r:id="rId29"/>
@@ -29432,6 +29435,1979 @@
 </file>
 
 <file path=ppt/slides/slide42.xml><?xml version="1.0" encoding="utf-8"?>
+<p:sld xmlns:a="http://schemas.openxmlformats.org/drawingml/2006/main" xmlns:p="http://schemas.openxmlformats.org/presentationml/2006/main" xmlns:r="http://schemas.openxmlformats.org/officeDocument/2006/relationships">
+  <p:cSld>
+    <p:spTree>
+      <p:nvGrpSpPr>
+        <p:cNvPr id="1" name=""/>
+        <p:cNvGrpSpPr/>
+        <p:nvPr/>
+      </p:nvGrpSpPr>
+      <p:grpSpPr/>
+      <p:sp>
+        <p:nvSpPr>
+          <p:cNvPr id="2" name="Text 0"/>
+          <p:cNvSpPr/>
+          <p:nvPr/>
+        </p:nvSpPr>
+        <p:spPr>
+          <a:xfrm>
+            <a:off x="411480" y="411480"/>
+            <a:ext cx="7315200" cy="256032"/>
+          </a:xfrm>
+          <a:prstGeom prst="rect">
+            <a:avLst/>
+          </a:prstGeom>
+          <a:noFill/>
+          <a:ln/>
+        </p:spPr>
+        <p:txBody>
+          <a:bodyPr wrap="square" lIns="0" tIns="0" rIns="0" bIns="0" rtlCol="0" anchor="ctr"/>
+          <a:lstStyle/>
+          <a:p>
+            <a:pPr indent="0" marL="0">
+              <a:buNone/>
+            </a:pPr>
+            <a:r>
+              <a:rPr lang="en-US" sz="1100" b="1" spc="160" kern="0" dirty="0">
+                <a:solidFill>
+                  <a:srgbClr val="3B9DF5"/>
+                </a:solidFill>
+                <a:latin typeface="Arial" pitchFamily="34" charset="0"/>
+                <a:ea typeface="Arial" pitchFamily="34" charset="-122"/>
+                <a:cs typeface="Arial" pitchFamily="34" charset="-120"/>
+              </a:rPr>
+              <a:t>O NÚMERO QUE A GENTE PROCURAVA</a:t>
+            </a:r>
+            <a:endParaRPr lang="en-US" sz="1100" dirty="0"/>
+          </a:p>
+        </p:txBody>
+      </p:sp>
+      <p:sp>
+        <p:nvSpPr>
+          <p:cNvPr id="3" name="Text 1"/>
+          <p:cNvSpPr/>
+          <p:nvPr/>
+        </p:nvSpPr>
+        <p:spPr>
+          <a:xfrm>
+            <a:off x="411480" y="822960"/>
+            <a:ext cx="8321040" cy="1005840"/>
+          </a:xfrm>
+          <a:prstGeom prst="rect">
+            <a:avLst/>
+          </a:prstGeom>
+          <a:noFill/>
+          <a:ln/>
+        </p:spPr>
+        <p:txBody>
+          <a:bodyPr wrap="square" lIns="0" tIns="0" rIns="0" bIns="0" rtlCol="0" anchor="ctr"/>
+          <a:lstStyle/>
+          <a:p>
+            <a:pPr indent="0" marL="0">
+              <a:lnSpc>
+                <a:spcPts val="4000"/>
+              </a:lnSpc>
+              <a:buNone/>
+            </a:pPr>
+            <a:r>
+              <a:rPr lang="en-US" sz="3200" b="1" dirty="0">
+                <a:solidFill>
+                  <a:srgbClr val="FFFFFF"/>
+                </a:solidFill>
+                <a:latin typeface="Arial" pitchFamily="34" charset="0"/>
+                <a:ea typeface="Arial" pitchFamily="34" charset="-122"/>
+                <a:cs typeface="Arial" pitchFamily="34" charset="-120"/>
+              </a:rPr>
+              <a:t>A resposta da noite</a:t>
+            </a:r>
+            <a:endParaRPr lang="en-US" sz="3200" dirty="0"/>
+          </a:p>
+        </p:txBody>
+      </p:sp>
+      <p:sp>
+        <p:nvSpPr>
+          <p:cNvPr id="4" name="Shape 2"/>
+          <p:cNvSpPr/>
+          <p:nvPr/>
+        </p:nvSpPr>
+        <p:spPr>
+          <a:xfrm>
+            <a:off x="411480" y="2194560"/>
+            <a:ext cx="1956816" cy="1737360"/>
+          </a:xfrm>
+          <a:prstGeom prst="roundRect">
+            <a:avLst>
+              <a:gd name="adj" fmla="val 2632"/>
+            </a:avLst>
+          </a:prstGeom>
+          <a:solidFill>
+            <a:srgbClr val="0D1522"/>
+          </a:solidFill>
+          <a:ln w="12700">
+            <a:solidFill>
+              <a:srgbClr val="1F3A5A"/>
+            </a:solidFill>
+            <a:prstDash val="solid"/>
+          </a:ln>
+        </p:spPr>
+      </p:sp>
+      <p:sp>
+        <p:nvSpPr>
+          <p:cNvPr id="5" name="Text 3"/>
+          <p:cNvSpPr/>
+          <p:nvPr/>
+        </p:nvSpPr>
+        <p:spPr>
+          <a:xfrm>
+            <a:off x="612648" y="2359152"/>
+            <a:ext cx="1554480" cy="274320"/>
+          </a:xfrm>
+          <a:prstGeom prst="rect">
+            <a:avLst/>
+          </a:prstGeom>
+          <a:noFill/>
+          <a:ln/>
+        </p:spPr>
+        <p:txBody>
+          <a:bodyPr wrap="square" lIns="0" tIns="0" rIns="0" bIns="0" rtlCol="0" anchor="ctr"/>
+          <a:lstStyle/>
+          <a:p>
+            <a:pPr indent="0" marL="0">
+              <a:buNone/>
+            </a:pPr>
+            <a:r>
+              <a:rPr lang="en-US" sz="1100" b="1" dirty="0">
+                <a:solidFill>
+                  <a:srgbClr val="3B9DF5"/>
+                </a:solidFill>
+                <a:latin typeface="Arial" pitchFamily="34" charset="0"/>
+                <a:ea typeface="Arial" pitchFamily="34" charset="-122"/>
+                <a:cs typeface="Arial" pitchFamily="34" charset="-120"/>
+              </a:rPr>
+              <a:t>R$</a:t>
+            </a:r>
+            <a:endParaRPr lang="en-US" sz="1100" dirty="0"/>
+          </a:p>
+        </p:txBody>
+      </p:sp>
+      <p:sp>
+        <p:nvSpPr>
+          <p:cNvPr id="6" name="Text 4"/>
+          <p:cNvSpPr/>
+          <p:nvPr/>
+        </p:nvSpPr>
+        <p:spPr>
+          <a:xfrm>
+            <a:off x="612648" y="2633472"/>
+            <a:ext cx="1554480" cy="512064"/>
+          </a:xfrm>
+          <a:prstGeom prst="rect">
+            <a:avLst/>
+          </a:prstGeom>
+          <a:noFill/>
+          <a:ln/>
+        </p:spPr>
+        <p:txBody>
+          <a:bodyPr wrap="square" lIns="0" tIns="0" rIns="0" bIns="0" rtlCol="0" anchor="t"/>
+          <a:lstStyle/>
+          <a:p>
+            <a:pPr indent="0" marL="0">
+              <a:lnSpc>
+                <a:spcPts val="1800"/>
+              </a:lnSpc>
+              <a:buNone/>
+            </a:pPr>
+            <a:r>
+              <a:rPr lang="en-US" sz="1450" b="1" dirty="0">
+                <a:solidFill>
+                  <a:srgbClr val="FFFFFF"/>
+                </a:solidFill>
+                <a:latin typeface="Arial" pitchFamily="34" charset="0"/>
+                <a:ea typeface="Arial" pitchFamily="34" charset="-122"/>
+                <a:cs typeface="Arial" pitchFamily="34" charset="-120"/>
+              </a:rPr>
+              <a:t>102,3 milhões</a:t>
+            </a:r>
+            <a:endParaRPr lang="en-US" sz="1450" dirty="0"/>
+          </a:p>
+        </p:txBody>
+      </p:sp>
+      <p:sp>
+        <p:nvSpPr>
+          <p:cNvPr id="7" name="Text 5"/>
+          <p:cNvSpPr/>
+          <p:nvPr/>
+        </p:nvSpPr>
+        <p:spPr>
+          <a:xfrm>
+            <a:off x="612648" y="3163824"/>
+            <a:ext cx="1554480" cy="621792"/>
+          </a:xfrm>
+          <a:prstGeom prst="rect">
+            <a:avLst/>
+          </a:prstGeom>
+          <a:noFill/>
+          <a:ln/>
+        </p:spPr>
+        <p:txBody>
+          <a:bodyPr wrap="square" lIns="0" tIns="0" rIns="0" bIns="0" rtlCol="0" anchor="ctr"/>
+          <a:lstStyle/>
+          <a:p>
+            <a:pPr indent="0" marL="0">
+              <a:lnSpc>
+                <a:spcPts val="1400"/>
+              </a:lnSpc>
+              <a:buNone/>
+            </a:pPr>
+            <a:r>
+              <a:rPr lang="en-US" sz="1050" dirty="0">
+                <a:solidFill>
+                  <a:srgbClr val="9BAAC0"/>
+                </a:solidFill>
+                <a:latin typeface="Arial" pitchFamily="34" charset="0"/>
+                <a:ea typeface="Arial" pitchFamily="34" charset="-122"/>
+                <a:cs typeface="Arial" pitchFamily="34" charset="-120"/>
+              </a:rPr>
+              <a:t>Receita dos 24 meses, 27.772 pedidos faturados</a:t>
+            </a:r>
+            <a:endParaRPr lang="en-US" sz="1050" dirty="0"/>
+          </a:p>
+        </p:txBody>
+      </p:sp>
+      <p:sp>
+        <p:nvSpPr>
+          <p:cNvPr id="8" name="Shape 6"/>
+          <p:cNvSpPr/>
+          <p:nvPr/>
+        </p:nvSpPr>
+        <p:spPr>
+          <a:xfrm>
+            <a:off x="2532888" y="2194560"/>
+            <a:ext cx="1956816" cy="1737360"/>
+          </a:xfrm>
+          <a:prstGeom prst="roundRect">
+            <a:avLst>
+              <a:gd name="adj" fmla="val 2632"/>
+            </a:avLst>
+          </a:prstGeom>
+          <a:solidFill>
+            <a:srgbClr val="0D1522"/>
+          </a:solidFill>
+          <a:ln w="12700">
+            <a:solidFill>
+              <a:srgbClr val="1F3A5A"/>
+            </a:solidFill>
+            <a:prstDash val="solid"/>
+          </a:ln>
+        </p:spPr>
+      </p:sp>
+      <p:sp>
+        <p:nvSpPr>
+          <p:cNvPr id="9" name="Text 7"/>
+          <p:cNvSpPr/>
+          <p:nvPr/>
+        </p:nvSpPr>
+        <p:spPr>
+          <a:xfrm>
+            <a:off x="2734056" y="2359152"/>
+            <a:ext cx="1554480" cy="274320"/>
+          </a:xfrm>
+          <a:prstGeom prst="rect">
+            <a:avLst/>
+          </a:prstGeom>
+          <a:noFill/>
+          <a:ln/>
+        </p:spPr>
+        <p:txBody>
+          <a:bodyPr wrap="square" lIns="0" tIns="0" rIns="0" bIns="0" rtlCol="0" anchor="ctr"/>
+          <a:lstStyle/>
+          <a:p>
+            <a:pPr indent="0" marL="0">
+              <a:buNone/>
+            </a:pPr>
+            <a:r>
+              <a:rPr lang="en-US" sz="1100" b="1" dirty="0">
+                <a:solidFill>
+                  <a:srgbClr val="3B9DF5"/>
+                </a:solidFill>
+                <a:latin typeface="Arial" pitchFamily="34" charset="0"/>
+                <a:ea typeface="Arial" pitchFamily="34" charset="-122"/>
+                <a:cs typeface="Arial" pitchFamily="34" charset="-120"/>
+              </a:rPr>
+              <a:t>R$</a:t>
+            </a:r>
+            <a:endParaRPr lang="en-US" sz="1100" dirty="0"/>
+          </a:p>
+        </p:txBody>
+      </p:sp>
+      <p:sp>
+        <p:nvSpPr>
+          <p:cNvPr id="10" name="Text 8"/>
+          <p:cNvSpPr/>
+          <p:nvPr/>
+        </p:nvSpPr>
+        <p:spPr>
+          <a:xfrm>
+            <a:off x="2734056" y="2633472"/>
+            <a:ext cx="1554480" cy="512064"/>
+          </a:xfrm>
+          <a:prstGeom prst="rect">
+            <a:avLst/>
+          </a:prstGeom>
+          <a:noFill/>
+          <a:ln/>
+        </p:spPr>
+        <p:txBody>
+          <a:bodyPr wrap="square" lIns="0" tIns="0" rIns="0" bIns="0" rtlCol="0" anchor="t"/>
+          <a:lstStyle/>
+          <a:p>
+            <a:pPr indent="0" marL="0">
+              <a:lnSpc>
+                <a:spcPts val="1800"/>
+              </a:lnSpc>
+              <a:buNone/>
+            </a:pPr>
+            <a:r>
+              <a:rPr lang="en-US" sz="1450" b="1" dirty="0">
+                <a:solidFill>
+                  <a:srgbClr val="FFFFFF"/>
+                </a:solidFill>
+                <a:latin typeface="Arial" pitchFamily="34" charset="0"/>
+                <a:ea typeface="Arial" pitchFamily="34" charset="-122"/>
+                <a:cs typeface="Arial" pitchFamily="34" charset="-120"/>
+              </a:rPr>
+              <a:t>3.683,70</a:t>
+            </a:r>
+            <a:endParaRPr lang="en-US" sz="1450" dirty="0"/>
+          </a:p>
+        </p:txBody>
+      </p:sp>
+      <p:sp>
+        <p:nvSpPr>
+          <p:cNvPr id="11" name="Text 9"/>
+          <p:cNvSpPr/>
+          <p:nvPr/>
+        </p:nvSpPr>
+        <p:spPr>
+          <a:xfrm>
+            <a:off x="2734056" y="3163824"/>
+            <a:ext cx="1554480" cy="621792"/>
+          </a:xfrm>
+          <a:prstGeom prst="rect">
+            <a:avLst/>
+          </a:prstGeom>
+          <a:noFill/>
+          <a:ln/>
+        </p:spPr>
+        <p:txBody>
+          <a:bodyPr wrap="square" lIns="0" tIns="0" rIns="0" bIns="0" rtlCol="0" anchor="ctr"/>
+          <a:lstStyle/>
+          <a:p>
+            <a:pPr indent="0" marL="0">
+              <a:lnSpc>
+                <a:spcPts val="1400"/>
+              </a:lnSpc>
+              <a:buNone/>
+            </a:pPr>
+            <a:r>
+              <a:rPr lang="en-US" sz="1050" dirty="0">
+                <a:solidFill>
+                  <a:srgbClr val="9BAAC0"/>
+                </a:solidFill>
+                <a:latin typeface="Arial" pitchFamily="34" charset="0"/>
+                <a:ea typeface="Arial" pitchFamily="34" charset="-122"/>
+                <a:cs typeface="Arial" pitchFamily="34" charset="-120"/>
+              </a:rPr>
+              <a:t>Ticket médio por pedido</a:t>
+            </a:r>
+            <a:endParaRPr lang="en-US" sz="1050" dirty="0"/>
+          </a:p>
+        </p:txBody>
+      </p:sp>
+      <p:sp>
+        <p:nvSpPr>
+          <p:cNvPr id="12" name="Shape 10"/>
+          <p:cNvSpPr/>
+          <p:nvPr/>
+        </p:nvSpPr>
+        <p:spPr>
+          <a:xfrm>
+            <a:off x="4654296" y="2194560"/>
+            <a:ext cx="1956816" cy="1737360"/>
+          </a:xfrm>
+          <a:prstGeom prst="roundRect">
+            <a:avLst>
+              <a:gd name="adj" fmla="val 2632"/>
+            </a:avLst>
+          </a:prstGeom>
+          <a:solidFill>
+            <a:srgbClr val="0D1522"/>
+          </a:solidFill>
+          <a:ln w="12700">
+            <a:solidFill>
+              <a:srgbClr val="1F3A5A"/>
+            </a:solidFill>
+            <a:prstDash val="solid"/>
+          </a:ln>
+        </p:spPr>
+      </p:sp>
+      <p:sp>
+        <p:nvSpPr>
+          <p:cNvPr id="13" name="Text 11"/>
+          <p:cNvSpPr/>
+          <p:nvPr/>
+        </p:nvSpPr>
+        <p:spPr>
+          <a:xfrm>
+            <a:off x="4855464" y="2359152"/>
+            <a:ext cx="1554480" cy="274320"/>
+          </a:xfrm>
+          <a:prstGeom prst="rect">
+            <a:avLst/>
+          </a:prstGeom>
+          <a:noFill/>
+          <a:ln/>
+        </p:spPr>
+        <p:txBody>
+          <a:bodyPr wrap="square" lIns="0" tIns="0" rIns="0" bIns="0" rtlCol="0" anchor="ctr"/>
+          <a:lstStyle/>
+          <a:p>
+            <a:pPr indent="0" marL="0">
+              <a:buNone/>
+            </a:pPr>
+            <a:r>
+              <a:rPr lang="en-US" sz="1100" b="1" dirty="0">
+                <a:solidFill>
+                  <a:srgbClr val="3B9DF5"/>
+                </a:solidFill>
+                <a:latin typeface="Arial" pitchFamily="34" charset="0"/>
+                <a:ea typeface="Arial" pitchFamily="34" charset="-122"/>
+                <a:cs typeface="Arial" pitchFamily="34" charset="-120"/>
+              </a:rPr>
+              <a:t>↑</a:t>
+            </a:r>
+            <a:endParaRPr lang="en-US" sz="1100" dirty="0"/>
+          </a:p>
+        </p:txBody>
+      </p:sp>
+      <p:sp>
+        <p:nvSpPr>
+          <p:cNvPr id="14" name="Text 12"/>
+          <p:cNvSpPr/>
+          <p:nvPr/>
+        </p:nvSpPr>
+        <p:spPr>
+          <a:xfrm>
+            <a:off x="4855464" y="2633472"/>
+            <a:ext cx="1554480" cy="512064"/>
+          </a:xfrm>
+          <a:prstGeom prst="rect">
+            <a:avLst/>
+          </a:prstGeom>
+          <a:noFill/>
+          <a:ln/>
+        </p:spPr>
+        <p:txBody>
+          <a:bodyPr wrap="square" lIns="0" tIns="0" rIns="0" bIns="0" rtlCol="0" anchor="t"/>
+          <a:lstStyle/>
+          <a:p>
+            <a:pPr indent="0" marL="0">
+              <a:lnSpc>
+                <a:spcPts val="1800"/>
+              </a:lnSpc>
+              <a:buNone/>
+            </a:pPr>
+            <a:r>
+              <a:rPr lang="en-US" sz="1450" b="1" dirty="0">
+                <a:solidFill>
+                  <a:srgbClr val="FFFFFF"/>
+                </a:solidFill>
+                <a:latin typeface="Arial" pitchFamily="34" charset="0"/>
+                <a:ea typeface="Arial" pitchFamily="34" charset="-122"/>
+                <a:cs typeface="Arial" pitchFamily="34" charset="-120"/>
+              </a:rPr>
+              <a:t>Outubro/2025</a:t>
+            </a:r>
+            <a:endParaRPr lang="en-US" sz="1450" dirty="0"/>
+          </a:p>
+        </p:txBody>
+      </p:sp>
+      <p:sp>
+        <p:nvSpPr>
+          <p:cNvPr id="15" name="Text 13"/>
+          <p:cNvSpPr/>
+          <p:nvPr/>
+        </p:nvSpPr>
+        <p:spPr>
+          <a:xfrm>
+            <a:off x="4855464" y="3163824"/>
+            <a:ext cx="1554480" cy="621792"/>
+          </a:xfrm>
+          <a:prstGeom prst="rect">
+            <a:avLst/>
+          </a:prstGeom>
+          <a:noFill/>
+          <a:ln/>
+        </p:spPr>
+        <p:txBody>
+          <a:bodyPr wrap="square" lIns="0" tIns="0" rIns="0" bIns="0" rtlCol="0" anchor="ctr"/>
+          <a:lstStyle/>
+          <a:p>
+            <a:pPr indent="0" marL="0">
+              <a:lnSpc>
+                <a:spcPts val="1400"/>
+              </a:lnSpc>
+              <a:buNone/>
+            </a:pPr>
+            <a:r>
+              <a:rPr lang="en-US" sz="1050" dirty="0">
+                <a:solidFill>
+                  <a:srgbClr val="9BAAC0"/>
+                </a:solidFill>
+                <a:latin typeface="Arial" pitchFamily="34" charset="0"/>
+                <a:ea typeface="Arial" pitchFamily="34" charset="-122"/>
+                <a:cs typeface="Arial" pitchFamily="34" charset="-120"/>
+              </a:rPr>
+              <a:t>O pico: R$ 7,0 milhões em um mês</a:t>
+            </a:r>
+            <a:endParaRPr lang="en-US" sz="1050" dirty="0"/>
+          </a:p>
+        </p:txBody>
+      </p:sp>
+      <p:sp>
+        <p:nvSpPr>
+          <p:cNvPr id="16" name="Shape 14"/>
+          <p:cNvSpPr/>
+          <p:nvPr/>
+        </p:nvSpPr>
+        <p:spPr>
+          <a:xfrm>
+            <a:off x="6775704" y="2194560"/>
+            <a:ext cx="1956816" cy="1737360"/>
+          </a:xfrm>
+          <a:prstGeom prst="roundRect">
+            <a:avLst>
+              <a:gd name="adj" fmla="val 2632"/>
+            </a:avLst>
+          </a:prstGeom>
+          <a:solidFill>
+            <a:srgbClr val="0D1522"/>
+          </a:solidFill>
+          <a:ln w="12700">
+            <a:solidFill>
+              <a:srgbClr val="1F3A5A"/>
+            </a:solidFill>
+            <a:prstDash val="solid"/>
+          </a:ln>
+        </p:spPr>
+      </p:sp>
+      <p:sp>
+        <p:nvSpPr>
+          <p:cNvPr id="17" name="Text 15"/>
+          <p:cNvSpPr/>
+          <p:nvPr/>
+        </p:nvSpPr>
+        <p:spPr>
+          <a:xfrm>
+            <a:off x="6976872" y="2359152"/>
+            <a:ext cx="1554480" cy="274320"/>
+          </a:xfrm>
+          <a:prstGeom prst="rect">
+            <a:avLst/>
+          </a:prstGeom>
+          <a:noFill/>
+          <a:ln/>
+        </p:spPr>
+        <p:txBody>
+          <a:bodyPr wrap="square" lIns="0" tIns="0" rIns="0" bIns="0" rtlCol="0" anchor="ctr"/>
+          <a:lstStyle/>
+          <a:p>
+            <a:pPr indent="0" marL="0">
+              <a:buNone/>
+            </a:pPr>
+            <a:r>
+              <a:rPr lang="en-US" sz="1100" b="1" dirty="0">
+                <a:solidFill>
+                  <a:srgbClr val="3B9DF5"/>
+                </a:solidFill>
+                <a:latin typeface="Arial" pitchFamily="34" charset="0"/>
+                <a:ea typeface="Arial" pitchFamily="34" charset="-122"/>
+                <a:cs typeface="Arial" pitchFamily="34" charset="-120"/>
+              </a:rPr>
+              <a:t>↓</a:t>
+            </a:r>
+            <a:endParaRPr lang="en-US" sz="1100" dirty="0"/>
+          </a:p>
+        </p:txBody>
+      </p:sp>
+      <p:sp>
+        <p:nvSpPr>
+          <p:cNvPr id="18" name="Text 16"/>
+          <p:cNvSpPr/>
+          <p:nvPr/>
+        </p:nvSpPr>
+        <p:spPr>
+          <a:xfrm>
+            <a:off x="6976872" y="2633472"/>
+            <a:ext cx="1554480" cy="512064"/>
+          </a:xfrm>
+          <a:prstGeom prst="rect">
+            <a:avLst/>
+          </a:prstGeom>
+          <a:noFill/>
+          <a:ln/>
+        </p:spPr>
+        <p:txBody>
+          <a:bodyPr wrap="square" lIns="0" tIns="0" rIns="0" bIns="0" rtlCol="0" anchor="t"/>
+          <a:lstStyle/>
+          <a:p>
+            <a:pPr indent="0" marL="0">
+              <a:lnSpc>
+                <a:spcPts val="1800"/>
+              </a:lnSpc>
+              <a:buNone/>
+            </a:pPr>
+            <a:r>
+              <a:rPr lang="en-US" sz="1450" b="1" dirty="0">
+                <a:solidFill>
+                  <a:srgbClr val="FFFFFF"/>
+                </a:solidFill>
+                <a:latin typeface="Arial" pitchFamily="34" charset="0"/>
+                <a:ea typeface="Arial" pitchFamily="34" charset="-122"/>
+                <a:cs typeface="Arial" pitchFamily="34" charset="-120"/>
+              </a:rPr>
+              <a:t>Janeiro/2026</a:t>
+            </a:r>
+            <a:endParaRPr lang="en-US" sz="1450" dirty="0"/>
+          </a:p>
+        </p:txBody>
+      </p:sp>
+      <p:sp>
+        <p:nvSpPr>
+          <p:cNvPr id="19" name="Text 17"/>
+          <p:cNvSpPr/>
+          <p:nvPr/>
+        </p:nvSpPr>
+        <p:spPr>
+          <a:xfrm>
+            <a:off x="6976872" y="3163824"/>
+            <a:ext cx="1554480" cy="621792"/>
+          </a:xfrm>
+          <a:prstGeom prst="rect">
+            <a:avLst/>
+          </a:prstGeom>
+          <a:noFill/>
+          <a:ln/>
+        </p:spPr>
+        <p:txBody>
+          <a:bodyPr wrap="square" lIns="0" tIns="0" rIns="0" bIns="0" rtlCol="0" anchor="ctr"/>
+          <a:lstStyle/>
+          <a:p>
+            <a:pPr indent="0" marL="0">
+              <a:lnSpc>
+                <a:spcPts val="1400"/>
+              </a:lnSpc>
+              <a:buNone/>
+            </a:pPr>
+            <a:r>
+              <a:rPr lang="en-US" sz="1050" dirty="0">
+                <a:solidFill>
+                  <a:srgbClr val="9BAAC0"/>
+                </a:solidFill>
+                <a:latin typeface="Arial" pitchFamily="34" charset="0"/>
+                <a:ea typeface="Arial" pitchFamily="34" charset="-122"/>
+                <a:cs typeface="Arial" pitchFamily="34" charset="-120"/>
+              </a:rPr>
+              <a:t>O vale: R$ 2,5 milhões — o varejo já abasteceu</a:t>
+            </a:r>
+            <a:endParaRPr lang="en-US" sz="1050" dirty="0"/>
+          </a:p>
+        </p:txBody>
+      </p:sp>
+      <p:sp>
+        <p:nvSpPr>
+          <p:cNvPr id="20" name="Text 18"/>
+          <p:cNvSpPr/>
+          <p:nvPr/>
+        </p:nvSpPr>
+        <p:spPr>
+          <a:xfrm>
+            <a:off x="411480" y="4681728"/>
+            <a:ext cx="2743200" cy="228600"/>
+          </a:xfrm>
+          <a:prstGeom prst="rect">
+            <a:avLst/>
+          </a:prstGeom>
+          <a:noFill/>
+          <a:ln/>
+        </p:spPr>
+        <p:txBody>
+          <a:bodyPr wrap="square" lIns="0" tIns="0" rIns="0" bIns="0" rtlCol="0" anchor="ctr"/>
+          <a:lstStyle/>
+          <a:p>
+            <a:pPr indent="0" marL="0">
+              <a:buNone/>
+            </a:pPr>
+            <a:r>
+              <a:rPr lang="en-US" sz="800" b="1" spc="200" kern="0" dirty="0">
+                <a:solidFill>
+                  <a:srgbClr val="566A85"/>
+                </a:solidFill>
+                <a:latin typeface="Arial" pitchFamily="34" charset="0"/>
+                <a:ea typeface="Arial" pitchFamily="34" charset="-122"/>
+                <a:cs typeface="Arial" pitchFamily="34" charset="-120"/>
+              </a:rPr>
+              <a:t>JORNADA DE DADOS</a:t>
+            </a:r>
+            <a:endParaRPr lang="en-US" sz="800" dirty="0"/>
+          </a:p>
+        </p:txBody>
+      </p:sp>
+    </p:spTree>
+  </p:cSld>
+  <p:clrMapOvr>
+    <a:masterClrMapping/>
+  </p:clrMapOvr>
+</p:sld>
+</file>
+
+<file path=ppt/slides/slide43.xml><?xml version="1.0" encoding="utf-8"?>
+<p:sld xmlns:a="http://schemas.openxmlformats.org/drawingml/2006/main" xmlns:p="http://schemas.openxmlformats.org/presentationml/2006/main" xmlns:r="http://schemas.openxmlformats.org/officeDocument/2006/relationships">
+  <p:cSld>
+    <p:spTree>
+      <p:nvGrpSpPr>
+        <p:cNvPr id="1" name=""/>
+        <p:cNvGrpSpPr/>
+        <p:nvPr/>
+      </p:nvGrpSpPr>
+      <p:grpSpPr/>
+      <p:sp>
+        <p:nvSpPr>
+          <p:cNvPr id="2" name="Text 0"/>
+          <p:cNvSpPr/>
+          <p:nvPr/>
+        </p:nvSpPr>
+        <p:spPr>
+          <a:xfrm>
+            <a:off x="411480" y="411480"/>
+            <a:ext cx="7315200" cy="256032"/>
+          </a:xfrm>
+          <a:prstGeom prst="rect">
+            <a:avLst/>
+          </a:prstGeom>
+          <a:noFill/>
+          <a:ln/>
+        </p:spPr>
+        <p:txBody>
+          <a:bodyPr wrap="square" lIns="0" tIns="0" rIns="0" bIns="0" rtlCol="0" anchor="ctr"/>
+          <a:lstStyle/>
+          <a:p>
+            <a:pPr indent="0" marL="0">
+              <a:buNone/>
+            </a:pPr>
+            <a:r>
+              <a:rPr lang="en-US" sz="1100" b="1" spc="160" kern="0" dirty="0">
+                <a:solidFill>
+                  <a:srgbClr val="3B9DF5"/>
+                </a:solidFill>
+                <a:latin typeface="Arial" pitchFamily="34" charset="0"/>
+                <a:ea typeface="Arial" pitchFamily="34" charset="-122"/>
+                <a:cs typeface="Arial" pitchFamily="34" charset="-120"/>
+              </a:rPr>
+              <a:t>O MOMENTO DA VERDADE</a:t>
+            </a:r>
+            <a:endParaRPr lang="en-US" sz="1100" dirty="0"/>
+          </a:p>
+        </p:txBody>
+      </p:sp>
+      <p:sp>
+        <p:nvSpPr>
+          <p:cNvPr id="3" name="Text 1"/>
+          <p:cNvSpPr/>
+          <p:nvPr/>
+        </p:nvSpPr>
+        <p:spPr>
+          <a:xfrm>
+            <a:off x="411480" y="822960"/>
+            <a:ext cx="8321040" cy="1005840"/>
+          </a:xfrm>
+          <a:prstGeom prst="rect">
+            <a:avLst/>
+          </a:prstGeom>
+          <a:noFill/>
+          <a:ln/>
+        </p:spPr>
+        <p:txBody>
+          <a:bodyPr wrap="square" lIns="0" tIns="0" rIns="0" bIns="0" rtlCol="0" anchor="ctr"/>
+          <a:lstStyle/>
+          <a:p>
+            <a:pPr indent="0" marL="0">
+              <a:lnSpc>
+                <a:spcPts val="4000"/>
+              </a:lnSpc>
+              <a:buNone/>
+            </a:pPr>
+            <a:r>
+              <a:rPr lang="en-US" sz="3100" b="1" dirty="0">
+                <a:solidFill>
+                  <a:srgbClr val="FFFFFF"/>
+                </a:solidFill>
+                <a:latin typeface="Arial" pitchFamily="34" charset="0"/>
+                <a:ea typeface="Arial" pitchFamily="34" charset="-122"/>
+                <a:cs typeface="Arial" pitchFamily="34" charset="-120"/>
+              </a:rPr>
+              <a:t>A query que não roda</a:t>
+            </a:r>
+            <a:endParaRPr lang="en-US" sz="3100" dirty="0"/>
+          </a:p>
+        </p:txBody>
+      </p:sp>
+      <p:sp>
+        <p:nvSpPr>
+          <p:cNvPr id="4" name="Shape 2"/>
+          <p:cNvSpPr/>
+          <p:nvPr/>
+        </p:nvSpPr>
+        <p:spPr>
+          <a:xfrm>
+            <a:off x="457200" y="2157984"/>
+            <a:ext cx="91440" cy="91440"/>
+          </a:xfrm>
+          <a:prstGeom prst="ellipse">
+            <a:avLst/>
+          </a:prstGeom>
+          <a:solidFill>
+            <a:srgbClr val="3B9DF5"/>
+          </a:solidFill>
+          <a:ln w="12700">
+            <a:solidFill>
+              <a:srgbClr val="333333"/>
+            </a:solidFill>
+            <a:prstDash val="solid"/>
+          </a:ln>
+        </p:spPr>
+      </p:sp>
+      <p:sp>
+        <p:nvSpPr>
+          <p:cNvPr id="5" name="Text 3"/>
+          <p:cNvSpPr/>
+          <p:nvPr/>
+        </p:nvSpPr>
+        <p:spPr>
+          <a:xfrm>
+            <a:off x="713232" y="2057400"/>
+            <a:ext cx="7955280" cy="347472"/>
+          </a:xfrm>
+          <a:prstGeom prst="rect">
+            <a:avLst/>
+          </a:prstGeom>
+          <a:noFill/>
+          <a:ln/>
+        </p:spPr>
+        <p:txBody>
+          <a:bodyPr wrap="square" lIns="0" tIns="0" rIns="0" bIns="0" rtlCol="0" anchor="ctr"/>
+          <a:lstStyle/>
+          <a:p>
+            <a:pPr indent="0" marL="0">
+              <a:buNone/>
+            </a:pPr>
+            <a:r>
+              <a:rPr lang="en-US" sz="1500" dirty="0">
+                <a:solidFill>
+                  <a:srgbClr val="D9CFD1"/>
+                </a:solidFill>
+                <a:latin typeface="Arial" pitchFamily="34" charset="0"/>
+                <a:ea typeface="Arial" pitchFamily="34" charset="-122"/>
+                <a:cs typeface="Arial" pitchFamily="34" charset="-120"/>
+              </a:rPr>
+              <a:t>3.443 pedidos (12%) têm a data escrita como 15/10/2025 em vez de 2025-10-15</a:t>
+            </a:r>
+            <a:endParaRPr lang="en-US" sz="1500" dirty="0"/>
+          </a:p>
+        </p:txBody>
+      </p:sp>
+      <p:sp>
+        <p:nvSpPr>
+          <p:cNvPr id="6" name="Shape 4"/>
+          <p:cNvSpPr/>
+          <p:nvPr/>
+        </p:nvSpPr>
+        <p:spPr>
+          <a:xfrm>
+            <a:off x="457200" y="2578608"/>
+            <a:ext cx="91440" cy="91440"/>
+          </a:xfrm>
+          <a:prstGeom prst="ellipse">
+            <a:avLst/>
+          </a:prstGeom>
+          <a:solidFill>
+            <a:srgbClr val="3B9DF5"/>
+          </a:solidFill>
+          <a:ln w="12700">
+            <a:solidFill>
+              <a:srgbClr val="333333"/>
+            </a:solidFill>
+            <a:prstDash val="solid"/>
+          </a:ln>
+        </p:spPr>
+      </p:sp>
+      <p:sp>
+        <p:nvSpPr>
+          <p:cNvPr id="7" name="Text 5"/>
+          <p:cNvSpPr/>
+          <p:nvPr/>
+        </p:nvSpPr>
+        <p:spPr>
+          <a:xfrm>
+            <a:off x="713232" y="2478024"/>
+            <a:ext cx="7955280" cy="347472"/>
+          </a:xfrm>
+          <a:prstGeom prst="rect">
+            <a:avLst/>
+          </a:prstGeom>
+          <a:noFill/>
+          <a:ln/>
+        </p:spPr>
+        <p:txBody>
+          <a:bodyPr wrap="square" lIns="0" tIns="0" rIns="0" bIns="0" rtlCol="0" anchor="ctr"/>
+          <a:lstStyle/>
+          <a:p>
+            <a:pPr indent="0" marL="0">
+              <a:buNone/>
+            </a:pPr>
+            <a:r>
+              <a:rPr lang="en-US" sz="1500" dirty="0">
+                <a:solidFill>
+                  <a:srgbClr val="D9CFD1"/>
+                </a:solidFill>
+                <a:latin typeface="Arial" pitchFamily="34" charset="0"/>
+                <a:ea typeface="Arial" pitchFamily="34" charset="-122"/>
+                <a:cs typeface="Arial" pitchFamily="34" charset="-120"/>
+              </a:rPr>
+              <a:t>date_trunc('month', data_pedido) tenta converter, não consegue e derruba a query</a:t>
+            </a:r>
+            <a:endParaRPr lang="en-US" sz="1500" dirty="0"/>
+          </a:p>
+        </p:txBody>
+      </p:sp>
+      <p:sp>
+        <p:nvSpPr>
+          <p:cNvPr id="8" name="Shape 6"/>
+          <p:cNvSpPr/>
+          <p:nvPr/>
+        </p:nvSpPr>
+        <p:spPr>
+          <a:xfrm>
+            <a:off x="457200" y="2999232"/>
+            <a:ext cx="91440" cy="91440"/>
+          </a:xfrm>
+          <a:prstGeom prst="ellipse">
+            <a:avLst/>
+          </a:prstGeom>
+          <a:solidFill>
+            <a:srgbClr val="3B9DF5"/>
+          </a:solidFill>
+          <a:ln w="12700">
+            <a:solidFill>
+              <a:srgbClr val="333333"/>
+            </a:solidFill>
+            <a:prstDash val="solid"/>
+          </a:ln>
+        </p:spPr>
+      </p:sp>
+      <p:sp>
+        <p:nvSpPr>
+          <p:cNvPr id="9" name="Text 7"/>
+          <p:cNvSpPr/>
+          <p:nvPr/>
+        </p:nvSpPr>
+        <p:spPr>
+          <a:xfrm>
+            <a:off x="713232" y="2898648"/>
+            <a:ext cx="7955280" cy="347472"/>
+          </a:xfrm>
+          <a:prstGeom prst="rect">
+            <a:avLst/>
+          </a:prstGeom>
+          <a:noFill/>
+          <a:ln/>
+        </p:spPr>
+        <p:txBody>
+          <a:bodyPr wrap="square" lIns="0" tIns="0" rIns="0" bIns="0" rtlCol="0" anchor="ctr"/>
+          <a:lstStyle/>
+          <a:p>
+            <a:pPr indent="0" marL="0">
+              <a:buNone/>
+            </a:pPr>
+            <a:r>
+              <a:rPr lang="en-US" sz="1500" dirty="0">
+                <a:solidFill>
+                  <a:srgbClr val="D9CFD1"/>
+                </a:solidFill>
+                <a:latin typeface="Arial" pitchFamily="34" charset="0"/>
+                <a:ea typeface="Arial" pitchFamily="34" charset="-122"/>
+                <a:cs typeface="Arial" pitchFamily="34" charset="-120"/>
+              </a:rPr>
+              <a:t>Não é resposta errada em silêncio: é erro na cara, e isso é melhor</a:t>
+            </a:r>
+            <a:endParaRPr lang="en-US" sz="1500" dirty="0"/>
+          </a:p>
+        </p:txBody>
+      </p:sp>
+      <p:sp>
+        <p:nvSpPr>
+          <p:cNvPr id="10" name="Shape 8"/>
+          <p:cNvSpPr/>
+          <p:nvPr/>
+        </p:nvSpPr>
+        <p:spPr>
+          <a:xfrm>
+            <a:off x="457200" y="3419856"/>
+            <a:ext cx="91440" cy="91440"/>
+          </a:xfrm>
+          <a:prstGeom prst="ellipse">
+            <a:avLst/>
+          </a:prstGeom>
+          <a:solidFill>
+            <a:srgbClr val="3B9DF5"/>
+          </a:solidFill>
+          <a:ln w="12700">
+            <a:solidFill>
+              <a:srgbClr val="333333"/>
+            </a:solidFill>
+            <a:prstDash val="solid"/>
+          </a:ln>
+        </p:spPr>
+      </p:sp>
+      <p:sp>
+        <p:nvSpPr>
+          <p:cNvPr id="11" name="Text 9"/>
+          <p:cNvSpPr/>
+          <p:nvPr/>
+        </p:nvSpPr>
+        <p:spPr>
+          <a:xfrm>
+            <a:off x="713232" y="3319272"/>
+            <a:ext cx="7955280" cy="347472"/>
+          </a:xfrm>
+          <a:prstGeom prst="rect">
+            <a:avLst/>
+          </a:prstGeom>
+          <a:noFill/>
+          <a:ln/>
+        </p:spPr>
+        <p:txBody>
+          <a:bodyPr wrap="square" lIns="0" tIns="0" rIns="0" bIns="0" rtlCol="0" anchor="ctr"/>
+          <a:lstStyle/>
+          <a:p>
+            <a:pPr indent="0" marL="0">
+              <a:buNone/>
+            </a:pPr>
+            <a:r>
+              <a:rPr lang="en-US" sz="1500" dirty="0">
+                <a:solidFill>
+                  <a:srgbClr val="D9CFD1"/>
+                </a:solidFill>
+                <a:latin typeface="Arial" pitchFamily="34" charset="0"/>
+                <a:ea typeface="Arial" pitchFamily="34" charset="-122"/>
+                <a:cs typeface="Arial" pitchFamily="34" charset="-120"/>
+              </a:rPr>
+              <a:t>try_to_date devolve NULL em vez de quebrar — aí o coalesce tenta os dois formatos</a:t>
+            </a:r>
+            <a:endParaRPr lang="en-US" sz="1500" dirty="0"/>
+          </a:p>
+        </p:txBody>
+      </p:sp>
+      <p:sp>
+        <p:nvSpPr>
+          <p:cNvPr id="12" name="Shape 10"/>
+          <p:cNvSpPr/>
+          <p:nvPr/>
+        </p:nvSpPr>
+        <p:spPr>
+          <a:xfrm>
+            <a:off x="457200" y="3840480"/>
+            <a:ext cx="91440" cy="91440"/>
+          </a:xfrm>
+          <a:prstGeom prst="ellipse">
+            <a:avLst/>
+          </a:prstGeom>
+          <a:solidFill>
+            <a:srgbClr val="3B9DF5"/>
+          </a:solidFill>
+          <a:ln w="12700">
+            <a:solidFill>
+              <a:srgbClr val="333333"/>
+            </a:solidFill>
+            <a:prstDash val="solid"/>
+          </a:ln>
+        </p:spPr>
+      </p:sp>
+      <p:sp>
+        <p:nvSpPr>
+          <p:cNvPr id="13" name="Text 11"/>
+          <p:cNvSpPr/>
+          <p:nvPr/>
+        </p:nvSpPr>
+        <p:spPr>
+          <a:xfrm>
+            <a:off x="713232" y="3739896"/>
+            <a:ext cx="7955280" cy="347472"/>
+          </a:xfrm>
+          <a:prstGeom prst="rect">
+            <a:avLst/>
+          </a:prstGeom>
+          <a:noFill/>
+          <a:ln/>
+        </p:spPr>
+        <p:txBody>
+          <a:bodyPr wrap="square" lIns="0" tIns="0" rIns="0" bIns="0" rtlCol="0" anchor="ctr"/>
+          <a:lstStyle/>
+          <a:p>
+            <a:pPr indent="0" marL="0">
+              <a:buNone/>
+            </a:pPr>
+            <a:r>
+              <a:rPr lang="en-US" sz="1500" dirty="0">
+                <a:solidFill>
+                  <a:srgbClr val="D9CFD1"/>
+                </a:solidFill>
+                <a:latin typeface="Arial" pitchFamily="34" charset="0"/>
+                <a:ea typeface="Arial" pitchFamily="34" charset="-122"/>
+                <a:cs typeface="Arial" pitchFamily="34" charset="-120"/>
+              </a:rPr>
+              <a:t>Esse coalesce é um rascunho da camada silver. Amanhã ele vira pipeline</a:t>
+            </a:r>
+            <a:endParaRPr lang="en-US" sz="1500" dirty="0"/>
+          </a:p>
+        </p:txBody>
+      </p:sp>
+      <p:sp>
+        <p:nvSpPr>
+          <p:cNvPr id="14" name="Text 12"/>
+          <p:cNvSpPr/>
+          <p:nvPr/>
+        </p:nvSpPr>
+        <p:spPr>
+          <a:xfrm>
+            <a:off x="411480" y="4297680"/>
+            <a:ext cx="8229600" cy="365760"/>
+          </a:xfrm>
+          <a:prstGeom prst="rect">
+            <a:avLst/>
+          </a:prstGeom>
+          <a:noFill/>
+          <a:ln/>
+        </p:spPr>
+        <p:txBody>
+          <a:bodyPr wrap="square" lIns="0" tIns="0" rIns="0" bIns="0" rtlCol="0" anchor="ctr"/>
+          <a:lstStyle/>
+          <a:p>
+            <a:pPr indent="0" marL="0">
+              <a:buNone/>
+            </a:pPr>
+            <a:r>
+              <a:rPr lang="en-US" sz="1300" dirty="0">
+                <a:solidFill>
+                  <a:srgbClr val="7CC8FF"/>
+                </a:solidFill>
+                <a:latin typeface="Arial" pitchFamily="34" charset="0"/>
+                <a:ea typeface="Arial" pitchFamily="34" charset="-122"/>
+                <a:cs typeface="Arial" pitchFamily="34" charset="-120"/>
+              </a:rPr>
+              <a:t>Repara na ordem: eu rodo a query errada primeiro, de propósito. O erro é que explica por que a noite 2 existe.</a:t>
+            </a:r>
+            <a:endParaRPr lang="en-US" sz="1300" dirty="0"/>
+          </a:p>
+        </p:txBody>
+      </p:sp>
+      <p:sp>
+        <p:nvSpPr>
+          <p:cNvPr id="15" name="Text 13"/>
+          <p:cNvSpPr/>
+          <p:nvPr/>
+        </p:nvSpPr>
+        <p:spPr>
+          <a:xfrm>
+            <a:off x="411480" y="4681728"/>
+            <a:ext cx="2743200" cy="228600"/>
+          </a:xfrm>
+          <a:prstGeom prst="rect">
+            <a:avLst/>
+          </a:prstGeom>
+          <a:noFill/>
+          <a:ln/>
+        </p:spPr>
+        <p:txBody>
+          <a:bodyPr wrap="square" lIns="0" tIns="0" rIns="0" bIns="0" rtlCol="0" anchor="ctr"/>
+          <a:lstStyle/>
+          <a:p>
+            <a:pPr indent="0" marL="0">
+              <a:buNone/>
+            </a:pPr>
+            <a:r>
+              <a:rPr lang="en-US" sz="800" b="1" spc="200" kern="0" dirty="0">
+                <a:solidFill>
+                  <a:srgbClr val="566A85"/>
+                </a:solidFill>
+                <a:latin typeface="Arial" pitchFamily="34" charset="0"/>
+                <a:ea typeface="Arial" pitchFamily="34" charset="-122"/>
+                <a:cs typeface="Arial" pitchFamily="34" charset="-120"/>
+              </a:rPr>
+              <a:t>JORNADA DE DADOS</a:t>
+            </a:r>
+            <a:endParaRPr lang="en-US" sz="800" dirty="0"/>
+          </a:p>
+        </p:txBody>
+      </p:sp>
+    </p:spTree>
+  </p:cSld>
+  <p:clrMapOvr>
+    <a:masterClrMapping/>
+  </p:clrMapOvr>
+</p:sld>
+</file>
+
+<file path=ppt/slides/slide44.xml><?xml version="1.0" encoding="utf-8"?>
+<p:sld xmlns:a="http://schemas.openxmlformats.org/drawingml/2006/main" xmlns:p="http://schemas.openxmlformats.org/presentationml/2006/main" xmlns:r="http://schemas.openxmlformats.org/officeDocument/2006/relationships">
+  <p:cSld>
+    <p:spTree>
+      <p:nvGrpSpPr>
+        <p:cNvPr id="1" name=""/>
+        <p:cNvGrpSpPr/>
+        <p:nvPr/>
+      </p:nvGrpSpPr>
+      <p:grpSpPr/>
+      <p:sp>
+        <p:nvSpPr>
+          <p:cNvPr id="2" name="Text 0"/>
+          <p:cNvSpPr/>
+          <p:nvPr/>
+        </p:nvSpPr>
+        <p:spPr>
+          <a:xfrm>
+            <a:off x="411480" y="411480"/>
+            <a:ext cx="7315200" cy="256032"/>
+          </a:xfrm>
+          <a:prstGeom prst="rect">
+            <a:avLst/>
+          </a:prstGeom>
+          <a:noFill/>
+          <a:ln/>
+        </p:spPr>
+        <p:txBody>
+          <a:bodyPr wrap="square" lIns="0" tIns="0" rIns="0" bIns="0" rtlCol="0" anchor="ctr"/>
+          <a:lstStyle/>
+          <a:p>
+            <a:pPr indent="0" marL="0">
+              <a:buNone/>
+            </a:pPr>
+            <a:r>
+              <a:rPr lang="en-US" sz="1100" b="1" spc="160" kern="0" dirty="0">
+                <a:solidFill>
+                  <a:srgbClr val="3B9DF5"/>
+                </a:solidFill>
+                <a:latin typeface="Arial" pitchFamily="34" charset="0"/>
+                <a:ea typeface="Arial" pitchFamily="34" charset="-122"/>
+                <a:cs typeface="Arial" pitchFamily="34" charset="-120"/>
+              </a:rPr>
+              <a:t>ARQUITETURA MEDALLION</a:t>
+            </a:r>
+            <a:endParaRPr lang="en-US" sz="1100" dirty="0"/>
+          </a:p>
+        </p:txBody>
+      </p:sp>
+      <p:sp>
+        <p:nvSpPr>
+          <p:cNvPr id="3" name="Text 1"/>
+          <p:cNvSpPr/>
+          <p:nvPr/>
+        </p:nvSpPr>
+        <p:spPr>
+          <a:xfrm>
+            <a:off x="411480" y="822960"/>
+            <a:ext cx="8321040" cy="1005840"/>
+          </a:xfrm>
+          <a:prstGeom prst="rect">
+            <a:avLst/>
+          </a:prstGeom>
+          <a:noFill/>
+          <a:ln/>
+        </p:spPr>
+        <p:txBody>
+          <a:bodyPr wrap="square" lIns="0" tIns="0" rIns="0" bIns="0" rtlCol="0" anchor="ctr"/>
+          <a:lstStyle/>
+          <a:p>
+            <a:pPr indent="0" marL="0">
+              <a:lnSpc>
+                <a:spcPts val="4000"/>
+              </a:lnSpc>
+              <a:buNone/>
+            </a:pPr>
+            <a:r>
+              <a:rPr lang="en-US" sz="3200" b="1" dirty="0">
+                <a:solidFill>
+                  <a:srgbClr val="FFFFFF"/>
+                </a:solidFill>
+                <a:latin typeface="Arial" pitchFamily="34" charset="0"/>
+                <a:ea typeface="Arial" pitchFamily="34" charset="-122"/>
+                <a:cs typeface="Arial" pitchFamily="34" charset="-120"/>
+              </a:rPr>
+              <a:t>O que ficou de pé no catálogo</a:t>
+            </a:r>
+            <a:endParaRPr lang="en-US" sz="3200" dirty="0"/>
+          </a:p>
+        </p:txBody>
+      </p:sp>
+      <p:sp>
+        <p:nvSpPr>
+          <p:cNvPr id="4" name="Shape 2"/>
+          <p:cNvSpPr/>
+          <p:nvPr/>
+        </p:nvSpPr>
+        <p:spPr>
+          <a:xfrm>
+            <a:off x="411480" y="2194560"/>
+            <a:ext cx="1956816" cy="1737360"/>
+          </a:xfrm>
+          <a:prstGeom prst="roundRect">
+            <a:avLst>
+              <a:gd name="adj" fmla="val 2632"/>
+            </a:avLst>
+          </a:prstGeom>
+          <a:solidFill>
+            <a:srgbClr val="0D1522"/>
+          </a:solidFill>
+          <a:ln w="12700">
+            <a:solidFill>
+              <a:srgbClr val="1F3A5A"/>
+            </a:solidFill>
+            <a:prstDash val="solid"/>
+          </a:ln>
+        </p:spPr>
+      </p:sp>
+      <p:sp>
+        <p:nvSpPr>
+          <p:cNvPr id="5" name="Text 3"/>
+          <p:cNvSpPr/>
+          <p:nvPr/>
+        </p:nvSpPr>
+        <p:spPr>
+          <a:xfrm>
+            <a:off x="612648" y="2359152"/>
+            <a:ext cx="1554480" cy="274320"/>
+          </a:xfrm>
+          <a:prstGeom prst="rect">
+            <a:avLst/>
+          </a:prstGeom>
+          <a:noFill/>
+          <a:ln/>
+        </p:spPr>
+        <p:txBody>
+          <a:bodyPr wrap="square" lIns="0" tIns="0" rIns="0" bIns="0" rtlCol="0" anchor="ctr"/>
+          <a:lstStyle/>
+          <a:p>
+            <a:pPr indent="0" marL="0">
+              <a:buNone/>
+            </a:pPr>
+            <a:r>
+              <a:rPr lang="en-US" sz="1100" b="1" dirty="0">
+                <a:solidFill>
+                  <a:srgbClr val="3B9DF5"/>
+                </a:solidFill>
+                <a:latin typeface="Arial" pitchFamily="34" charset="0"/>
+                <a:ea typeface="Arial" pitchFamily="34" charset="-122"/>
+                <a:cs typeface="Arial" pitchFamily="34" charset="-120"/>
+              </a:rPr>
+              <a:t>01</a:t>
+            </a:r>
+            <a:endParaRPr lang="en-US" sz="1100" dirty="0"/>
+          </a:p>
+        </p:txBody>
+      </p:sp>
+      <p:sp>
+        <p:nvSpPr>
+          <p:cNvPr id="6" name="Text 4"/>
+          <p:cNvSpPr/>
+          <p:nvPr/>
+        </p:nvSpPr>
+        <p:spPr>
+          <a:xfrm>
+            <a:off x="612648" y="2633472"/>
+            <a:ext cx="1554480" cy="512064"/>
+          </a:xfrm>
+          <a:prstGeom prst="rect">
+            <a:avLst/>
+          </a:prstGeom>
+          <a:noFill/>
+          <a:ln/>
+        </p:spPr>
+        <p:txBody>
+          <a:bodyPr wrap="square" lIns="0" tIns="0" rIns="0" bIns="0" rtlCol="0" anchor="t"/>
+          <a:lstStyle/>
+          <a:p>
+            <a:pPr indent="0" marL="0">
+              <a:lnSpc>
+                <a:spcPts val="1800"/>
+              </a:lnSpc>
+              <a:buNone/>
+            </a:pPr>
+            <a:r>
+              <a:rPr lang="en-US" sz="1450" b="1" dirty="0">
+                <a:solidFill>
+                  <a:srgbClr val="FFFFFF"/>
+                </a:solidFill>
+                <a:latin typeface="Arial" pitchFamily="34" charset="0"/>
+                <a:ea typeface="Arial" pitchFamily="34" charset="-122"/>
+                <a:cs typeface="Arial" pitchFamily="34" charset="-120"/>
+              </a:rPr>
+              <a:t>bronze</a:t>
+            </a:r>
+            <a:endParaRPr lang="en-US" sz="1450" dirty="0"/>
+          </a:p>
+        </p:txBody>
+      </p:sp>
+      <p:sp>
+        <p:nvSpPr>
+          <p:cNvPr id="7" name="Text 5"/>
+          <p:cNvSpPr/>
+          <p:nvPr/>
+        </p:nvSpPr>
+        <p:spPr>
+          <a:xfrm>
+            <a:off x="612648" y="3163824"/>
+            <a:ext cx="1554480" cy="621792"/>
+          </a:xfrm>
+          <a:prstGeom prst="rect">
+            <a:avLst/>
+          </a:prstGeom>
+          <a:noFill/>
+          <a:ln/>
+        </p:spPr>
+        <p:txBody>
+          <a:bodyPr wrap="square" lIns="0" tIns="0" rIns="0" bIns="0" rtlCol="0" anchor="ctr"/>
+          <a:lstStyle/>
+          <a:p>
+            <a:pPr indent="0" marL="0">
+              <a:lnSpc>
+                <a:spcPts val="1400"/>
+              </a:lnSpc>
+              <a:buNone/>
+            </a:pPr>
+            <a:r>
+              <a:rPr lang="en-US" sz="1050" dirty="0">
+                <a:solidFill>
+                  <a:srgbClr val="9BAAC0"/>
+                </a:solidFill>
+                <a:latin typeface="Arial" pitchFamily="34" charset="0"/>
+                <a:ea typeface="Arial" pitchFamily="34" charset="-122"/>
+                <a:cs typeface="Arial" pitchFamily="34" charset="-120"/>
+              </a:rPr>
+              <a:t>10 tabelas, 313.551 linhas. Tudo texto, sujeira preservada</a:t>
+            </a:r>
+            <a:endParaRPr lang="en-US" sz="1050" dirty="0"/>
+          </a:p>
+        </p:txBody>
+      </p:sp>
+      <p:sp>
+        <p:nvSpPr>
+          <p:cNvPr id="8" name="Shape 6"/>
+          <p:cNvSpPr/>
+          <p:nvPr/>
+        </p:nvSpPr>
+        <p:spPr>
+          <a:xfrm>
+            <a:off x="2532888" y="2194560"/>
+            <a:ext cx="1956816" cy="1737360"/>
+          </a:xfrm>
+          <a:prstGeom prst="roundRect">
+            <a:avLst>
+              <a:gd name="adj" fmla="val 2632"/>
+            </a:avLst>
+          </a:prstGeom>
+          <a:solidFill>
+            <a:srgbClr val="0D1522"/>
+          </a:solidFill>
+          <a:ln w="12700">
+            <a:solidFill>
+              <a:srgbClr val="1F3A5A"/>
+            </a:solidFill>
+            <a:prstDash val="solid"/>
+          </a:ln>
+        </p:spPr>
+      </p:sp>
+      <p:sp>
+        <p:nvSpPr>
+          <p:cNvPr id="9" name="Text 7"/>
+          <p:cNvSpPr/>
+          <p:nvPr/>
+        </p:nvSpPr>
+        <p:spPr>
+          <a:xfrm>
+            <a:off x="2734056" y="2359152"/>
+            <a:ext cx="1554480" cy="274320"/>
+          </a:xfrm>
+          <a:prstGeom prst="rect">
+            <a:avLst/>
+          </a:prstGeom>
+          <a:noFill/>
+          <a:ln/>
+        </p:spPr>
+        <p:txBody>
+          <a:bodyPr wrap="square" lIns="0" tIns="0" rIns="0" bIns="0" rtlCol="0" anchor="ctr"/>
+          <a:lstStyle/>
+          <a:p>
+            <a:pPr indent="0" marL="0">
+              <a:buNone/>
+            </a:pPr>
+            <a:r>
+              <a:rPr lang="en-US" sz="1100" b="1" dirty="0">
+                <a:solidFill>
+                  <a:srgbClr val="3B9DF5"/>
+                </a:solidFill>
+                <a:latin typeface="Arial" pitchFamily="34" charset="0"/>
+                <a:ea typeface="Arial" pitchFamily="34" charset="-122"/>
+                <a:cs typeface="Arial" pitchFamily="34" charset="-120"/>
+              </a:rPr>
+              <a:t>02</a:t>
+            </a:r>
+            <a:endParaRPr lang="en-US" sz="1100" dirty="0"/>
+          </a:p>
+        </p:txBody>
+      </p:sp>
+      <p:sp>
+        <p:nvSpPr>
+          <p:cNvPr id="10" name="Text 8"/>
+          <p:cNvSpPr/>
+          <p:nvPr/>
+        </p:nvSpPr>
+        <p:spPr>
+          <a:xfrm>
+            <a:off x="2734056" y="2633472"/>
+            <a:ext cx="1554480" cy="512064"/>
+          </a:xfrm>
+          <a:prstGeom prst="rect">
+            <a:avLst/>
+          </a:prstGeom>
+          <a:noFill/>
+          <a:ln/>
+        </p:spPr>
+        <p:txBody>
+          <a:bodyPr wrap="square" lIns="0" tIns="0" rIns="0" bIns="0" rtlCol="0" anchor="t"/>
+          <a:lstStyle/>
+          <a:p>
+            <a:pPr indent="0" marL="0">
+              <a:lnSpc>
+                <a:spcPts val="1800"/>
+              </a:lnSpc>
+              <a:buNone/>
+            </a:pPr>
+            <a:r>
+              <a:rPr lang="en-US" sz="1450" b="1" dirty="0">
+                <a:solidFill>
+                  <a:srgbClr val="FFFFFF"/>
+                </a:solidFill>
+                <a:latin typeface="Arial" pitchFamily="34" charset="0"/>
+                <a:ea typeface="Arial" pitchFamily="34" charset="-122"/>
+                <a:cs typeface="Arial" pitchFamily="34" charset="-120"/>
+              </a:rPr>
+              <a:t>silver</a:t>
+            </a:r>
+            <a:endParaRPr lang="en-US" sz="1450" dirty="0"/>
+          </a:p>
+        </p:txBody>
+      </p:sp>
+      <p:sp>
+        <p:nvSpPr>
+          <p:cNvPr id="11" name="Text 9"/>
+          <p:cNvSpPr/>
+          <p:nvPr/>
+        </p:nvSpPr>
+        <p:spPr>
+          <a:xfrm>
+            <a:off x="2734056" y="3163824"/>
+            <a:ext cx="1554480" cy="621792"/>
+          </a:xfrm>
+          <a:prstGeom prst="rect">
+            <a:avLst/>
+          </a:prstGeom>
+          <a:noFill/>
+          <a:ln/>
+        </p:spPr>
+        <p:txBody>
+          <a:bodyPr wrap="square" lIns="0" tIns="0" rIns="0" bIns="0" rtlCol="0" anchor="ctr"/>
+          <a:lstStyle/>
+          <a:p>
+            <a:pPr indent="0" marL="0">
+              <a:lnSpc>
+                <a:spcPts val="1400"/>
+              </a:lnSpc>
+              <a:buNone/>
+            </a:pPr>
+            <a:r>
+              <a:rPr lang="en-US" sz="1050" dirty="0">
+                <a:solidFill>
+                  <a:srgbClr val="9BAAC0"/>
+                </a:solidFill>
+                <a:latin typeface="Arial" pitchFamily="34" charset="0"/>
+                <a:ea typeface="Arial" pitchFamily="34" charset="-122"/>
+                <a:cs typeface="Arial" pitchFamily="34" charset="-120"/>
+              </a:rPr>
+              <a:t>Criada e vazia. É o trabalho de amanhã</a:t>
+            </a:r>
+            <a:endParaRPr lang="en-US" sz="1050" dirty="0"/>
+          </a:p>
+        </p:txBody>
+      </p:sp>
+      <p:sp>
+        <p:nvSpPr>
+          <p:cNvPr id="12" name="Shape 10"/>
+          <p:cNvSpPr/>
+          <p:nvPr/>
+        </p:nvSpPr>
+        <p:spPr>
+          <a:xfrm>
+            <a:off x="4654296" y="2194560"/>
+            <a:ext cx="1956816" cy="1737360"/>
+          </a:xfrm>
+          <a:prstGeom prst="roundRect">
+            <a:avLst>
+              <a:gd name="adj" fmla="val 2632"/>
+            </a:avLst>
+          </a:prstGeom>
+          <a:solidFill>
+            <a:srgbClr val="0D1522"/>
+          </a:solidFill>
+          <a:ln w="12700">
+            <a:solidFill>
+              <a:srgbClr val="1F3A5A"/>
+            </a:solidFill>
+            <a:prstDash val="solid"/>
+          </a:ln>
+        </p:spPr>
+      </p:sp>
+      <p:sp>
+        <p:nvSpPr>
+          <p:cNvPr id="13" name="Text 11"/>
+          <p:cNvSpPr/>
+          <p:nvPr/>
+        </p:nvSpPr>
+        <p:spPr>
+          <a:xfrm>
+            <a:off x="4855464" y="2359152"/>
+            <a:ext cx="1554480" cy="274320"/>
+          </a:xfrm>
+          <a:prstGeom prst="rect">
+            <a:avLst/>
+          </a:prstGeom>
+          <a:noFill/>
+          <a:ln/>
+        </p:spPr>
+        <p:txBody>
+          <a:bodyPr wrap="square" lIns="0" tIns="0" rIns="0" bIns="0" rtlCol="0" anchor="ctr"/>
+          <a:lstStyle/>
+          <a:p>
+            <a:pPr indent="0" marL="0">
+              <a:buNone/>
+            </a:pPr>
+            <a:r>
+              <a:rPr lang="en-US" sz="1100" b="1" dirty="0">
+                <a:solidFill>
+                  <a:srgbClr val="3B9DF5"/>
+                </a:solidFill>
+                <a:latin typeface="Arial" pitchFamily="34" charset="0"/>
+                <a:ea typeface="Arial" pitchFamily="34" charset="-122"/>
+                <a:cs typeface="Arial" pitchFamily="34" charset="-120"/>
+              </a:rPr>
+              <a:t>03</a:t>
+            </a:r>
+            <a:endParaRPr lang="en-US" sz="1100" dirty="0"/>
+          </a:p>
+        </p:txBody>
+      </p:sp>
+      <p:sp>
+        <p:nvSpPr>
+          <p:cNvPr id="14" name="Text 12"/>
+          <p:cNvSpPr/>
+          <p:nvPr/>
+        </p:nvSpPr>
+        <p:spPr>
+          <a:xfrm>
+            <a:off x="4855464" y="2633472"/>
+            <a:ext cx="1554480" cy="512064"/>
+          </a:xfrm>
+          <a:prstGeom prst="rect">
+            <a:avLst/>
+          </a:prstGeom>
+          <a:noFill/>
+          <a:ln/>
+        </p:spPr>
+        <p:txBody>
+          <a:bodyPr wrap="square" lIns="0" tIns="0" rIns="0" bIns="0" rtlCol="0" anchor="t"/>
+          <a:lstStyle/>
+          <a:p>
+            <a:pPr indent="0" marL="0">
+              <a:lnSpc>
+                <a:spcPts val="1800"/>
+              </a:lnSpc>
+              <a:buNone/>
+            </a:pPr>
+            <a:r>
+              <a:rPr lang="en-US" sz="1450" b="1" dirty="0">
+                <a:solidFill>
+                  <a:srgbClr val="FFFFFF"/>
+                </a:solidFill>
+                <a:latin typeface="Arial" pitchFamily="34" charset="0"/>
+                <a:ea typeface="Arial" pitchFamily="34" charset="-122"/>
+                <a:cs typeface="Arial" pitchFamily="34" charset="-120"/>
+              </a:rPr>
+              <a:t>gold</a:t>
+            </a:r>
+            <a:endParaRPr lang="en-US" sz="1450" dirty="0"/>
+          </a:p>
+        </p:txBody>
+      </p:sp>
+      <p:sp>
+        <p:nvSpPr>
+          <p:cNvPr id="15" name="Text 13"/>
+          <p:cNvSpPr/>
+          <p:nvPr/>
+        </p:nvSpPr>
+        <p:spPr>
+          <a:xfrm>
+            <a:off x="4855464" y="3163824"/>
+            <a:ext cx="1554480" cy="621792"/>
+          </a:xfrm>
+          <a:prstGeom prst="rect">
+            <a:avLst/>
+          </a:prstGeom>
+          <a:noFill/>
+          <a:ln/>
+        </p:spPr>
+        <p:txBody>
+          <a:bodyPr wrap="square" lIns="0" tIns="0" rIns="0" bIns="0" rtlCol="0" anchor="ctr"/>
+          <a:lstStyle/>
+          <a:p>
+            <a:pPr indent="0" marL="0">
+              <a:lnSpc>
+                <a:spcPts val="1400"/>
+              </a:lnSpc>
+              <a:buNone/>
+            </a:pPr>
+            <a:r>
+              <a:rPr lang="en-US" sz="1050" dirty="0">
+                <a:solidFill>
+                  <a:srgbClr val="9BAAC0"/>
+                </a:solidFill>
+                <a:latin typeface="Arial" pitchFamily="34" charset="0"/>
+                <a:ea typeface="Arial" pitchFamily="34" charset="-122"/>
+                <a:cs typeface="Arial" pitchFamily="34" charset="-120"/>
+              </a:rPr>
+              <a:t>Criada e vazia. Fatos e dimensões vêm depois</a:t>
+            </a:r>
+            <a:endParaRPr lang="en-US" sz="1050" dirty="0"/>
+          </a:p>
+        </p:txBody>
+      </p:sp>
+      <p:sp>
+        <p:nvSpPr>
+          <p:cNvPr id="16" name="Shape 14"/>
+          <p:cNvSpPr/>
+          <p:nvPr/>
+        </p:nvSpPr>
+        <p:spPr>
+          <a:xfrm>
+            <a:off x="6775704" y="2194560"/>
+            <a:ext cx="1956816" cy="1737360"/>
+          </a:xfrm>
+          <a:prstGeom prst="roundRect">
+            <a:avLst>
+              <a:gd name="adj" fmla="val 2632"/>
+            </a:avLst>
+          </a:prstGeom>
+          <a:solidFill>
+            <a:srgbClr val="0D1522"/>
+          </a:solidFill>
+          <a:ln w="12700">
+            <a:solidFill>
+              <a:srgbClr val="1F3A5A"/>
+            </a:solidFill>
+            <a:prstDash val="solid"/>
+          </a:ln>
+        </p:spPr>
+      </p:sp>
+      <p:sp>
+        <p:nvSpPr>
+          <p:cNvPr id="17" name="Text 15"/>
+          <p:cNvSpPr/>
+          <p:nvPr/>
+        </p:nvSpPr>
+        <p:spPr>
+          <a:xfrm>
+            <a:off x="6976872" y="2359152"/>
+            <a:ext cx="1554480" cy="274320"/>
+          </a:xfrm>
+          <a:prstGeom prst="rect">
+            <a:avLst/>
+          </a:prstGeom>
+          <a:noFill/>
+          <a:ln/>
+        </p:spPr>
+        <p:txBody>
+          <a:bodyPr wrap="square" lIns="0" tIns="0" rIns="0" bIns="0" rtlCol="0" anchor="ctr"/>
+          <a:lstStyle/>
+          <a:p>
+            <a:pPr indent="0" marL="0">
+              <a:buNone/>
+            </a:pPr>
+            <a:r>
+              <a:rPr lang="en-US" sz="1100" b="1" dirty="0">
+                <a:solidFill>
+                  <a:srgbClr val="3B9DF5"/>
+                </a:solidFill>
+                <a:latin typeface="Arial" pitchFamily="34" charset="0"/>
+                <a:ea typeface="Arial" pitchFamily="34" charset="-122"/>
+                <a:cs typeface="Arial" pitchFamily="34" charset="-120"/>
+              </a:rPr>
+              <a:t>04</a:t>
+            </a:r>
+            <a:endParaRPr lang="en-US" sz="1100" dirty="0"/>
+          </a:p>
+        </p:txBody>
+      </p:sp>
+      <p:sp>
+        <p:nvSpPr>
+          <p:cNvPr id="18" name="Text 16"/>
+          <p:cNvSpPr/>
+          <p:nvPr/>
+        </p:nvSpPr>
+        <p:spPr>
+          <a:xfrm>
+            <a:off x="6976872" y="2633472"/>
+            <a:ext cx="1554480" cy="512064"/>
+          </a:xfrm>
+          <a:prstGeom prst="rect">
+            <a:avLst/>
+          </a:prstGeom>
+          <a:noFill/>
+          <a:ln/>
+        </p:spPr>
+        <p:txBody>
+          <a:bodyPr wrap="square" lIns="0" tIns="0" rIns="0" bIns="0" rtlCol="0" anchor="t"/>
+          <a:lstStyle/>
+          <a:p>
+            <a:pPr indent="0" marL="0">
+              <a:lnSpc>
+                <a:spcPts val="1800"/>
+              </a:lnSpc>
+              <a:buNone/>
+            </a:pPr>
+            <a:r>
+              <a:rPr lang="en-US" sz="1450" b="1" dirty="0">
+                <a:solidFill>
+                  <a:srgbClr val="FFFFFF"/>
+                </a:solidFill>
+                <a:latin typeface="Arial" pitchFamily="34" charset="0"/>
+                <a:ea typeface="Arial" pitchFamily="34" charset="-122"/>
+                <a:cs typeface="Arial" pitchFamily="34" charset="-120"/>
+              </a:rPr>
+              <a:t>job</a:t>
+            </a:r>
+            <a:endParaRPr lang="en-US" sz="1450" dirty="0"/>
+          </a:p>
+        </p:txBody>
+      </p:sp>
+      <p:sp>
+        <p:nvSpPr>
+          <p:cNvPr id="19" name="Text 17"/>
+          <p:cNvSpPr/>
+          <p:nvPr/>
+        </p:nvSpPr>
+        <p:spPr>
+          <a:xfrm>
+            <a:off x="6976872" y="3163824"/>
+            <a:ext cx="1554480" cy="621792"/>
+          </a:xfrm>
+          <a:prstGeom prst="rect">
+            <a:avLst/>
+          </a:prstGeom>
+          <a:noFill/>
+          <a:ln/>
+        </p:spPr>
+        <p:txBody>
+          <a:bodyPr wrap="square" lIns="0" tIns="0" rIns="0" bIns="0" rtlCol="0" anchor="ctr"/>
+          <a:lstStyle/>
+          <a:p>
+            <a:pPr indent="0" marL="0">
+              <a:lnSpc>
+                <a:spcPts val="1400"/>
+              </a:lnSpc>
+              <a:buNone/>
+            </a:pPr>
+            <a:r>
+              <a:rPr lang="en-US" sz="1050" dirty="0">
+                <a:solidFill>
+                  <a:srgbClr val="9BAAC0"/>
+                </a:solidFill>
+                <a:latin typeface="Arial" pitchFamily="34" charset="0"/>
+                <a:ea typeface="Arial" pitchFamily="34" charset="-122"/>
+                <a:cs typeface="Arial" pitchFamily="34" charset="-120"/>
+              </a:rPr>
+              <a:t>Deploy por bundle, 2 tarefas, 9 verificações passando</a:t>
+            </a:r>
+            <a:endParaRPr lang="en-US" sz="1050" dirty="0"/>
+          </a:p>
+        </p:txBody>
+      </p:sp>
+      <p:sp>
+        <p:nvSpPr>
+          <p:cNvPr id="20" name="Text 18"/>
+          <p:cNvSpPr/>
+          <p:nvPr/>
+        </p:nvSpPr>
+        <p:spPr>
+          <a:xfrm>
+            <a:off x="411480" y="4681728"/>
+            <a:ext cx="2743200" cy="228600"/>
+          </a:xfrm>
+          <a:prstGeom prst="rect">
+            <a:avLst/>
+          </a:prstGeom>
+          <a:noFill/>
+          <a:ln/>
+        </p:spPr>
+        <p:txBody>
+          <a:bodyPr wrap="square" lIns="0" tIns="0" rIns="0" bIns="0" rtlCol="0" anchor="ctr"/>
+          <a:lstStyle/>
+          <a:p>
+            <a:pPr indent="0" marL="0">
+              <a:buNone/>
+            </a:pPr>
+            <a:r>
+              <a:rPr lang="en-US" sz="800" b="1" spc="200" kern="0" dirty="0">
+                <a:solidFill>
+                  <a:srgbClr val="566A85"/>
+                </a:solidFill>
+                <a:latin typeface="Arial" pitchFamily="34" charset="0"/>
+                <a:ea typeface="Arial" pitchFamily="34" charset="-122"/>
+                <a:cs typeface="Arial" pitchFamily="34" charset="-120"/>
+              </a:rPr>
+              <a:t>JORNADA DE DADOS</a:t>
+            </a:r>
+            <a:endParaRPr lang="en-US" sz="800" dirty="0"/>
+          </a:p>
+        </p:txBody>
+      </p:sp>
+    </p:spTree>
+  </p:cSld>
+  <p:clrMapOvr>
+    <a:masterClrMapping/>
+  </p:clrMapOvr>
+</p:sld>
+</file>
+
+<file path=ppt/slides/slide45.xml><?xml version="1.0" encoding="utf-8"?>
 <p:sld xmlns:a="http://schemas.openxmlformats.org/drawingml/2006/main" xmlns:r="http://schemas.openxmlformats.org/officeDocument/2006/relationships" xmlns:p="http://schemas.openxmlformats.org/presentationml/2006/main">
   <p:cSld name="Slide 42">
     <p:bg>
@@ -30183,7 +32159,7 @@
 </p:sld>
 </file>
 
-<file path=ppt/slides/slide43.xml><?xml version="1.0" encoding="utf-8"?>
+<file path=ppt/slides/slide46.xml><?xml version="1.0" encoding="utf-8"?>
 <p:sld xmlns:a="http://schemas.openxmlformats.org/drawingml/2006/main" xmlns:r="http://schemas.openxmlformats.org/officeDocument/2006/relationships" xmlns:p="http://schemas.openxmlformats.org/presentationml/2006/main">
   <p:cSld name="Slide 43">
     <p:bg>
@@ -30631,7 +32607,7 @@
 </p:sld>
 </file>
 
-<file path=ppt/slides/slide44.xml><?xml version="1.0" encoding="utf-8"?>
+<file path=ppt/slides/slide47.xml><?xml version="1.0" encoding="utf-8"?>
 <p:sld xmlns:a="http://schemas.openxmlformats.org/drawingml/2006/main" xmlns:r="http://schemas.openxmlformats.org/officeDocument/2006/relationships" xmlns:p="http://schemas.openxmlformats.org/presentationml/2006/main">
   <p:cSld name="Slide 44">
     <p:bg>
@@ -32103,7 +34079,7 @@
 </p:sld>
 </file>
 
-<file path=ppt/slides/slide45.xml><?xml version="1.0" encoding="utf-8"?>
+<file path=ppt/slides/slide48.xml><?xml version="1.0" encoding="utf-8"?>
 <p:sld xmlns:a="http://schemas.openxmlformats.org/drawingml/2006/main" xmlns:r="http://schemas.openxmlformats.org/officeDocument/2006/relationships" xmlns:p="http://schemas.openxmlformats.org/presentationml/2006/main">
   <p:cSld name="Slide 45">
     <p:bg>
@@ -32661,7 +34637,7 @@
 </p:sld>
 </file>
 
-<file path=ppt/slides/slide46.xml><?xml version="1.0" encoding="utf-8"?>
+<file path=ppt/slides/slide49.xml><?xml version="1.0" encoding="utf-8"?>
 <p:sld xmlns:a="http://schemas.openxmlformats.org/drawingml/2006/main" xmlns:r="http://schemas.openxmlformats.org/officeDocument/2006/relationships" xmlns:p="http://schemas.openxmlformats.org/presentationml/2006/main">
   <p:cSld name="Slide 46">
     <p:bg>
@@ -33393,1483 +35369,6 @@
               <a:t>Serverless = yes é obrigatório. O Free Edition só oferece compute serverless.</a:t>
             </a:r>
             <a:endParaRPr lang="en-US" sz="1200" dirty="0"/>
-          </a:p>
-        </p:txBody>
-      </p:sp>
-    </p:spTree>
-  </p:cSld>
-  <p:clrMapOvr>
-    <a:masterClrMapping/>
-  </p:clrMapOvr>
-</p:sld>
-</file>
-
-<file path=ppt/slides/slide47.xml><?xml version="1.0" encoding="utf-8"?>
-<p:sld xmlns:a="http://schemas.openxmlformats.org/drawingml/2006/main" xmlns:r="http://schemas.openxmlformats.org/officeDocument/2006/relationships" xmlns:p="http://schemas.openxmlformats.org/presentationml/2006/main">
-  <p:cSld name="Slide 47">
-    <p:bg>
-      <p:bgPr>
-        <a:solidFill>
-          <a:srgbClr val="070C16"/>
-        </a:solidFill>
-      </p:bgPr>
-    </p:bg>
-    <p:spTree>
-      <p:nvGrpSpPr>
-        <p:cNvPr id="1" name=""/>
-        <p:cNvGrpSpPr/>
-        <p:nvPr/>
-      </p:nvGrpSpPr>
-      <p:grpSpPr>
-        <a:xfrm>
-          <a:off x="0" y="0"/>
-          <a:ext cx="0" cy="0"/>
-          <a:chOff x="0" y="0"/>
-          <a:chExt cx="0" cy="0"/>
-        </a:xfrm>
-      </p:grpSpPr>
-      <p:sp>
-        <p:nvSpPr>
-          <p:cNvPr id="2" name="Text 0"/>
-          <p:cNvSpPr/>
-          <p:nvPr/>
-        </p:nvSpPr>
-        <p:spPr>
-          <a:xfrm>
-            <a:off x="411480" y="411480"/>
-            <a:ext cx="7315200" cy="256032"/>
-          </a:xfrm>
-          <a:prstGeom prst="rect">
-            <a:avLst/>
-          </a:prstGeom>
-          <a:noFill/>
-          <a:ln/>
-        </p:spPr>
-        <p:txBody>
-          <a:bodyPr wrap="square" lIns="0" tIns="0" rIns="0" bIns="0" rtlCol="0" anchor="ctr"/>
-          <a:lstStyle/>
-          <a:p>
-            <a:pPr indent="0" marL="0">
-              <a:buNone/>
-            </a:pPr>
-            <a:r>
-              <a:rPr lang="en-US" sz="1100" b="1" spc="160" kern="0" dirty="0">
-                <a:solidFill>
-                  <a:srgbClr val="3B9DF5"/>
-                </a:solidFill>
-                <a:latin typeface="Arial" pitchFamily="34" charset="0"/>
-                <a:ea typeface="Arial" pitchFamily="34" charset="-122"/>
-                <a:cs typeface="Arial" pitchFamily="34" charset="-120"/>
-              </a:rPr>
-              <a:t>PASSOS 05 E 06</a:t>
-            </a:r>
-            <a:endParaRPr lang="en-US" sz="1100" dirty="0"/>
-          </a:p>
-        </p:txBody>
-      </p:sp>
-      <p:sp>
-        <p:nvSpPr>
-          <p:cNvPr id="3" name="Text 1"/>
-          <p:cNvSpPr/>
-          <p:nvPr/>
-        </p:nvSpPr>
-        <p:spPr>
-          <a:xfrm>
-            <a:off x="411480" y="822960"/>
-            <a:ext cx="8321040" cy="1005840"/>
-          </a:xfrm>
-          <a:prstGeom prst="rect">
-            <a:avLst/>
-          </a:prstGeom>
-          <a:noFill/>
-          <a:ln/>
-        </p:spPr>
-        <p:txBody>
-          <a:bodyPr wrap="square" lIns="0" tIns="0" rIns="0" bIns="0" rtlCol="0" anchor="ctr"/>
-          <a:lstStyle/>
-          <a:p>
-            <a:pPr indent="0" marL="0">
-              <a:lnSpc>
-                <a:spcPts val="4000"/>
-              </a:lnSpc>
-              <a:buNone/>
-            </a:pPr>
-            <a:r>
-              <a:rPr lang="en-US" sz="3200" b="1" dirty="0">
-                <a:solidFill>
-                  <a:srgbClr val="FFFFFF"/>
-                </a:solidFill>
-                <a:latin typeface="Arial" pitchFamily="34" charset="0"/>
-                <a:ea typeface="Arial" pitchFamily="34" charset="-122"/>
-                <a:cs typeface="Arial" pitchFamily="34" charset="-120"/>
-              </a:rPr>
-              <a:t>Ambiente Python e Git</a:t>
-            </a:r>
-            <a:endParaRPr lang="en-US" sz="3200" dirty="0"/>
-          </a:p>
-        </p:txBody>
-      </p:sp>
-      <p:sp>
-        <p:nvSpPr>
-          <p:cNvPr id="4" name="Shape 2"/>
-          <p:cNvSpPr/>
-          <p:nvPr/>
-        </p:nvSpPr>
-        <p:spPr>
-          <a:xfrm>
-            <a:off x="411480" y="1874520"/>
-            <a:ext cx="8321040" cy="1207008"/>
-          </a:xfrm>
-          <a:prstGeom prst="roundRect">
-            <a:avLst>
-              <a:gd name="adj" fmla="val 3788"/>
-            </a:avLst>
-          </a:prstGeom>
-          <a:solidFill>
-            <a:srgbClr val="0D1522"/>
-          </a:solidFill>
-          <a:ln w="13970">
-            <a:solidFill>
-              <a:srgbClr val="1F3A5A"/>
-            </a:solidFill>
-            <a:prstDash val="solid"/>
-          </a:ln>
-        </p:spPr>
-      </p:sp>
-      <p:sp>
-        <p:nvSpPr>
-          <p:cNvPr id="5" name="Text 3"/>
-          <p:cNvSpPr/>
-          <p:nvPr/>
-        </p:nvSpPr>
-        <p:spPr>
-          <a:xfrm>
-            <a:off x="685800" y="1993392"/>
-            <a:ext cx="7772400" cy="1005840"/>
-          </a:xfrm>
-          <a:prstGeom prst="rect">
-            <a:avLst/>
-          </a:prstGeom>
-          <a:noFill/>
-          <a:ln/>
-        </p:spPr>
-        <p:txBody>
-          <a:bodyPr wrap="square" lIns="0" tIns="0" rIns="0" bIns="0" rtlCol="0" anchor="ctr"/>
-          <a:lstStyle/>
-          <a:p>
-            <a:pPr indent="0" marL="0">
-              <a:lnSpc>
-                <a:spcPts val="1500"/>
-              </a:lnSpc>
-              <a:buNone/>
-            </a:pPr>
-            <a:r>
-              <a:rPr lang="en-US" sz="1150" dirty="0">
-                <a:solidFill>
-                  <a:srgbClr val="FFFFFF"/>
-                </a:solidFill>
-                <a:latin typeface="Consolas" pitchFamily="34" charset="0"/>
-                <a:ea typeface="Consolas" pitchFamily="34" charset="-122"/>
-                <a:cs typeface="Consolas" pitchFamily="34" charset="-120"/>
-              </a:rPr>
-              <a:t>cd imersao_agosto</a:t>
-            </a:r>
-            <a:endParaRPr lang="en-US" sz="1150" dirty="0"/>
-          </a:p>
-          <a:p>
-            <a:pPr indent="0" marL="0">
-              <a:lnSpc>
-                <a:spcPts val="1500"/>
-              </a:lnSpc>
-              <a:buNone/>
-            </a:pPr>
-            <a:r>
-              <a:rPr lang="en-US" sz="1150" dirty="0">
-                <a:solidFill>
-                  <a:srgbClr val="FFFFFF"/>
-                </a:solidFill>
-                <a:latin typeface="Consolas" pitchFamily="34" charset="0"/>
-                <a:ea typeface="Consolas" pitchFamily="34" charset="-122"/>
-                <a:cs typeface="Consolas" pitchFamily="34" charset="-120"/>
-              </a:rPr>
-              <a:t>uv venv --python 3.12 --seed</a:t>
-            </a:r>
-            <a:endParaRPr lang="en-US" sz="1150" dirty="0"/>
-          </a:p>
-          <a:p>
-            <a:pPr indent="0" marL="0">
-              <a:lnSpc>
-                <a:spcPts val="1500"/>
-              </a:lnSpc>
-              <a:buNone/>
-            </a:pPr>
-            <a:r>
-              <a:rPr lang="en-US" sz="1150" dirty="0">
-                <a:solidFill>
-                  <a:srgbClr val="FFFFFF"/>
-                </a:solidFill>
-                <a:latin typeface="Consolas" pitchFamily="34" charset="0"/>
-                <a:ea typeface="Consolas" pitchFamily="34" charset="-122"/>
-                <a:cs typeface="Consolas" pitchFamily="34" charset="-120"/>
-              </a:rPr>
-              <a:t>source .venv/bin/activate</a:t>
-            </a:r>
-            <a:endParaRPr lang="en-US" sz="1150" dirty="0"/>
-          </a:p>
-          <a:p>
-            <a:pPr indent="0" marL="0">
-              <a:lnSpc>
-                <a:spcPts val="1500"/>
-              </a:lnSpc>
-              <a:buNone/>
-            </a:pPr>
-            <a:r>
-              <a:rPr lang="en-US" sz="1150" dirty="0">
-                <a:solidFill>
-                  <a:srgbClr val="FFFFFF"/>
-                </a:solidFill>
-                <a:latin typeface="Consolas" pitchFamily="34" charset="0"/>
-                <a:ea typeface="Consolas" pitchFamily="34" charset="-122"/>
-                <a:cs typeface="Consolas" pitchFamily="34" charset="-120"/>
-              </a:rPr>
-              <a:t>uv sync</a:t>
-            </a:r>
-            <a:endParaRPr lang="en-US" sz="1150" dirty="0"/>
-          </a:p>
-        </p:txBody>
-      </p:sp>
-      <p:sp>
-        <p:nvSpPr>
-          <p:cNvPr id="6" name="Shape 4"/>
-          <p:cNvSpPr/>
-          <p:nvPr/>
-        </p:nvSpPr>
-        <p:spPr>
-          <a:xfrm>
-            <a:off x="411480" y="3218688"/>
-            <a:ext cx="8321040" cy="914400"/>
-          </a:xfrm>
-          <a:prstGeom prst="roundRect">
-            <a:avLst>
-              <a:gd name="adj" fmla="val 5000"/>
-            </a:avLst>
-          </a:prstGeom>
-          <a:solidFill>
-            <a:srgbClr val="0D1522"/>
-          </a:solidFill>
-          <a:ln w="13970">
-            <a:solidFill>
-              <a:srgbClr val="1F3A5A"/>
-            </a:solidFill>
-            <a:prstDash val="solid"/>
-          </a:ln>
-        </p:spPr>
-      </p:sp>
-      <p:sp>
-        <p:nvSpPr>
-          <p:cNvPr id="7" name="Text 5"/>
-          <p:cNvSpPr/>
-          <p:nvPr/>
-        </p:nvSpPr>
-        <p:spPr>
-          <a:xfrm>
-            <a:off x="685800" y="3328416"/>
-            <a:ext cx="7772400" cy="731520"/>
-          </a:xfrm>
-          <a:prstGeom prst="rect">
-            <a:avLst/>
-          </a:prstGeom>
-          <a:noFill/>
-          <a:ln/>
-        </p:spPr>
-        <p:txBody>
-          <a:bodyPr wrap="square" lIns="0" tIns="0" rIns="0" bIns="0" rtlCol="0" anchor="ctr"/>
-          <a:lstStyle/>
-          <a:p>
-            <a:pPr indent="0" marL="0">
-              <a:lnSpc>
-                <a:spcPts val="1500"/>
-              </a:lnSpc>
-              <a:buNone/>
-            </a:pPr>
-            <a:r>
-              <a:rPr lang="en-US" sz="1150" dirty="0">
-                <a:solidFill>
-                  <a:srgbClr val="FFFFFF"/>
-                </a:solidFill>
-                <a:latin typeface="Consolas" pitchFamily="34" charset="0"/>
-                <a:ea typeface="Consolas" pitchFamily="34" charset="-122"/>
-                <a:cs typeface="Consolas" pitchFamily="34" charset="-120"/>
-              </a:rPr>
-              <a:t>git init</a:t>
-            </a:r>
-            <a:endParaRPr lang="en-US" sz="1150" dirty="0"/>
-          </a:p>
-          <a:p>
-            <a:pPr indent="0" marL="0">
-              <a:lnSpc>
-                <a:spcPts val="1500"/>
-              </a:lnSpc>
-              <a:buNone/>
-            </a:pPr>
-            <a:r>
-              <a:rPr lang="en-US" sz="1150" dirty="0">
-                <a:solidFill>
-                  <a:srgbClr val="FFFFFF"/>
-                </a:solidFill>
-                <a:latin typeface="Consolas" pitchFamily="34" charset="0"/>
-                <a:ea typeface="Consolas" pitchFamily="34" charset="-122"/>
-                <a:cs typeface="Consolas" pitchFamily="34" charset="-120"/>
-              </a:rPr>
-              <a:t>git add .</a:t>
-            </a:r>
-            <a:endParaRPr lang="en-US" sz="1150" dirty="0"/>
-          </a:p>
-          <a:p>
-            <a:pPr indent="0" marL="0">
-              <a:lnSpc>
-                <a:spcPts val="1500"/>
-              </a:lnSpc>
-              <a:buNone/>
-            </a:pPr>
-            <a:r>
-              <a:rPr lang="en-US" sz="1150" dirty="0">
-                <a:solidFill>
-                  <a:srgbClr val="FFFFFF"/>
-                </a:solidFill>
-                <a:latin typeface="Consolas" pitchFamily="34" charset="0"/>
-                <a:ea typeface="Consolas" pitchFamily="34" charset="-122"/>
-                <a:cs typeface="Consolas" pitchFamily="34" charset="-120"/>
-              </a:rPr>
-              <a:t>git commit -m "setup inicial"</a:t>
-            </a:r>
-            <a:endParaRPr lang="en-US" sz="1150" dirty="0"/>
-          </a:p>
-        </p:txBody>
-      </p:sp>
-      <p:sp>
-        <p:nvSpPr>
-          <p:cNvPr id="8" name="Shape 6"/>
-          <p:cNvSpPr/>
-          <p:nvPr/>
-        </p:nvSpPr>
-        <p:spPr>
-          <a:xfrm>
-            <a:off x="411480" y="4261104"/>
-            <a:ext cx="8321040" cy="548640"/>
-          </a:xfrm>
-          <a:prstGeom prst="roundRect">
-            <a:avLst>
-              <a:gd name="adj" fmla="val 8333"/>
-            </a:avLst>
-          </a:prstGeom>
-          <a:solidFill>
-            <a:srgbClr val="142337"/>
-          </a:solidFill>
-          <a:ln w="17780">
-            <a:solidFill>
-              <a:srgbClr val="3B9DF5"/>
-            </a:solidFill>
-            <a:prstDash val="solid"/>
-          </a:ln>
-        </p:spPr>
-      </p:sp>
-      <p:sp>
-        <p:nvSpPr>
-          <p:cNvPr id="9" name="Text 7"/>
-          <p:cNvSpPr/>
-          <p:nvPr/>
-        </p:nvSpPr>
-        <p:spPr>
-          <a:xfrm>
-            <a:off x="411480" y="4261104"/>
-            <a:ext cx="8321040" cy="548640"/>
-          </a:xfrm>
-          <a:prstGeom prst="rect">
-            <a:avLst/>
-          </a:prstGeom>
-          <a:noFill/>
-          <a:ln/>
-        </p:spPr>
-        <p:txBody>
-          <a:bodyPr wrap="square" lIns="0" tIns="0" rIns="0" bIns="0" rtlCol="0" anchor="ctr"/>
-          <a:lstStyle/>
-          <a:p>
-            <a:pPr algn="ctr" indent="0" marL="0">
-              <a:buNone/>
-            </a:pPr>
-            <a:r>
-              <a:rPr lang="en-US" sz="1250" b="1" dirty="0">
-                <a:solidFill>
-                  <a:srgbClr val="FFFFFF"/>
-                </a:solidFill>
-                <a:latin typeface="Arial" pitchFamily="34" charset="0"/>
-                <a:ea typeface="Arial" pitchFamily="34" charset="-122"/>
-                <a:cs typeface="Arial" pitchFamily="34" charset="-120"/>
-              </a:rPr>
-              <a:t>Python 3.12, não 3.13. Bibliotecas do Databricks ainda quebram na 3.13.</a:t>
-            </a:r>
-            <a:endParaRPr lang="en-US" sz="1250" dirty="0"/>
-          </a:p>
-        </p:txBody>
-      </p:sp>
-    </p:spTree>
-  </p:cSld>
-  <p:clrMapOvr>
-    <a:masterClrMapping/>
-  </p:clrMapOvr>
-</p:sld>
-</file>
-
-<file path=ppt/slides/slide48.xml><?xml version="1.0" encoding="utf-8"?>
-<p:sld xmlns:a="http://schemas.openxmlformats.org/drawingml/2006/main" xmlns:r="http://schemas.openxmlformats.org/officeDocument/2006/relationships" xmlns:p="http://schemas.openxmlformats.org/presentationml/2006/main">
-  <p:cSld name="Slide 48">
-    <p:bg>
-      <p:bgPr>
-        <a:solidFill>
-          <a:srgbClr val="070C16"/>
-        </a:solidFill>
-      </p:bgPr>
-    </p:bg>
-    <p:spTree>
-      <p:nvGrpSpPr>
-        <p:cNvPr id="1" name=""/>
-        <p:cNvGrpSpPr/>
-        <p:nvPr/>
-      </p:nvGrpSpPr>
-      <p:grpSpPr>
-        <a:xfrm>
-          <a:off x="0" y="0"/>
-          <a:ext cx="0" cy="0"/>
-          <a:chOff x="0" y="0"/>
-          <a:chExt cx="0" cy="0"/>
-        </a:xfrm>
-      </p:grpSpPr>
-      <p:sp>
-        <p:nvSpPr>
-          <p:cNvPr id="2" name="Text 0"/>
-          <p:cNvSpPr/>
-          <p:nvPr/>
-        </p:nvSpPr>
-        <p:spPr>
-          <a:xfrm>
-            <a:off x="411480" y="411480"/>
-            <a:ext cx="7315200" cy="256032"/>
-          </a:xfrm>
-          <a:prstGeom prst="rect">
-            <a:avLst/>
-          </a:prstGeom>
-          <a:noFill/>
-          <a:ln/>
-        </p:spPr>
-        <p:txBody>
-          <a:bodyPr wrap="square" lIns="0" tIns="0" rIns="0" bIns="0" rtlCol="0" anchor="ctr"/>
-          <a:lstStyle/>
-          <a:p>
-            <a:pPr indent="0" marL="0">
-              <a:buNone/>
-            </a:pPr>
-            <a:r>
-              <a:rPr lang="en-US" sz="1100" b="1" spc="160" kern="0" dirty="0">
-                <a:solidFill>
-                  <a:srgbClr val="3B9DF5"/>
-                </a:solidFill>
-                <a:latin typeface="Arial" pitchFamily="34" charset="0"/>
-                <a:ea typeface="Arial" pitchFamily="34" charset="-122"/>
-                <a:cs typeface="Arial" pitchFamily="34" charset="-120"/>
-              </a:rPr>
-              <a:t>SE DER ERRADO</a:t>
-            </a:r>
-            <a:endParaRPr lang="en-US" sz="1100" dirty="0"/>
-          </a:p>
-        </p:txBody>
-      </p:sp>
-      <p:sp>
-        <p:nvSpPr>
-          <p:cNvPr id="3" name="Text 1"/>
-          <p:cNvSpPr/>
-          <p:nvPr/>
-        </p:nvSpPr>
-        <p:spPr>
-          <a:xfrm>
-            <a:off x="411480" y="822960"/>
-            <a:ext cx="8321040" cy="1005840"/>
-          </a:xfrm>
-          <a:prstGeom prst="rect">
-            <a:avLst/>
-          </a:prstGeom>
-          <a:noFill/>
-          <a:ln/>
-        </p:spPr>
-        <p:txBody>
-          <a:bodyPr wrap="square" lIns="0" tIns="0" rIns="0" bIns="0" rtlCol="0" anchor="ctr"/>
-          <a:lstStyle/>
-          <a:p>
-            <a:pPr indent="0" marL="0">
-              <a:lnSpc>
-                <a:spcPts val="4000"/>
-              </a:lnSpc>
-              <a:buNone/>
-            </a:pPr>
-            <a:r>
-              <a:rPr lang="en-US" sz="3000" b="1" dirty="0">
-                <a:solidFill>
-                  <a:srgbClr val="FFFFFF"/>
-                </a:solidFill>
-                <a:latin typeface="Arial" pitchFamily="34" charset="0"/>
-                <a:ea typeface="Arial" pitchFamily="34" charset="-122"/>
-                <a:cs typeface="Arial" pitchFamily="34" charset="-120"/>
-              </a:rPr>
-              <a:t>Os erros que todo mundo comete</a:t>
-            </a:r>
-            <a:endParaRPr lang="en-US" sz="3000" dirty="0"/>
-          </a:p>
-        </p:txBody>
-      </p:sp>
-      <p:sp>
-        <p:nvSpPr>
-          <p:cNvPr id="4" name="Shape 2"/>
-          <p:cNvSpPr/>
-          <p:nvPr/>
-        </p:nvSpPr>
-        <p:spPr>
-          <a:xfrm>
-            <a:off x="411480" y="1847088"/>
-            <a:ext cx="8321040" cy="438912"/>
-          </a:xfrm>
-          <a:prstGeom prst="roundRect">
-            <a:avLst>
-              <a:gd name="adj" fmla="val 8333"/>
-            </a:avLst>
-          </a:prstGeom>
-          <a:solidFill>
-            <a:srgbClr val="0D1522"/>
-          </a:solidFill>
-          <a:ln w="12700">
-            <a:solidFill>
-              <a:srgbClr val="1F3A5A"/>
-            </a:solidFill>
-            <a:prstDash val="solid"/>
-          </a:ln>
-        </p:spPr>
-      </p:sp>
-      <p:sp>
-        <p:nvSpPr>
-          <p:cNvPr id="5" name="Text 3"/>
-          <p:cNvSpPr/>
-          <p:nvPr/>
-        </p:nvSpPr>
-        <p:spPr>
-          <a:xfrm>
-            <a:off x="658368" y="1847088"/>
-            <a:ext cx="3657600" cy="438912"/>
-          </a:xfrm>
-          <a:prstGeom prst="rect">
-            <a:avLst/>
-          </a:prstGeom>
-          <a:noFill/>
-          <a:ln/>
-        </p:spPr>
-        <p:txBody>
-          <a:bodyPr wrap="square" lIns="0" tIns="0" rIns="0" bIns="0" rtlCol="0" anchor="ctr"/>
-          <a:lstStyle/>
-          <a:p>
-            <a:pPr indent="0" marL="0">
-              <a:buNone/>
-            </a:pPr>
-            <a:r>
-              <a:rPr lang="en-US" sz="950" dirty="0">
-                <a:solidFill>
-                  <a:srgbClr val="7CC8FF"/>
-                </a:solidFill>
-                <a:latin typeface="Consolas" pitchFamily="34" charset="0"/>
-                <a:ea typeface="Consolas" pitchFamily="34" charset="-122"/>
-                <a:cs typeface="Consolas" pitchFamily="34" charset="-120"/>
-              </a:rPr>
-              <a:t>stored credentials from older CLI</a:t>
-            </a:r>
-            <a:endParaRPr lang="en-US" sz="950" dirty="0"/>
-          </a:p>
-        </p:txBody>
-      </p:sp>
-      <p:sp>
-        <p:nvSpPr>
-          <p:cNvPr id="6" name="Text 4"/>
-          <p:cNvSpPr/>
-          <p:nvPr/>
-        </p:nvSpPr>
-        <p:spPr>
-          <a:xfrm>
-            <a:off x="4480560" y="1847088"/>
-            <a:ext cx="4023360" cy="438912"/>
-          </a:xfrm>
-          <a:prstGeom prst="rect">
-            <a:avLst/>
-          </a:prstGeom>
-          <a:noFill/>
-          <a:ln/>
-        </p:spPr>
-        <p:txBody>
-          <a:bodyPr wrap="square" lIns="0" tIns="0" rIns="0" bIns="0" rtlCol="0" anchor="ctr"/>
-          <a:lstStyle/>
-          <a:p>
-            <a:pPr indent="0" marL="0">
-              <a:buNone/>
-            </a:pPr>
-            <a:r>
-              <a:rPr lang="en-US" sz="1100" dirty="0">
-                <a:solidFill>
-                  <a:srgbClr val="FFFFFF"/>
-                </a:solidFill>
-                <a:latin typeface="Arial" pitchFamily="34" charset="0"/>
-                <a:ea typeface="Arial" pitchFamily="34" charset="-122"/>
-                <a:cs typeface="Arial" pitchFamily="34" charset="-120"/>
-              </a:rPr>
-              <a:t>Rode databricks auth login de novo</a:t>
-            </a:r>
-            <a:endParaRPr lang="en-US" sz="1100" dirty="0"/>
-          </a:p>
-        </p:txBody>
-      </p:sp>
-      <p:sp>
-        <p:nvSpPr>
-          <p:cNvPr id="7" name="Shape 5"/>
-          <p:cNvSpPr/>
-          <p:nvPr/>
-        </p:nvSpPr>
-        <p:spPr>
-          <a:xfrm>
-            <a:off x="411480" y="2350008"/>
-            <a:ext cx="8321040" cy="438912"/>
-          </a:xfrm>
-          <a:prstGeom prst="roundRect">
-            <a:avLst>
-              <a:gd name="adj" fmla="val 8333"/>
-            </a:avLst>
-          </a:prstGeom>
-          <a:solidFill>
-            <a:srgbClr val="0D1522"/>
-          </a:solidFill>
-          <a:ln w="12700">
-            <a:solidFill>
-              <a:srgbClr val="1F3A5A"/>
-            </a:solidFill>
-            <a:prstDash val="solid"/>
-          </a:ln>
-        </p:spPr>
-      </p:sp>
-      <p:sp>
-        <p:nvSpPr>
-          <p:cNvPr id="8" name="Text 6"/>
-          <p:cNvSpPr/>
-          <p:nvPr/>
-        </p:nvSpPr>
-        <p:spPr>
-          <a:xfrm>
-            <a:off x="658368" y="2350008"/>
-            <a:ext cx="3657600" cy="438912"/>
-          </a:xfrm>
-          <a:prstGeom prst="rect">
-            <a:avLst/>
-          </a:prstGeom>
-          <a:noFill/>
-          <a:ln/>
-        </p:spPr>
-        <p:txBody>
-          <a:bodyPr wrap="square" lIns="0" tIns="0" rIns="0" bIns="0" rtlCol="0" anchor="ctr"/>
-          <a:lstStyle/>
-          <a:p>
-            <a:pPr indent="0" marL="0">
-              <a:buNone/>
-            </a:pPr>
-            <a:r>
-              <a:rPr lang="en-US" sz="950" dirty="0">
-                <a:solidFill>
-                  <a:srgbClr val="7CC8FF"/>
-                </a:solidFill>
-                <a:latin typeface="Consolas" pitchFamily="34" charset="0"/>
-                <a:ea typeface="Consolas" pitchFamily="34" charset="-122"/>
-                <a:cs typeface="Consolas" pitchFamily="34" charset="-120"/>
-              </a:rPr>
-              <a:t>command not found</a:t>
-            </a:r>
-            <a:endParaRPr lang="en-US" sz="950" dirty="0"/>
-          </a:p>
-        </p:txBody>
-      </p:sp>
-      <p:sp>
-        <p:nvSpPr>
-          <p:cNvPr id="9" name="Text 7"/>
-          <p:cNvSpPr/>
-          <p:nvPr/>
-        </p:nvSpPr>
-        <p:spPr>
-          <a:xfrm>
-            <a:off x="4480560" y="2350008"/>
-            <a:ext cx="4023360" cy="438912"/>
-          </a:xfrm>
-          <a:prstGeom prst="rect">
-            <a:avLst/>
-          </a:prstGeom>
-          <a:noFill/>
-          <a:ln/>
-        </p:spPr>
-        <p:txBody>
-          <a:bodyPr wrap="square" lIns="0" tIns="0" rIns="0" bIns="0" rtlCol="0" anchor="ctr"/>
-          <a:lstStyle/>
-          <a:p>
-            <a:pPr indent="0" marL="0">
-              <a:buNone/>
-            </a:pPr>
-            <a:r>
-              <a:rPr lang="en-US" sz="1100" dirty="0">
-                <a:solidFill>
-                  <a:srgbClr val="FFFFFF"/>
-                </a:solidFill>
-                <a:latin typeface="Arial" pitchFamily="34" charset="0"/>
-                <a:ea typeface="Arial" pitchFamily="34" charset="-122"/>
-                <a:cs typeface="Arial" pitchFamily="34" charset="-120"/>
-              </a:rPr>
-              <a:t>Reinicie o terminal depois de instalar</a:t>
-            </a:r>
-            <a:endParaRPr lang="en-US" sz="1100" dirty="0"/>
-          </a:p>
-        </p:txBody>
-      </p:sp>
-      <p:sp>
-        <p:nvSpPr>
-          <p:cNvPr id="10" name="Shape 8"/>
-          <p:cNvSpPr/>
-          <p:nvPr/>
-        </p:nvSpPr>
-        <p:spPr>
-          <a:xfrm>
-            <a:off x="411480" y="2852928"/>
-            <a:ext cx="8321040" cy="438912"/>
-          </a:xfrm>
-          <a:prstGeom prst="roundRect">
-            <a:avLst>
-              <a:gd name="adj" fmla="val 8333"/>
-            </a:avLst>
-          </a:prstGeom>
-          <a:solidFill>
-            <a:srgbClr val="0D1522"/>
-          </a:solidFill>
-          <a:ln w="12700">
-            <a:solidFill>
-              <a:srgbClr val="1F3A5A"/>
-            </a:solidFill>
-            <a:prstDash val="solid"/>
-          </a:ln>
-        </p:spPr>
-      </p:sp>
-      <p:sp>
-        <p:nvSpPr>
-          <p:cNvPr id="11" name="Text 9"/>
-          <p:cNvSpPr/>
-          <p:nvPr/>
-        </p:nvSpPr>
-        <p:spPr>
-          <a:xfrm>
-            <a:off x="658368" y="2852928"/>
-            <a:ext cx="3657600" cy="438912"/>
-          </a:xfrm>
-          <a:prstGeom prst="rect">
-            <a:avLst/>
-          </a:prstGeom>
-          <a:noFill/>
-          <a:ln/>
-        </p:spPr>
-        <p:txBody>
-          <a:bodyPr wrap="square" lIns="0" tIns="0" rIns="0" bIns="0" rtlCol="0" anchor="ctr"/>
-          <a:lstStyle/>
-          <a:p>
-            <a:pPr indent="0" marL="0">
-              <a:buNone/>
-            </a:pPr>
-            <a:r>
-              <a:rPr lang="en-US" sz="950" dirty="0">
-                <a:solidFill>
-                  <a:srgbClr val="7CC8FF"/>
-                </a:solidFill>
-                <a:latin typeface="Consolas" pitchFamily="34" charset="0"/>
-                <a:ea typeface="Consolas" pitchFamily="34" charset="-122"/>
-                <a:cs typeface="Consolas" pitchFamily="34" charset="-120"/>
-              </a:rPr>
-              <a:t>versão abaixo de 0.205</a:t>
-            </a:r>
-            <a:endParaRPr lang="en-US" sz="950" dirty="0"/>
-          </a:p>
-        </p:txBody>
-      </p:sp>
-      <p:sp>
-        <p:nvSpPr>
-          <p:cNvPr id="12" name="Text 10"/>
-          <p:cNvSpPr/>
-          <p:nvPr/>
-        </p:nvSpPr>
-        <p:spPr>
-          <a:xfrm>
-            <a:off x="4480560" y="2852928"/>
-            <a:ext cx="4023360" cy="438912"/>
-          </a:xfrm>
-          <a:prstGeom prst="rect">
-            <a:avLst/>
-          </a:prstGeom>
-          <a:noFill/>
-          <a:ln/>
-        </p:spPr>
-        <p:txBody>
-          <a:bodyPr wrap="square" lIns="0" tIns="0" rIns="0" bIns="0" rtlCol="0" anchor="ctr"/>
-          <a:lstStyle/>
-          <a:p>
-            <a:pPr indent="0" marL="0">
-              <a:buNone/>
-            </a:pPr>
-            <a:r>
-              <a:rPr lang="en-US" sz="1100" dirty="0">
-                <a:solidFill>
-                  <a:srgbClr val="FFFFFF"/>
-                </a:solidFill>
-                <a:latin typeface="Arial" pitchFamily="34" charset="0"/>
-                <a:ea typeface="Arial" pitchFamily="34" charset="-122"/>
-                <a:cs typeface="Arial" pitchFamily="34" charset="-120"/>
-              </a:rPr>
-              <a:t>É a CLI antiga. Desinstale e reinstale.</a:t>
-            </a:r>
-            <a:endParaRPr lang="en-US" sz="1100" dirty="0"/>
-          </a:p>
-        </p:txBody>
-      </p:sp>
-      <p:sp>
-        <p:nvSpPr>
-          <p:cNvPr id="13" name="Shape 11"/>
-          <p:cNvSpPr/>
-          <p:nvPr/>
-        </p:nvSpPr>
-        <p:spPr>
-          <a:xfrm>
-            <a:off x="411480" y="3355848"/>
-            <a:ext cx="8321040" cy="438912"/>
-          </a:xfrm>
-          <a:prstGeom prst="roundRect">
-            <a:avLst>
-              <a:gd name="adj" fmla="val 8333"/>
-            </a:avLst>
-          </a:prstGeom>
-          <a:solidFill>
-            <a:srgbClr val="0D1522"/>
-          </a:solidFill>
-          <a:ln w="12700">
-            <a:solidFill>
-              <a:srgbClr val="1F3A5A"/>
-            </a:solidFill>
-            <a:prstDash val="solid"/>
-          </a:ln>
-        </p:spPr>
-      </p:sp>
-      <p:sp>
-        <p:nvSpPr>
-          <p:cNvPr id="14" name="Text 12"/>
-          <p:cNvSpPr/>
-          <p:nvPr/>
-        </p:nvSpPr>
-        <p:spPr>
-          <a:xfrm>
-            <a:off x="658368" y="3355848"/>
-            <a:ext cx="3657600" cy="438912"/>
-          </a:xfrm>
-          <a:prstGeom prst="rect">
-            <a:avLst/>
-          </a:prstGeom>
-          <a:noFill/>
-          <a:ln/>
-        </p:spPr>
-        <p:txBody>
-          <a:bodyPr wrap="square" lIns="0" tIns="0" rIns="0" bIns="0" rtlCol="0" anchor="ctr"/>
-          <a:lstStyle/>
-          <a:p>
-            <a:pPr indent="0" marL="0">
-              <a:buNone/>
-            </a:pPr>
-            <a:r>
-              <a:rPr lang="en-US" sz="950" dirty="0">
-                <a:solidFill>
-                  <a:srgbClr val="7CC8FF"/>
-                </a:solidFill>
-                <a:latin typeface="Consolas" pitchFamily="34" charset="0"/>
-                <a:ea typeface="Consolas" pitchFamily="34" charset="-122"/>
-                <a:cs typeface="Consolas" pitchFamily="34" charset="-120"/>
-              </a:rPr>
-              <a:t>deploy falha por compute</a:t>
-            </a:r>
-            <a:endParaRPr lang="en-US" sz="950" dirty="0"/>
-          </a:p>
-        </p:txBody>
-      </p:sp>
-      <p:sp>
-        <p:nvSpPr>
-          <p:cNvPr id="15" name="Text 13"/>
-          <p:cNvSpPr/>
-          <p:nvPr/>
-        </p:nvSpPr>
-        <p:spPr>
-          <a:xfrm>
-            <a:off x="4480560" y="3355848"/>
-            <a:ext cx="4023360" cy="438912"/>
-          </a:xfrm>
-          <a:prstGeom prst="rect">
-            <a:avLst/>
-          </a:prstGeom>
-          <a:noFill/>
-          <a:ln/>
-        </p:spPr>
-        <p:txBody>
-          <a:bodyPr wrap="square" lIns="0" tIns="0" rIns="0" bIns="0" rtlCol="0" anchor="ctr"/>
-          <a:lstStyle/>
-          <a:p>
-            <a:pPr indent="0" marL="0">
-              <a:buNone/>
-            </a:pPr>
-            <a:r>
-              <a:rPr lang="en-US" sz="1100" dirty="0">
-                <a:solidFill>
-                  <a:srgbClr val="FFFFFF"/>
-                </a:solidFill>
-                <a:latin typeface="Arial" pitchFamily="34" charset="0"/>
-                <a:ea typeface="Arial" pitchFamily="34" charset="-122"/>
-                <a:cs typeface="Arial" pitchFamily="34" charset="-120"/>
-              </a:rPr>
-              <a:t>Você respondeu no para serverless</a:t>
-            </a:r>
-            <a:endParaRPr lang="en-US" sz="1100" dirty="0"/>
-          </a:p>
-        </p:txBody>
-      </p:sp>
-      <p:sp>
-        <p:nvSpPr>
-          <p:cNvPr id="16" name="Shape 14"/>
-          <p:cNvSpPr/>
-          <p:nvPr/>
-        </p:nvSpPr>
-        <p:spPr>
-          <a:xfrm>
-            <a:off x="411480" y="3858768"/>
-            <a:ext cx="8321040" cy="438912"/>
-          </a:xfrm>
-          <a:prstGeom prst="roundRect">
-            <a:avLst>
-              <a:gd name="adj" fmla="val 8333"/>
-            </a:avLst>
-          </a:prstGeom>
-          <a:solidFill>
-            <a:srgbClr val="0D1522"/>
-          </a:solidFill>
-          <a:ln w="12700">
-            <a:solidFill>
-              <a:srgbClr val="1F3A5A"/>
-            </a:solidFill>
-            <a:prstDash val="solid"/>
-          </a:ln>
-        </p:spPr>
-      </p:sp>
-      <p:sp>
-        <p:nvSpPr>
-          <p:cNvPr id="17" name="Text 15"/>
-          <p:cNvSpPr/>
-          <p:nvPr/>
-        </p:nvSpPr>
-        <p:spPr>
-          <a:xfrm>
-            <a:off x="658368" y="3858768"/>
-            <a:ext cx="3657600" cy="438912"/>
-          </a:xfrm>
-          <a:prstGeom prst="rect">
-            <a:avLst/>
-          </a:prstGeom>
-          <a:noFill/>
-          <a:ln/>
-        </p:spPr>
-        <p:txBody>
-          <a:bodyPr wrap="square" lIns="0" tIns="0" rIns="0" bIns="0" rtlCol="0" anchor="ctr"/>
-          <a:lstStyle/>
-          <a:p>
-            <a:pPr indent="0" marL="0">
-              <a:buNone/>
-            </a:pPr>
-            <a:r>
-              <a:rPr lang="en-US" sz="950" dirty="0">
-                <a:solidFill>
-                  <a:srgbClr val="7CC8FF"/>
-                </a:solidFill>
-                <a:latin typeface="Consolas" pitchFamily="34" charset="0"/>
-                <a:ea typeface="Consolas" pitchFamily="34" charset="-122"/>
-                <a:cs typeface="Consolas" pitchFamily="34" charset="-120"/>
-              </a:rPr>
-              <a:t>biblioteca não instala</a:t>
-            </a:r>
-            <a:endParaRPr lang="en-US" sz="950" dirty="0"/>
-          </a:p>
-        </p:txBody>
-      </p:sp>
-      <p:sp>
-        <p:nvSpPr>
-          <p:cNvPr id="18" name="Text 16"/>
-          <p:cNvSpPr/>
-          <p:nvPr/>
-        </p:nvSpPr>
-        <p:spPr>
-          <a:xfrm>
-            <a:off x="4480560" y="3858768"/>
-            <a:ext cx="4023360" cy="438912"/>
-          </a:xfrm>
-          <a:prstGeom prst="rect">
-            <a:avLst/>
-          </a:prstGeom>
-          <a:noFill/>
-          <a:ln/>
-        </p:spPr>
-        <p:txBody>
-          <a:bodyPr wrap="square" lIns="0" tIns="0" rIns="0" bIns="0" rtlCol="0" anchor="ctr"/>
-          <a:lstStyle/>
-          <a:p>
-            <a:pPr indent="0" marL="0">
-              <a:buNone/>
-            </a:pPr>
-            <a:r>
-              <a:rPr lang="en-US" sz="1100" dirty="0">
-                <a:solidFill>
-                  <a:srgbClr val="FFFFFF"/>
-                </a:solidFill>
-                <a:latin typeface="Arial" pitchFamily="34" charset="0"/>
-                <a:ea typeface="Arial" pitchFamily="34" charset="-122"/>
-                <a:cs typeface="Arial" pitchFamily="34" charset="-120"/>
-              </a:rPr>
-              <a:t>Você está no Python 3.13. Volte pra 3.12.</a:t>
-            </a:r>
-            <a:endParaRPr lang="en-US" sz="1100" dirty="0"/>
-          </a:p>
-        </p:txBody>
-      </p:sp>
-      <p:sp>
-        <p:nvSpPr>
-          <p:cNvPr id="19" name="Shape 17"/>
-          <p:cNvSpPr/>
-          <p:nvPr/>
-        </p:nvSpPr>
-        <p:spPr>
-          <a:xfrm>
-            <a:off x="411480" y="4361688"/>
-            <a:ext cx="8321040" cy="438912"/>
-          </a:xfrm>
-          <a:prstGeom prst="roundRect">
-            <a:avLst>
-              <a:gd name="adj" fmla="val 8333"/>
-            </a:avLst>
-          </a:prstGeom>
-          <a:solidFill>
-            <a:srgbClr val="0D1522"/>
-          </a:solidFill>
-          <a:ln w="12700">
-            <a:solidFill>
-              <a:srgbClr val="1F3A5A"/>
-            </a:solidFill>
-            <a:prstDash val="solid"/>
-          </a:ln>
-        </p:spPr>
-      </p:sp>
-      <p:sp>
-        <p:nvSpPr>
-          <p:cNvPr id="20" name="Text 18"/>
-          <p:cNvSpPr/>
-          <p:nvPr/>
-        </p:nvSpPr>
-        <p:spPr>
-          <a:xfrm>
-            <a:off x="658368" y="4361688"/>
-            <a:ext cx="3657600" cy="438912"/>
-          </a:xfrm>
-          <a:prstGeom prst="rect">
-            <a:avLst/>
-          </a:prstGeom>
-          <a:noFill/>
-          <a:ln/>
-        </p:spPr>
-        <p:txBody>
-          <a:bodyPr wrap="square" lIns="0" tIns="0" rIns="0" bIns="0" rtlCol="0" anchor="ctr"/>
-          <a:lstStyle/>
-          <a:p>
-            <a:pPr indent="0" marL="0">
-              <a:buNone/>
-            </a:pPr>
-            <a:r>
-              <a:rPr lang="en-US" sz="950" dirty="0">
-                <a:solidFill>
-                  <a:srgbClr val="7CC8FF"/>
-                </a:solidFill>
-                <a:latin typeface="Consolas" pitchFamily="34" charset="0"/>
-                <a:ea typeface="Consolas" pitchFamily="34" charset="-122"/>
-                <a:cs typeface="Consolas" pitchFamily="34" charset="-120"/>
-              </a:rPr>
-              <a:t>compute desligado</a:t>
-            </a:r>
-            <a:endParaRPr lang="en-US" sz="950" dirty="0"/>
-          </a:p>
-        </p:txBody>
-      </p:sp>
-      <p:sp>
-        <p:nvSpPr>
-          <p:cNvPr id="21" name="Text 19"/>
-          <p:cNvSpPr/>
-          <p:nvPr/>
-        </p:nvSpPr>
-        <p:spPr>
-          <a:xfrm>
-            <a:off x="4480560" y="4361688"/>
-            <a:ext cx="4023360" cy="438912"/>
-          </a:xfrm>
-          <a:prstGeom prst="rect">
-            <a:avLst/>
-          </a:prstGeom>
-          <a:noFill/>
-          <a:ln/>
-        </p:spPr>
-        <p:txBody>
-          <a:bodyPr wrap="square" lIns="0" tIns="0" rIns="0" bIns="0" rtlCol="0" anchor="ctr"/>
-          <a:lstStyle/>
-          <a:p>
-            <a:pPr indent="0" marL="0">
-              <a:buNone/>
-            </a:pPr>
-            <a:r>
-              <a:rPr lang="en-US" sz="1100" dirty="0">
-                <a:solidFill>
-                  <a:srgbClr val="FFFFFF"/>
-                </a:solidFill>
-                <a:latin typeface="Arial" pitchFamily="34" charset="0"/>
-                <a:ea typeface="Arial" pitchFamily="34" charset="-122"/>
-                <a:cs typeface="Arial" pitchFamily="34" charset="-120"/>
-              </a:rPr>
-              <a:t>Cota do Free Edition estourou. Espere o dia seguinte.</a:t>
-            </a:r>
-            <a:endParaRPr lang="en-US" sz="1100" dirty="0"/>
-          </a:p>
-        </p:txBody>
-      </p:sp>
-      <p:sp>
-        <p:nvSpPr>
-          <p:cNvPr id="22" name="Text 20"/>
-          <p:cNvSpPr/>
-          <p:nvPr/>
-        </p:nvSpPr>
-        <p:spPr>
-          <a:xfrm>
-            <a:off x="411480" y="4754880"/>
-            <a:ext cx="8321040" cy="274320"/>
-          </a:xfrm>
-          <a:prstGeom prst="rect">
-            <a:avLst/>
-          </a:prstGeom>
-          <a:noFill/>
-          <a:ln/>
-        </p:spPr>
-        <p:txBody>
-          <a:bodyPr wrap="square" lIns="0" tIns="0" rIns="0" bIns="0" rtlCol="0" anchor="ctr"/>
-          <a:lstStyle/>
-          <a:p>
-            <a:pPr algn="ctr" indent="0" marL="0">
-              <a:buNone/>
-            </a:pPr>
-            <a:r>
-              <a:rPr lang="en-US" sz="1050" dirty="0">
-                <a:solidFill>
-                  <a:srgbClr val="7CC8FF"/>
-                </a:solidFill>
-                <a:latin typeface="Arial" pitchFamily="34" charset="0"/>
-                <a:ea typeface="Arial" pitchFamily="34" charset="-122"/>
-                <a:cs typeface="Arial" pitchFamily="34" charset="-120"/>
-              </a:rPr>
-              <a:t>Erro faz parte. Leia a mensagem — quase sempre ela já diz o que fazer.</a:t>
-            </a:r>
-            <a:endParaRPr lang="en-US" sz="1050" dirty="0"/>
-          </a:p>
-        </p:txBody>
-      </p:sp>
-    </p:spTree>
-  </p:cSld>
-  <p:clrMapOvr>
-    <a:masterClrMapping/>
-  </p:clrMapOvr>
-</p:sld>
-</file>
-
-<file path=ppt/slides/slide49.xml><?xml version="1.0" encoding="utf-8"?>
-<p:sld xmlns:a="http://schemas.openxmlformats.org/drawingml/2006/main" xmlns:r="http://schemas.openxmlformats.org/officeDocument/2006/relationships" xmlns:p="http://schemas.openxmlformats.org/presentationml/2006/main">
-  <p:cSld name="Slide 49">
-    <p:bg>
-      <p:bgPr>
-        <a:solidFill>
-          <a:srgbClr val="070C16"/>
-        </a:solidFill>
-      </p:bgPr>
-    </p:bg>
-    <p:spTree>
-      <p:nvGrpSpPr>
-        <p:cNvPr id="1" name=""/>
-        <p:cNvGrpSpPr/>
-        <p:nvPr/>
-      </p:nvGrpSpPr>
-      <p:grpSpPr>
-        <a:xfrm>
-          <a:off x="0" y="0"/>
-          <a:ext cx="0" cy="0"/>
-          <a:chOff x="0" y="0"/>
-          <a:chExt cx="0" cy="0"/>
-        </a:xfrm>
-      </p:grpSpPr>
-      <p:sp>
-        <p:nvSpPr>
-          <p:cNvPr id="2" name="Shape 0"/>
-          <p:cNvSpPr/>
-          <p:nvPr/>
-        </p:nvSpPr>
-        <p:spPr>
-          <a:xfrm rot="5400000">
-            <a:off x="7635240" y="-658368"/>
-            <a:ext cx="1554480" cy="1325880"/>
-          </a:xfrm>
-          <a:prstGeom prst="triangle">
-            <a:avLst/>
-          </a:prstGeom>
-          <a:solidFill>
-            <a:srgbClr val="3B9DF5"/>
-          </a:solidFill>
-          <a:ln w="12700">
-            <a:solidFill>
-              <a:srgbClr val="333333"/>
-            </a:solidFill>
-            <a:prstDash val="solid"/>
-          </a:ln>
-        </p:spPr>
-      </p:sp>
-      <p:sp>
-        <p:nvSpPr>
-          <p:cNvPr id="3" name="Text 1"/>
-          <p:cNvSpPr/>
-          <p:nvPr/>
-        </p:nvSpPr>
-        <p:spPr>
-          <a:xfrm rot="2700000">
-            <a:off x="7882128" y="118872"/>
-            <a:ext cx="1005840" cy="182880"/>
-          </a:xfrm>
-          <a:prstGeom prst="rect">
-            <a:avLst/>
-          </a:prstGeom>
-          <a:noFill/>
-          <a:ln/>
-        </p:spPr>
-        <p:txBody>
-          <a:bodyPr wrap="square" lIns="0" tIns="0" rIns="0" bIns="0" rtlCol="0" anchor="ctr"/>
-          <a:lstStyle/>
-          <a:p>
-            <a:pPr algn="ctr" indent="0" marL="0">
-              <a:buNone/>
-            </a:pPr>
-            <a:r>
-              <a:rPr lang="en-US" sz="750" b="1" spc="60" kern="0" dirty="0">
-                <a:solidFill>
-                  <a:srgbClr val="FFFFFF"/>
-                </a:solidFill>
-                <a:latin typeface="Arial" pitchFamily="34" charset="0"/>
-                <a:ea typeface="Arial" pitchFamily="34" charset="-122"/>
-                <a:cs typeface="Arial" pitchFamily="34" charset="-120"/>
-              </a:rPr>
-              <a:t>ATÉ AMANHÃ</a:t>
-            </a:r>
-            <a:endParaRPr lang="en-US" sz="750" dirty="0"/>
-          </a:p>
-        </p:txBody>
-      </p:sp>
-      <p:sp>
-        <p:nvSpPr>
-          <p:cNvPr id="4" name="Text 2"/>
-          <p:cNvSpPr/>
-          <p:nvPr/>
-        </p:nvSpPr>
-        <p:spPr>
-          <a:xfrm>
-            <a:off x="411480" y="1554480"/>
-            <a:ext cx="7315200" cy="320040"/>
-          </a:xfrm>
-          <a:prstGeom prst="rect">
-            <a:avLst/>
-          </a:prstGeom>
-          <a:noFill/>
-          <a:ln/>
-        </p:spPr>
-        <p:txBody>
-          <a:bodyPr wrap="square" lIns="0" tIns="0" rIns="0" bIns="0" rtlCol="0" anchor="ctr"/>
-          <a:lstStyle/>
-          <a:p>
-            <a:pPr indent="0" marL="0">
-              <a:buNone/>
-            </a:pPr>
-            <a:r>
-              <a:rPr lang="en-US" sz="1200" b="1" spc="200" kern="0" dirty="0">
-                <a:solidFill>
-                  <a:srgbClr val="3B9DF5"/>
-                </a:solidFill>
-                <a:latin typeface="Arial" pitchFamily="34" charset="0"/>
-                <a:ea typeface="Arial" pitchFamily="34" charset="-122"/>
-                <a:cs typeface="Arial" pitchFamily="34" charset="-120"/>
-              </a:rPr>
-              <a:t>OBRIGADO POR HOJE</a:t>
-            </a:r>
-            <a:endParaRPr lang="en-US" sz="1200" dirty="0"/>
-          </a:p>
-        </p:txBody>
-      </p:sp>
-      <p:sp>
-        <p:nvSpPr>
-          <p:cNvPr id="5" name="Text 3"/>
-          <p:cNvSpPr/>
-          <p:nvPr/>
-        </p:nvSpPr>
-        <p:spPr>
-          <a:xfrm>
-            <a:off x="411480" y="1965960"/>
-            <a:ext cx="8229600" cy="1371600"/>
-          </a:xfrm>
-          <a:prstGeom prst="rect">
-            <a:avLst/>
-          </a:prstGeom>
-          <a:noFill/>
-          <a:ln/>
-        </p:spPr>
-        <p:txBody>
-          <a:bodyPr wrap="square" lIns="0" tIns="0" rIns="0" bIns="0" rtlCol="0" anchor="ctr"/>
-          <a:lstStyle/>
-          <a:p>
-            <a:pPr indent="0" marL="0">
-              <a:lnSpc>
-                <a:spcPts val="4600"/>
-              </a:lnSpc>
-              <a:buNone/>
-            </a:pPr>
-            <a:r>
-              <a:rPr lang="en-US" sz="4000" b="1" dirty="0">
-                <a:solidFill>
-                  <a:srgbClr val="FFFFFF"/>
-                </a:solidFill>
-                <a:latin typeface="Arial" pitchFamily="34" charset="0"/>
-                <a:ea typeface="Arial" pitchFamily="34" charset="-122"/>
-                <a:cs typeface="Arial" pitchFamily="34" charset="-120"/>
-              </a:rPr>
-              <a:t>Terça, 19h30.</a:t>
-            </a:r>
-            <a:endParaRPr lang="en-US" sz="4000" dirty="0"/>
-          </a:p>
-          <a:p>
-            <a:pPr indent="0" marL="0">
-              <a:lnSpc>
-                <a:spcPts val="4600"/>
-              </a:lnSpc>
-              <a:buNone/>
-            </a:pPr>
-            <a:r>
-              <a:rPr lang="en-US" sz="4000" b="1" dirty="0">
-                <a:solidFill>
-                  <a:srgbClr val="FFFFFF"/>
-                </a:solidFill>
-                <a:latin typeface="Arial" pitchFamily="34" charset="0"/>
-                <a:ea typeface="Arial" pitchFamily="34" charset="-122"/>
-                <a:cs typeface="Arial" pitchFamily="34" charset="-120"/>
-              </a:rPr>
-              <a:t>Mesmo lugar.</a:t>
-            </a:r>
-            <a:endParaRPr lang="en-US" sz="4000" dirty="0"/>
-          </a:p>
-        </p:txBody>
-      </p:sp>
-      <p:sp>
-        <p:nvSpPr>
-          <p:cNvPr id="6" name="Text 4"/>
-          <p:cNvSpPr/>
-          <p:nvPr/>
-        </p:nvSpPr>
-        <p:spPr>
-          <a:xfrm>
-            <a:off x="411480" y="3520440"/>
-            <a:ext cx="7863840" cy="548640"/>
-          </a:xfrm>
-          <a:prstGeom prst="rect">
-            <a:avLst/>
-          </a:prstGeom>
-          <a:noFill/>
-          <a:ln/>
-        </p:spPr>
-        <p:txBody>
-          <a:bodyPr wrap="square" lIns="0" tIns="0" rIns="0" bIns="0" rtlCol="0" anchor="ctr"/>
-          <a:lstStyle/>
-          <a:p>
-            <a:pPr indent="0" marL="0">
-              <a:lnSpc>
-                <a:spcPts val="2000"/>
-              </a:lnSpc>
-              <a:buNone/>
-            </a:pPr>
-            <a:r>
-              <a:rPr lang="en-US" sz="1400" dirty="0">
-                <a:solidFill>
-                  <a:srgbClr val="9BAAC0"/>
-                </a:solidFill>
-                <a:latin typeface="Arial" pitchFamily="34" charset="0"/>
-                <a:ea typeface="Arial" pitchFamily="34" charset="-122"/>
-                <a:cs typeface="Arial" pitchFamily="34" charset="-120"/>
-              </a:rPr>
-              <a:t>Entra no grupo do WhatsApp — é lá que eu mando o repositório, a base de dados e respondo dúvida.</a:t>
-            </a:r>
-            <a:endParaRPr lang="en-US" sz="1400" dirty="0"/>
-          </a:p>
-        </p:txBody>
-      </p:sp>
-      <p:sp>
-        <p:nvSpPr>
-          <p:cNvPr id="7" name="Text 5"/>
-          <p:cNvSpPr/>
-          <p:nvPr/>
-        </p:nvSpPr>
-        <p:spPr>
-          <a:xfrm>
-            <a:off x="411480" y="4681728"/>
-            <a:ext cx="2743200" cy="228600"/>
-          </a:xfrm>
-          <a:prstGeom prst="rect">
-            <a:avLst/>
-          </a:prstGeom>
-          <a:noFill/>
-          <a:ln/>
-        </p:spPr>
-        <p:txBody>
-          <a:bodyPr wrap="square" lIns="0" tIns="0" rIns="0" bIns="0" rtlCol="0" anchor="ctr"/>
-          <a:lstStyle/>
-          <a:p>
-            <a:pPr indent="0" marL="0">
-              <a:buNone/>
-            </a:pPr>
-            <a:r>
-              <a:rPr lang="en-US" sz="800" b="1" spc="200" kern="0" dirty="0">
-                <a:solidFill>
-                  <a:srgbClr val="566A85"/>
-                </a:solidFill>
-                <a:latin typeface="Arial" pitchFamily="34" charset="0"/>
-                <a:ea typeface="Arial" pitchFamily="34" charset="-122"/>
-                <a:cs typeface="Arial" pitchFamily="34" charset="-120"/>
-              </a:rPr>
-              <a:t>JORNADA DE DADOS</a:t>
-            </a:r>
-            <a:endParaRPr lang="en-US" sz="800" dirty="0"/>
           </a:p>
         </p:txBody>
       </p:sp>
@@ -35454,6 +35953,1483 @@
 </file>
 
 <file path=ppt/slides/slide50.xml><?xml version="1.0" encoding="utf-8"?>
+<p:sld xmlns:a="http://schemas.openxmlformats.org/drawingml/2006/main" xmlns:r="http://schemas.openxmlformats.org/officeDocument/2006/relationships" xmlns:p="http://schemas.openxmlformats.org/presentationml/2006/main">
+  <p:cSld name="Slide 47">
+    <p:bg>
+      <p:bgPr>
+        <a:solidFill>
+          <a:srgbClr val="070C16"/>
+        </a:solidFill>
+      </p:bgPr>
+    </p:bg>
+    <p:spTree>
+      <p:nvGrpSpPr>
+        <p:cNvPr id="1" name=""/>
+        <p:cNvGrpSpPr/>
+        <p:nvPr/>
+      </p:nvGrpSpPr>
+      <p:grpSpPr>
+        <a:xfrm>
+          <a:off x="0" y="0"/>
+          <a:ext cx="0" cy="0"/>
+          <a:chOff x="0" y="0"/>
+          <a:chExt cx="0" cy="0"/>
+        </a:xfrm>
+      </p:grpSpPr>
+      <p:sp>
+        <p:nvSpPr>
+          <p:cNvPr id="2" name="Text 0"/>
+          <p:cNvSpPr/>
+          <p:nvPr/>
+        </p:nvSpPr>
+        <p:spPr>
+          <a:xfrm>
+            <a:off x="411480" y="411480"/>
+            <a:ext cx="7315200" cy="256032"/>
+          </a:xfrm>
+          <a:prstGeom prst="rect">
+            <a:avLst/>
+          </a:prstGeom>
+          <a:noFill/>
+          <a:ln/>
+        </p:spPr>
+        <p:txBody>
+          <a:bodyPr wrap="square" lIns="0" tIns="0" rIns="0" bIns="0" rtlCol="0" anchor="ctr"/>
+          <a:lstStyle/>
+          <a:p>
+            <a:pPr indent="0" marL="0">
+              <a:buNone/>
+            </a:pPr>
+            <a:r>
+              <a:rPr lang="en-US" sz="1100" b="1" spc="160" kern="0" dirty="0">
+                <a:solidFill>
+                  <a:srgbClr val="3B9DF5"/>
+                </a:solidFill>
+                <a:latin typeface="Arial" pitchFamily="34" charset="0"/>
+                <a:ea typeface="Arial" pitchFamily="34" charset="-122"/>
+                <a:cs typeface="Arial" pitchFamily="34" charset="-120"/>
+              </a:rPr>
+              <a:t>PASSOS 05 E 06</a:t>
+            </a:r>
+            <a:endParaRPr lang="en-US" sz="1100" dirty="0"/>
+          </a:p>
+        </p:txBody>
+      </p:sp>
+      <p:sp>
+        <p:nvSpPr>
+          <p:cNvPr id="3" name="Text 1"/>
+          <p:cNvSpPr/>
+          <p:nvPr/>
+        </p:nvSpPr>
+        <p:spPr>
+          <a:xfrm>
+            <a:off x="411480" y="822960"/>
+            <a:ext cx="8321040" cy="1005840"/>
+          </a:xfrm>
+          <a:prstGeom prst="rect">
+            <a:avLst/>
+          </a:prstGeom>
+          <a:noFill/>
+          <a:ln/>
+        </p:spPr>
+        <p:txBody>
+          <a:bodyPr wrap="square" lIns="0" tIns="0" rIns="0" bIns="0" rtlCol="0" anchor="ctr"/>
+          <a:lstStyle/>
+          <a:p>
+            <a:pPr indent="0" marL="0">
+              <a:lnSpc>
+                <a:spcPts val="4000"/>
+              </a:lnSpc>
+              <a:buNone/>
+            </a:pPr>
+            <a:r>
+              <a:rPr lang="en-US" sz="3200" b="1" dirty="0">
+                <a:solidFill>
+                  <a:srgbClr val="FFFFFF"/>
+                </a:solidFill>
+                <a:latin typeface="Arial" pitchFamily="34" charset="0"/>
+                <a:ea typeface="Arial" pitchFamily="34" charset="-122"/>
+                <a:cs typeface="Arial" pitchFamily="34" charset="-120"/>
+              </a:rPr>
+              <a:t>Ambiente Python e Git</a:t>
+            </a:r>
+            <a:endParaRPr lang="en-US" sz="3200" dirty="0"/>
+          </a:p>
+        </p:txBody>
+      </p:sp>
+      <p:sp>
+        <p:nvSpPr>
+          <p:cNvPr id="4" name="Shape 2"/>
+          <p:cNvSpPr/>
+          <p:nvPr/>
+        </p:nvSpPr>
+        <p:spPr>
+          <a:xfrm>
+            <a:off x="411480" y="1874520"/>
+            <a:ext cx="8321040" cy="1207008"/>
+          </a:xfrm>
+          <a:prstGeom prst="roundRect">
+            <a:avLst>
+              <a:gd name="adj" fmla="val 3788"/>
+            </a:avLst>
+          </a:prstGeom>
+          <a:solidFill>
+            <a:srgbClr val="0D1522"/>
+          </a:solidFill>
+          <a:ln w="13970">
+            <a:solidFill>
+              <a:srgbClr val="1F3A5A"/>
+            </a:solidFill>
+            <a:prstDash val="solid"/>
+          </a:ln>
+        </p:spPr>
+      </p:sp>
+      <p:sp>
+        <p:nvSpPr>
+          <p:cNvPr id="5" name="Text 3"/>
+          <p:cNvSpPr/>
+          <p:nvPr/>
+        </p:nvSpPr>
+        <p:spPr>
+          <a:xfrm>
+            <a:off x="685800" y="1993392"/>
+            <a:ext cx="7772400" cy="1005840"/>
+          </a:xfrm>
+          <a:prstGeom prst="rect">
+            <a:avLst/>
+          </a:prstGeom>
+          <a:noFill/>
+          <a:ln/>
+        </p:spPr>
+        <p:txBody>
+          <a:bodyPr wrap="square" lIns="0" tIns="0" rIns="0" bIns="0" rtlCol="0" anchor="ctr"/>
+          <a:lstStyle/>
+          <a:p>
+            <a:pPr indent="0" marL="0">
+              <a:lnSpc>
+                <a:spcPts val="1500"/>
+              </a:lnSpc>
+              <a:buNone/>
+            </a:pPr>
+            <a:r>
+              <a:rPr lang="en-US" sz="1150" dirty="0">
+                <a:solidFill>
+                  <a:srgbClr val="FFFFFF"/>
+                </a:solidFill>
+                <a:latin typeface="Consolas" pitchFamily="34" charset="0"/>
+                <a:ea typeface="Consolas" pitchFamily="34" charset="-122"/>
+                <a:cs typeface="Consolas" pitchFamily="34" charset="-120"/>
+              </a:rPr>
+              <a:t>cd imersao_agosto</a:t>
+            </a:r>
+            <a:endParaRPr lang="en-US" sz="1150" dirty="0"/>
+          </a:p>
+          <a:p>
+            <a:pPr indent="0" marL="0">
+              <a:lnSpc>
+                <a:spcPts val="1500"/>
+              </a:lnSpc>
+              <a:buNone/>
+            </a:pPr>
+            <a:r>
+              <a:rPr lang="en-US" sz="1150" dirty="0">
+                <a:solidFill>
+                  <a:srgbClr val="FFFFFF"/>
+                </a:solidFill>
+                <a:latin typeface="Consolas" pitchFamily="34" charset="0"/>
+                <a:ea typeface="Consolas" pitchFamily="34" charset="-122"/>
+                <a:cs typeface="Consolas" pitchFamily="34" charset="-120"/>
+              </a:rPr>
+              <a:t>uv venv --python 3.12 --seed</a:t>
+            </a:r>
+            <a:endParaRPr lang="en-US" sz="1150" dirty="0"/>
+          </a:p>
+          <a:p>
+            <a:pPr indent="0" marL="0">
+              <a:lnSpc>
+                <a:spcPts val="1500"/>
+              </a:lnSpc>
+              <a:buNone/>
+            </a:pPr>
+            <a:r>
+              <a:rPr lang="en-US" sz="1150" dirty="0">
+                <a:solidFill>
+                  <a:srgbClr val="FFFFFF"/>
+                </a:solidFill>
+                <a:latin typeface="Consolas" pitchFamily="34" charset="0"/>
+                <a:ea typeface="Consolas" pitchFamily="34" charset="-122"/>
+                <a:cs typeface="Consolas" pitchFamily="34" charset="-120"/>
+              </a:rPr>
+              <a:t>source .venv/bin/activate</a:t>
+            </a:r>
+            <a:endParaRPr lang="en-US" sz="1150" dirty="0"/>
+          </a:p>
+          <a:p>
+            <a:pPr indent="0" marL="0">
+              <a:lnSpc>
+                <a:spcPts val="1500"/>
+              </a:lnSpc>
+              <a:buNone/>
+            </a:pPr>
+            <a:r>
+              <a:rPr lang="en-US" sz="1150" dirty="0">
+                <a:solidFill>
+                  <a:srgbClr val="FFFFFF"/>
+                </a:solidFill>
+                <a:latin typeface="Consolas" pitchFamily="34" charset="0"/>
+                <a:ea typeface="Consolas" pitchFamily="34" charset="-122"/>
+                <a:cs typeface="Consolas" pitchFamily="34" charset="-120"/>
+              </a:rPr>
+              <a:t>uv sync</a:t>
+            </a:r>
+            <a:endParaRPr lang="en-US" sz="1150" dirty="0"/>
+          </a:p>
+        </p:txBody>
+      </p:sp>
+      <p:sp>
+        <p:nvSpPr>
+          <p:cNvPr id="6" name="Shape 4"/>
+          <p:cNvSpPr/>
+          <p:nvPr/>
+        </p:nvSpPr>
+        <p:spPr>
+          <a:xfrm>
+            <a:off x="411480" y="3218688"/>
+            <a:ext cx="8321040" cy="914400"/>
+          </a:xfrm>
+          <a:prstGeom prst="roundRect">
+            <a:avLst>
+              <a:gd name="adj" fmla="val 5000"/>
+            </a:avLst>
+          </a:prstGeom>
+          <a:solidFill>
+            <a:srgbClr val="0D1522"/>
+          </a:solidFill>
+          <a:ln w="13970">
+            <a:solidFill>
+              <a:srgbClr val="1F3A5A"/>
+            </a:solidFill>
+            <a:prstDash val="solid"/>
+          </a:ln>
+        </p:spPr>
+      </p:sp>
+      <p:sp>
+        <p:nvSpPr>
+          <p:cNvPr id="7" name="Text 5"/>
+          <p:cNvSpPr/>
+          <p:nvPr/>
+        </p:nvSpPr>
+        <p:spPr>
+          <a:xfrm>
+            <a:off x="685800" y="3328416"/>
+            <a:ext cx="7772400" cy="731520"/>
+          </a:xfrm>
+          <a:prstGeom prst="rect">
+            <a:avLst/>
+          </a:prstGeom>
+          <a:noFill/>
+          <a:ln/>
+        </p:spPr>
+        <p:txBody>
+          <a:bodyPr wrap="square" lIns="0" tIns="0" rIns="0" bIns="0" rtlCol="0" anchor="ctr"/>
+          <a:lstStyle/>
+          <a:p>
+            <a:pPr indent="0" marL="0">
+              <a:lnSpc>
+                <a:spcPts val="1500"/>
+              </a:lnSpc>
+              <a:buNone/>
+            </a:pPr>
+            <a:r>
+              <a:rPr lang="en-US" sz="1150" dirty="0">
+                <a:solidFill>
+                  <a:srgbClr val="FFFFFF"/>
+                </a:solidFill>
+                <a:latin typeface="Consolas" pitchFamily="34" charset="0"/>
+                <a:ea typeface="Consolas" pitchFamily="34" charset="-122"/>
+                <a:cs typeface="Consolas" pitchFamily="34" charset="-120"/>
+              </a:rPr>
+              <a:t>git init</a:t>
+            </a:r>
+            <a:endParaRPr lang="en-US" sz="1150" dirty="0"/>
+          </a:p>
+          <a:p>
+            <a:pPr indent="0" marL="0">
+              <a:lnSpc>
+                <a:spcPts val="1500"/>
+              </a:lnSpc>
+              <a:buNone/>
+            </a:pPr>
+            <a:r>
+              <a:rPr lang="en-US" sz="1150" dirty="0">
+                <a:solidFill>
+                  <a:srgbClr val="FFFFFF"/>
+                </a:solidFill>
+                <a:latin typeface="Consolas" pitchFamily="34" charset="0"/>
+                <a:ea typeface="Consolas" pitchFamily="34" charset="-122"/>
+                <a:cs typeface="Consolas" pitchFamily="34" charset="-120"/>
+              </a:rPr>
+              <a:t>git add .</a:t>
+            </a:r>
+            <a:endParaRPr lang="en-US" sz="1150" dirty="0"/>
+          </a:p>
+          <a:p>
+            <a:pPr indent="0" marL="0">
+              <a:lnSpc>
+                <a:spcPts val="1500"/>
+              </a:lnSpc>
+              <a:buNone/>
+            </a:pPr>
+            <a:r>
+              <a:rPr lang="en-US" sz="1150" dirty="0">
+                <a:solidFill>
+                  <a:srgbClr val="FFFFFF"/>
+                </a:solidFill>
+                <a:latin typeface="Consolas" pitchFamily="34" charset="0"/>
+                <a:ea typeface="Consolas" pitchFamily="34" charset="-122"/>
+                <a:cs typeface="Consolas" pitchFamily="34" charset="-120"/>
+              </a:rPr>
+              <a:t>git commit -m "setup inicial"</a:t>
+            </a:r>
+            <a:endParaRPr lang="en-US" sz="1150" dirty="0"/>
+          </a:p>
+        </p:txBody>
+      </p:sp>
+      <p:sp>
+        <p:nvSpPr>
+          <p:cNvPr id="8" name="Shape 6"/>
+          <p:cNvSpPr/>
+          <p:nvPr/>
+        </p:nvSpPr>
+        <p:spPr>
+          <a:xfrm>
+            <a:off x="411480" y="4261104"/>
+            <a:ext cx="8321040" cy="548640"/>
+          </a:xfrm>
+          <a:prstGeom prst="roundRect">
+            <a:avLst>
+              <a:gd name="adj" fmla="val 8333"/>
+            </a:avLst>
+          </a:prstGeom>
+          <a:solidFill>
+            <a:srgbClr val="142337"/>
+          </a:solidFill>
+          <a:ln w="17780">
+            <a:solidFill>
+              <a:srgbClr val="3B9DF5"/>
+            </a:solidFill>
+            <a:prstDash val="solid"/>
+          </a:ln>
+        </p:spPr>
+      </p:sp>
+      <p:sp>
+        <p:nvSpPr>
+          <p:cNvPr id="9" name="Text 7"/>
+          <p:cNvSpPr/>
+          <p:nvPr/>
+        </p:nvSpPr>
+        <p:spPr>
+          <a:xfrm>
+            <a:off x="411480" y="4261104"/>
+            <a:ext cx="8321040" cy="548640"/>
+          </a:xfrm>
+          <a:prstGeom prst="rect">
+            <a:avLst/>
+          </a:prstGeom>
+          <a:noFill/>
+          <a:ln/>
+        </p:spPr>
+        <p:txBody>
+          <a:bodyPr wrap="square" lIns="0" tIns="0" rIns="0" bIns="0" rtlCol="0" anchor="ctr"/>
+          <a:lstStyle/>
+          <a:p>
+            <a:pPr algn="ctr" indent="0" marL="0">
+              <a:buNone/>
+            </a:pPr>
+            <a:r>
+              <a:rPr lang="en-US" sz="1250" b="1" dirty="0">
+                <a:solidFill>
+                  <a:srgbClr val="FFFFFF"/>
+                </a:solidFill>
+                <a:latin typeface="Arial" pitchFamily="34" charset="0"/>
+                <a:ea typeface="Arial" pitchFamily="34" charset="-122"/>
+                <a:cs typeface="Arial" pitchFamily="34" charset="-120"/>
+              </a:rPr>
+              <a:t>Python 3.12, não 3.13. Bibliotecas do Databricks ainda quebram na 3.13.</a:t>
+            </a:r>
+            <a:endParaRPr lang="en-US" sz="1250" dirty="0"/>
+          </a:p>
+        </p:txBody>
+      </p:sp>
+    </p:spTree>
+  </p:cSld>
+  <p:clrMapOvr>
+    <a:masterClrMapping/>
+  </p:clrMapOvr>
+</p:sld>
+</file>
+
+<file path=ppt/slides/slide51.xml><?xml version="1.0" encoding="utf-8"?>
+<p:sld xmlns:a="http://schemas.openxmlformats.org/drawingml/2006/main" xmlns:r="http://schemas.openxmlformats.org/officeDocument/2006/relationships" xmlns:p="http://schemas.openxmlformats.org/presentationml/2006/main">
+  <p:cSld name="Slide 48">
+    <p:bg>
+      <p:bgPr>
+        <a:solidFill>
+          <a:srgbClr val="070C16"/>
+        </a:solidFill>
+      </p:bgPr>
+    </p:bg>
+    <p:spTree>
+      <p:nvGrpSpPr>
+        <p:cNvPr id="1" name=""/>
+        <p:cNvGrpSpPr/>
+        <p:nvPr/>
+      </p:nvGrpSpPr>
+      <p:grpSpPr>
+        <a:xfrm>
+          <a:off x="0" y="0"/>
+          <a:ext cx="0" cy="0"/>
+          <a:chOff x="0" y="0"/>
+          <a:chExt cx="0" cy="0"/>
+        </a:xfrm>
+      </p:grpSpPr>
+      <p:sp>
+        <p:nvSpPr>
+          <p:cNvPr id="2" name="Text 0"/>
+          <p:cNvSpPr/>
+          <p:nvPr/>
+        </p:nvSpPr>
+        <p:spPr>
+          <a:xfrm>
+            <a:off x="411480" y="411480"/>
+            <a:ext cx="7315200" cy="256032"/>
+          </a:xfrm>
+          <a:prstGeom prst="rect">
+            <a:avLst/>
+          </a:prstGeom>
+          <a:noFill/>
+          <a:ln/>
+        </p:spPr>
+        <p:txBody>
+          <a:bodyPr wrap="square" lIns="0" tIns="0" rIns="0" bIns="0" rtlCol="0" anchor="ctr"/>
+          <a:lstStyle/>
+          <a:p>
+            <a:pPr indent="0" marL="0">
+              <a:buNone/>
+            </a:pPr>
+            <a:r>
+              <a:rPr lang="en-US" sz="1100" b="1" spc="160" kern="0" dirty="0">
+                <a:solidFill>
+                  <a:srgbClr val="3B9DF5"/>
+                </a:solidFill>
+                <a:latin typeface="Arial" pitchFamily="34" charset="0"/>
+                <a:ea typeface="Arial" pitchFamily="34" charset="-122"/>
+                <a:cs typeface="Arial" pitchFamily="34" charset="-120"/>
+              </a:rPr>
+              <a:t>SE DER ERRADO</a:t>
+            </a:r>
+            <a:endParaRPr lang="en-US" sz="1100" dirty="0"/>
+          </a:p>
+        </p:txBody>
+      </p:sp>
+      <p:sp>
+        <p:nvSpPr>
+          <p:cNvPr id="3" name="Text 1"/>
+          <p:cNvSpPr/>
+          <p:nvPr/>
+        </p:nvSpPr>
+        <p:spPr>
+          <a:xfrm>
+            <a:off x="411480" y="822960"/>
+            <a:ext cx="8321040" cy="1005840"/>
+          </a:xfrm>
+          <a:prstGeom prst="rect">
+            <a:avLst/>
+          </a:prstGeom>
+          <a:noFill/>
+          <a:ln/>
+        </p:spPr>
+        <p:txBody>
+          <a:bodyPr wrap="square" lIns="0" tIns="0" rIns="0" bIns="0" rtlCol="0" anchor="ctr"/>
+          <a:lstStyle/>
+          <a:p>
+            <a:pPr indent="0" marL="0">
+              <a:lnSpc>
+                <a:spcPts val="4000"/>
+              </a:lnSpc>
+              <a:buNone/>
+            </a:pPr>
+            <a:r>
+              <a:rPr lang="en-US" sz="3000" b="1" dirty="0">
+                <a:solidFill>
+                  <a:srgbClr val="FFFFFF"/>
+                </a:solidFill>
+                <a:latin typeface="Arial" pitchFamily="34" charset="0"/>
+                <a:ea typeface="Arial" pitchFamily="34" charset="-122"/>
+                <a:cs typeface="Arial" pitchFamily="34" charset="-120"/>
+              </a:rPr>
+              <a:t>Os erros que todo mundo comete</a:t>
+            </a:r>
+            <a:endParaRPr lang="en-US" sz="3000" dirty="0"/>
+          </a:p>
+        </p:txBody>
+      </p:sp>
+      <p:sp>
+        <p:nvSpPr>
+          <p:cNvPr id="4" name="Shape 2"/>
+          <p:cNvSpPr/>
+          <p:nvPr/>
+        </p:nvSpPr>
+        <p:spPr>
+          <a:xfrm>
+            <a:off x="411480" y="1847088"/>
+            <a:ext cx="8321040" cy="438912"/>
+          </a:xfrm>
+          <a:prstGeom prst="roundRect">
+            <a:avLst>
+              <a:gd name="adj" fmla="val 8333"/>
+            </a:avLst>
+          </a:prstGeom>
+          <a:solidFill>
+            <a:srgbClr val="0D1522"/>
+          </a:solidFill>
+          <a:ln w="12700">
+            <a:solidFill>
+              <a:srgbClr val="1F3A5A"/>
+            </a:solidFill>
+            <a:prstDash val="solid"/>
+          </a:ln>
+        </p:spPr>
+      </p:sp>
+      <p:sp>
+        <p:nvSpPr>
+          <p:cNvPr id="5" name="Text 3"/>
+          <p:cNvSpPr/>
+          <p:nvPr/>
+        </p:nvSpPr>
+        <p:spPr>
+          <a:xfrm>
+            <a:off x="658368" y="1847088"/>
+            <a:ext cx="3657600" cy="438912"/>
+          </a:xfrm>
+          <a:prstGeom prst="rect">
+            <a:avLst/>
+          </a:prstGeom>
+          <a:noFill/>
+          <a:ln/>
+        </p:spPr>
+        <p:txBody>
+          <a:bodyPr wrap="square" lIns="0" tIns="0" rIns="0" bIns="0" rtlCol="0" anchor="ctr"/>
+          <a:lstStyle/>
+          <a:p>
+            <a:pPr indent="0" marL="0">
+              <a:buNone/>
+            </a:pPr>
+            <a:r>
+              <a:rPr lang="en-US" sz="950" dirty="0">
+                <a:solidFill>
+                  <a:srgbClr val="7CC8FF"/>
+                </a:solidFill>
+                <a:latin typeface="Consolas" pitchFamily="34" charset="0"/>
+                <a:ea typeface="Consolas" pitchFamily="34" charset="-122"/>
+                <a:cs typeface="Consolas" pitchFamily="34" charset="-120"/>
+              </a:rPr>
+              <a:t>stored credentials from older CLI</a:t>
+            </a:r>
+            <a:endParaRPr lang="en-US" sz="950" dirty="0"/>
+          </a:p>
+        </p:txBody>
+      </p:sp>
+      <p:sp>
+        <p:nvSpPr>
+          <p:cNvPr id="6" name="Text 4"/>
+          <p:cNvSpPr/>
+          <p:nvPr/>
+        </p:nvSpPr>
+        <p:spPr>
+          <a:xfrm>
+            <a:off x="4480560" y="1847088"/>
+            <a:ext cx="4023360" cy="438912"/>
+          </a:xfrm>
+          <a:prstGeom prst="rect">
+            <a:avLst/>
+          </a:prstGeom>
+          <a:noFill/>
+          <a:ln/>
+        </p:spPr>
+        <p:txBody>
+          <a:bodyPr wrap="square" lIns="0" tIns="0" rIns="0" bIns="0" rtlCol="0" anchor="ctr"/>
+          <a:lstStyle/>
+          <a:p>
+            <a:pPr indent="0" marL="0">
+              <a:buNone/>
+            </a:pPr>
+            <a:r>
+              <a:rPr lang="en-US" sz="1100" dirty="0">
+                <a:solidFill>
+                  <a:srgbClr val="FFFFFF"/>
+                </a:solidFill>
+                <a:latin typeface="Arial" pitchFamily="34" charset="0"/>
+                <a:ea typeface="Arial" pitchFamily="34" charset="-122"/>
+                <a:cs typeface="Arial" pitchFamily="34" charset="-120"/>
+              </a:rPr>
+              <a:t>Rode databricks auth login de novo</a:t>
+            </a:r>
+            <a:endParaRPr lang="en-US" sz="1100" dirty="0"/>
+          </a:p>
+        </p:txBody>
+      </p:sp>
+      <p:sp>
+        <p:nvSpPr>
+          <p:cNvPr id="7" name="Shape 5"/>
+          <p:cNvSpPr/>
+          <p:nvPr/>
+        </p:nvSpPr>
+        <p:spPr>
+          <a:xfrm>
+            <a:off x="411480" y="2350008"/>
+            <a:ext cx="8321040" cy="438912"/>
+          </a:xfrm>
+          <a:prstGeom prst="roundRect">
+            <a:avLst>
+              <a:gd name="adj" fmla="val 8333"/>
+            </a:avLst>
+          </a:prstGeom>
+          <a:solidFill>
+            <a:srgbClr val="0D1522"/>
+          </a:solidFill>
+          <a:ln w="12700">
+            <a:solidFill>
+              <a:srgbClr val="1F3A5A"/>
+            </a:solidFill>
+            <a:prstDash val="solid"/>
+          </a:ln>
+        </p:spPr>
+      </p:sp>
+      <p:sp>
+        <p:nvSpPr>
+          <p:cNvPr id="8" name="Text 6"/>
+          <p:cNvSpPr/>
+          <p:nvPr/>
+        </p:nvSpPr>
+        <p:spPr>
+          <a:xfrm>
+            <a:off x="658368" y="2350008"/>
+            <a:ext cx="3657600" cy="438912"/>
+          </a:xfrm>
+          <a:prstGeom prst="rect">
+            <a:avLst/>
+          </a:prstGeom>
+          <a:noFill/>
+          <a:ln/>
+        </p:spPr>
+        <p:txBody>
+          <a:bodyPr wrap="square" lIns="0" tIns="0" rIns="0" bIns="0" rtlCol="0" anchor="ctr"/>
+          <a:lstStyle/>
+          <a:p>
+            <a:pPr indent="0" marL="0">
+              <a:buNone/>
+            </a:pPr>
+            <a:r>
+              <a:rPr lang="en-US" sz="950" dirty="0">
+                <a:solidFill>
+                  <a:srgbClr val="7CC8FF"/>
+                </a:solidFill>
+                <a:latin typeface="Consolas" pitchFamily="34" charset="0"/>
+                <a:ea typeface="Consolas" pitchFamily="34" charset="-122"/>
+                <a:cs typeface="Consolas" pitchFamily="34" charset="-120"/>
+              </a:rPr>
+              <a:t>command not found</a:t>
+            </a:r>
+            <a:endParaRPr lang="en-US" sz="950" dirty="0"/>
+          </a:p>
+        </p:txBody>
+      </p:sp>
+      <p:sp>
+        <p:nvSpPr>
+          <p:cNvPr id="9" name="Text 7"/>
+          <p:cNvSpPr/>
+          <p:nvPr/>
+        </p:nvSpPr>
+        <p:spPr>
+          <a:xfrm>
+            <a:off x="4480560" y="2350008"/>
+            <a:ext cx="4023360" cy="438912"/>
+          </a:xfrm>
+          <a:prstGeom prst="rect">
+            <a:avLst/>
+          </a:prstGeom>
+          <a:noFill/>
+          <a:ln/>
+        </p:spPr>
+        <p:txBody>
+          <a:bodyPr wrap="square" lIns="0" tIns="0" rIns="0" bIns="0" rtlCol="0" anchor="ctr"/>
+          <a:lstStyle/>
+          <a:p>
+            <a:pPr indent="0" marL="0">
+              <a:buNone/>
+            </a:pPr>
+            <a:r>
+              <a:rPr lang="en-US" sz="1100" dirty="0">
+                <a:solidFill>
+                  <a:srgbClr val="FFFFFF"/>
+                </a:solidFill>
+                <a:latin typeface="Arial" pitchFamily="34" charset="0"/>
+                <a:ea typeface="Arial" pitchFamily="34" charset="-122"/>
+                <a:cs typeface="Arial" pitchFamily="34" charset="-120"/>
+              </a:rPr>
+              <a:t>Reinicie o terminal depois de instalar</a:t>
+            </a:r>
+            <a:endParaRPr lang="en-US" sz="1100" dirty="0"/>
+          </a:p>
+        </p:txBody>
+      </p:sp>
+      <p:sp>
+        <p:nvSpPr>
+          <p:cNvPr id="10" name="Shape 8"/>
+          <p:cNvSpPr/>
+          <p:nvPr/>
+        </p:nvSpPr>
+        <p:spPr>
+          <a:xfrm>
+            <a:off x="411480" y="2852928"/>
+            <a:ext cx="8321040" cy="438912"/>
+          </a:xfrm>
+          <a:prstGeom prst="roundRect">
+            <a:avLst>
+              <a:gd name="adj" fmla="val 8333"/>
+            </a:avLst>
+          </a:prstGeom>
+          <a:solidFill>
+            <a:srgbClr val="0D1522"/>
+          </a:solidFill>
+          <a:ln w="12700">
+            <a:solidFill>
+              <a:srgbClr val="1F3A5A"/>
+            </a:solidFill>
+            <a:prstDash val="solid"/>
+          </a:ln>
+        </p:spPr>
+      </p:sp>
+      <p:sp>
+        <p:nvSpPr>
+          <p:cNvPr id="11" name="Text 9"/>
+          <p:cNvSpPr/>
+          <p:nvPr/>
+        </p:nvSpPr>
+        <p:spPr>
+          <a:xfrm>
+            <a:off x="658368" y="2852928"/>
+            <a:ext cx="3657600" cy="438912"/>
+          </a:xfrm>
+          <a:prstGeom prst="rect">
+            <a:avLst/>
+          </a:prstGeom>
+          <a:noFill/>
+          <a:ln/>
+        </p:spPr>
+        <p:txBody>
+          <a:bodyPr wrap="square" lIns="0" tIns="0" rIns="0" bIns="0" rtlCol="0" anchor="ctr"/>
+          <a:lstStyle/>
+          <a:p>
+            <a:pPr indent="0" marL="0">
+              <a:buNone/>
+            </a:pPr>
+            <a:r>
+              <a:rPr lang="en-US" sz="950" dirty="0">
+                <a:solidFill>
+                  <a:srgbClr val="7CC8FF"/>
+                </a:solidFill>
+                <a:latin typeface="Consolas" pitchFamily="34" charset="0"/>
+                <a:ea typeface="Consolas" pitchFamily="34" charset="-122"/>
+                <a:cs typeface="Consolas" pitchFamily="34" charset="-120"/>
+              </a:rPr>
+              <a:t>versão abaixo de 0.205</a:t>
+            </a:r>
+            <a:endParaRPr lang="en-US" sz="950" dirty="0"/>
+          </a:p>
+        </p:txBody>
+      </p:sp>
+      <p:sp>
+        <p:nvSpPr>
+          <p:cNvPr id="12" name="Text 10"/>
+          <p:cNvSpPr/>
+          <p:nvPr/>
+        </p:nvSpPr>
+        <p:spPr>
+          <a:xfrm>
+            <a:off x="4480560" y="2852928"/>
+            <a:ext cx="4023360" cy="438912"/>
+          </a:xfrm>
+          <a:prstGeom prst="rect">
+            <a:avLst/>
+          </a:prstGeom>
+          <a:noFill/>
+          <a:ln/>
+        </p:spPr>
+        <p:txBody>
+          <a:bodyPr wrap="square" lIns="0" tIns="0" rIns="0" bIns="0" rtlCol="0" anchor="ctr"/>
+          <a:lstStyle/>
+          <a:p>
+            <a:pPr indent="0" marL="0">
+              <a:buNone/>
+            </a:pPr>
+            <a:r>
+              <a:rPr lang="en-US" sz="1100" dirty="0">
+                <a:solidFill>
+                  <a:srgbClr val="FFFFFF"/>
+                </a:solidFill>
+                <a:latin typeface="Arial" pitchFamily="34" charset="0"/>
+                <a:ea typeface="Arial" pitchFamily="34" charset="-122"/>
+                <a:cs typeface="Arial" pitchFamily="34" charset="-120"/>
+              </a:rPr>
+              <a:t>É a CLI antiga. Desinstale e reinstale.</a:t>
+            </a:r>
+            <a:endParaRPr lang="en-US" sz="1100" dirty="0"/>
+          </a:p>
+        </p:txBody>
+      </p:sp>
+      <p:sp>
+        <p:nvSpPr>
+          <p:cNvPr id="13" name="Shape 11"/>
+          <p:cNvSpPr/>
+          <p:nvPr/>
+        </p:nvSpPr>
+        <p:spPr>
+          <a:xfrm>
+            <a:off x="411480" y="3355848"/>
+            <a:ext cx="8321040" cy="438912"/>
+          </a:xfrm>
+          <a:prstGeom prst="roundRect">
+            <a:avLst>
+              <a:gd name="adj" fmla="val 8333"/>
+            </a:avLst>
+          </a:prstGeom>
+          <a:solidFill>
+            <a:srgbClr val="0D1522"/>
+          </a:solidFill>
+          <a:ln w="12700">
+            <a:solidFill>
+              <a:srgbClr val="1F3A5A"/>
+            </a:solidFill>
+            <a:prstDash val="solid"/>
+          </a:ln>
+        </p:spPr>
+      </p:sp>
+      <p:sp>
+        <p:nvSpPr>
+          <p:cNvPr id="14" name="Text 12"/>
+          <p:cNvSpPr/>
+          <p:nvPr/>
+        </p:nvSpPr>
+        <p:spPr>
+          <a:xfrm>
+            <a:off x="658368" y="3355848"/>
+            <a:ext cx="3657600" cy="438912"/>
+          </a:xfrm>
+          <a:prstGeom prst="rect">
+            <a:avLst/>
+          </a:prstGeom>
+          <a:noFill/>
+          <a:ln/>
+        </p:spPr>
+        <p:txBody>
+          <a:bodyPr wrap="square" lIns="0" tIns="0" rIns="0" bIns="0" rtlCol="0" anchor="ctr"/>
+          <a:lstStyle/>
+          <a:p>
+            <a:pPr indent="0" marL="0">
+              <a:buNone/>
+            </a:pPr>
+            <a:r>
+              <a:rPr lang="en-US" sz="950" dirty="0">
+                <a:solidFill>
+                  <a:srgbClr val="7CC8FF"/>
+                </a:solidFill>
+                <a:latin typeface="Consolas" pitchFamily="34" charset="0"/>
+                <a:ea typeface="Consolas" pitchFamily="34" charset="-122"/>
+                <a:cs typeface="Consolas" pitchFamily="34" charset="-120"/>
+              </a:rPr>
+              <a:t>deploy falha por compute</a:t>
+            </a:r>
+            <a:endParaRPr lang="en-US" sz="950" dirty="0"/>
+          </a:p>
+        </p:txBody>
+      </p:sp>
+      <p:sp>
+        <p:nvSpPr>
+          <p:cNvPr id="15" name="Text 13"/>
+          <p:cNvSpPr/>
+          <p:nvPr/>
+        </p:nvSpPr>
+        <p:spPr>
+          <a:xfrm>
+            <a:off x="4480560" y="3355848"/>
+            <a:ext cx="4023360" cy="438912"/>
+          </a:xfrm>
+          <a:prstGeom prst="rect">
+            <a:avLst/>
+          </a:prstGeom>
+          <a:noFill/>
+          <a:ln/>
+        </p:spPr>
+        <p:txBody>
+          <a:bodyPr wrap="square" lIns="0" tIns="0" rIns="0" bIns="0" rtlCol="0" anchor="ctr"/>
+          <a:lstStyle/>
+          <a:p>
+            <a:pPr indent="0" marL="0">
+              <a:buNone/>
+            </a:pPr>
+            <a:r>
+              <a:rPr lang="en-US" sz="1100" dirty="0">
+                <a:solidFill>
+                  <a:srgbClr val="FFFFFF"/>
+                </a:solidFill>
+                <a:latin typeface="Arial" pitchFamily="34" charset="0"/>
+                <a:ea typeface="Arial" pitchFamily="34" charset="-122"/>
+                <a:cs typeface="Arial" pitchFamily="34" charset="-120"/>
+              </a:rPr>
+              <a:t>Você respondeu no para serverless</a:t>
+            </a:r>
+            <a:endParaRPr lang="en-US" sz="1100" dirty="0"/>
+          </a:p>
+        </p:txBody>
+      </p:sp>
+      <p:sp>
+        <p:nvSpPr>
+          <p:cNvPr id="16" name="Shape 14"/>
+          <p:cNvSpPr/>
+          <p:nvPr/>
+        </p:nvSpPr>
+        <p:spPr>
+          <a:xfrm>
+            <a:off x="411480" y="3858768"/>
+            <a:ext cx="8321040" cy="438912"/>
+          </a:xfrm>
+          <a:prstGeom prst="roundRect">
+            <a:avLst>
+              <a:gd name="adj" fmla="val 8333"/>
+            </a:avLst>
+          </a:prstGeom>
+          <a:solidFill>
+            <a:srgbClr val="0D1522"/>
+          </a:solidFill>
+          <a:ln w="12700">
+            <a:solidFill>
+              <a:srgbClr val="1F3A5A"/>
+            </a:solidFill>
+            <a:prstDash val="solid"/>
+          </a:ln>
+        </p:spPr>
+      </p:sp>
+      <p:sp>
+        <p:nvSpPr>
+          <p:cNvPr id="17" name="Text 15"/>
+          <p:cNvSpPr/>
+          <p:nvPr/>
+        </p:nvSpPr>
+        <p:spPr>
+          <a:xfrm>
+            <a:off x="658368" y="3858768"/>
+            <a:ext cx="3657600" cy="438912"/>
+          </a:xfrm>
+          <a:prstGeom prst="rect">
+            <a:avLst/>
+          </a:prstGeom>
+          <a:noFill/>
+          <a:ln/>
+        </p:spPr>
+        <p:txBody>
+          <a:bodyPr wrap="square" lIns="0" tIns="0" rIns="0" bIns="0" rtlCol="0" anchor="ctr"/>
+          <a:lstStyle/>
+          <a:p>
+            <a:pPr indent="0" marL="0">
+              <a:buNone/>
+            </a:pPr>
+            <a:r>
+              <a:rPr lang="en-US" sz="950" dirty="0">
+                <a:solidFill>
+                  <a:srgbClr val="7CC8FF"/>
+                </a:solidFill>
+                <a:latin typeface="Consolas" pitchFamily="34" charset="0"/>
+                <a:ea typeface="Consolas" pitchFamily="34" charset="-122"/>
+                <a:cs typeface="Consolas" pitchFamily="34" charset="-120"/>
+              </a:rPr>
+              <a:t>biblioteca não instala</a:t>
+            </a:r>
+            <a:endParaRPr lang="en-US" sz="950" dirty="0"/>
+          </a:p>
+        </p:txBody>
+      </p:sp>
+      <p:sp>
+        <p:nvSpPr>
+          <p:cNvPr id="18" name="Text 16"/>
+          <p:cNvSpPr/>
+          <p:nvPr/>
+        </p:nvSpPr>
+        <p:spPr>
+          <a:xfrm>
+            <a:off x="4480560" y="3858768"/>
+            <a:ext cx="4023360" cy="438912"/>
+          </a:xfrm>
+          <a:prstGeom prst="rect">
+            <a:avLst/>
+          </a:prstGeom>
+          <a:noFill/>
+          <a:ln/>
+        </p:spPr>
+        <p:txBody>
+          <a:bodyPr wrap="square" lIns="0" tIns="0" rIns="0" bIns="0" rtlCol="0" anchor="ctr"/>
+          <a:lstStyle/>
+          <a:p>
+            <a:pPr indent="0" marL="0">
+              <a:buNone/>
+            </a:pPr>
+            <a:r>
+              <a:rPr lang="en-US" sz="1100" dirty="0">
+                <a:solidFill>
+                  <a:srgbClr val="FFFFFF"/>
+                </a:solidFill>
+                <a:latin typeface="Arial" pitchFamily="34" charset="0"/>
+                <a:ea typeface="Arial" pitchFamily="34" charset="-122"/>
+                <a:cs typeface="Arial" pitchFamily="34" charset="-120"/>
+              </a:rPr>
+              <a:t>Você está no Python 3.13. Volte pra 3.12.</a:t>
+            </a:r>
+            <a:endParaRPr lang="en-US" sz="1100" dirty="0"/>
+          </a:p>
+        </p:txBody>
+      </p:sp>
+      <p:sp>
+        <p:nvSpPr>
+          <p:cNvPr id="19" name="Shape 17"/>
+          <p:cNvSpPr/>
+          <p:nvPr/>
+        </p:nvSpPr>
+        <p:spPr>
+          <a:xfrm>
+            <a:off x="411480" y="4361688"/>
+            <a:ext cx="8321040" cy="438912"/>
+          </a:xfrm>
+          <a:prstGeom prst="roundRect">
+            <a:avLst>
+              <a:gd name="adj" fmla="val 8333"/>
+            </a:avLst>
+          </a:prstGeom>
+          <a:solidFill>
+            <a:srgbClr val="0D1522"/>
+          </a:solidFill>
+          <a:ln w="12700">
+            <a:solidFill>
+              <a:srgbClr val="1F3A5A"/>
+            </a:solidFill>
+            <a:prstDash val="solid"/>
+          </a:ln>
+        </p:spPr>
+      </p:sp>
+      <p:sp>
+        <p:nvSpPr>
+          <p:cNvPr id="20" name="Text 18"/>
+          <p:cNvSpPr/>
+          <p:nvPr/>
+        </p:nvSpPr>
+        <p:spPr>
+          <a:xfrm>
+            <a:off x="658368" y="4361688"/>
+            <a:ext cx="3657600" cy="438912"/>
+          </a:xfrm>
+          <a:prstGeom prst="rect">
+            <a:avLst/>
+          </a:prstGeom>
+          <a:noFill/>
+          <a:ln/>
+        </p:spPr>
+        <p:txBody>
+          <a:bodyPr wrap="square" lIns="0" tIns="0" rIns="0" bIns="0" rtlCol="0" anchor="ctr"/>
+          <a:lstStyle/>
+          <a:p>
+            <a:pPr indent="0" marL="0">
+              <a:buNone/>
+            </a:pPr>
+            <a:r>
+              <a:rPr lang="en-US" sz="950" dirty="0">
+                <a:solidFill>
+                  <a:srgbClr val="7CC8FF"/>
+                </a:solidFill>
+                <a:latin typeface="Consolas" pitchFamily="34" charset="0"/>
+                <a:ea typeface="Consolas" pitchFamily="34" charset="-122"/>
+                <a:cs typeface="Consolas" pitchFamily="34" charset="-120"/>
+              </a:rPr>
+              <a:t>compute desligado</a:t>
+            </a:r>
+            <a:endParaRPr lang="en-US" sz="950" dirty="0"/>
+          </a:p>
+        </p:txBody>
+      </p:sp>
+      <p:sp>
+        <p:nvSpPr>
+          <p:cNvPr id="21" name="Text 19"/>
+          <p:cNvSpPr/>
+          <p:nvPr/>
+        </p:nvSpPr>
+        <p:spPr>
+          <a:xfrm>
+            <a:off x="4480560" y="4361688"/>
+            <a:ext cx="4023360" cy="438912"/>
+          </a:xfrm>
+          <a:prstGeom prst="rect">
+            <a:avLst/>
+          </a:prstGeom>
+          <a:noFill/>
+          <a:ln/>
+        </p:spPr>
+        <p:txBody>
+          <a:bodyPr wrap="square" lIns="0" tIns="0" rIns="0" bIns="0" rtlCol="0" anchor="ctr"/>
+          <a:lstStyle/>
+          <a:p>
+            <a:pPr indent="0" marL="0">
+              <a:buNone/>
+            </a:pPr>
+            <a:r>
+              <a:rPr lang="en-US" sz="1100" dirty="0">
+                <a:solidFill>
+                  <a:srgbClr val="FFFFFF"/>
+                </a:solidFill>
+                <a:latin typeface="Arial" pitchFamily="34" charset="0"/>
+                <a:ea typeface="Arial" pitchFamily="34" charset="-122"/>
+                <a:cs typeface="Arial" pitchFamily="34" charset="-120"/>
+              </a:rPr>
+              <a:t>Cota do Free Edition estourou. Espere o dia seguinte.</a:t>
+            </a:r>
+            <a:endParaRPr lang="en-US" sz="1100" dirty="0"/>
+          </a:p>
+        </p:txBody>
+      </p:sp>
+      <p:sp>
+        <p:nvSpPr>
+          <p:cNvPr id="22" name="Text 20"/>
+          <p:cNvSpPr/>
+          <p:nvPr/>
+        </p:nvSpPr>
+        <p:spPr>
+          <a:xfrm>
+            <a:off x="411480" y="4754880"/>
+            <a:ext cx="8321040" cy="274320"/>
+          </a:xfrm>
+          <a:prstGeom prst="rect">
+            <a:avLst/>
+          </a:prstGeom>
+          <a:noFill/>
+          <a:ln/>
+        </p:spPr>
+        <p:txBody>
+          <a:bodyPr wrap="square" lIns="0" tIns="0" rIns="0" bIns="0" rtlCol="0" anchor="ctr"/>
+          <a:lstStyle/>
+          <a:p>
+            <a:pPr algn="ctr" indent="0" marL="0">
+              <a:buNone/>
+            </a:pPr>
+            <a:r>
+              <a:rPr lang="en-US" sz="1050" dirty="0">
+                <a:solidFill>
+                  <a:srgbClr val="7CC8FF"/>
+                </a:solidFill>
+                <a:latin typeface="Arial" pitchFamily="34" charset="0"/>
+                <a:ea typeface="Arial" pitchFamily="34" charset="-122"/>
+                <a:cs typeface="Arial" pitchFamily="34" charset="-120"/>
+              </a:rPr>
+              <a:t>Erro faz parte. Leia a mensagem — quase sempre ela já diz o que fazer.</a:t>
+            </a:r>
+            <a:endParaRPr lang="en-US" sz="1050" dirty="0"/>
+          </a:p>
+        </p:txBody>
+      </p:sp>
+    </p:spTree>
+  </p:cSld>
+  <p:clrMapOvr>
+    <a:masterClrMapping/>
+  </p:clrMapOvr>
+</p:sld>
+</file>
+
+<file path=ppt/slides/slide52.xml><?xml version="1.0" encoding="utf-8"?>
+<p:sld xmlns:a="http://schemas.openxmlformats.org/drawingml/2006/main" xmlns:r="http://schemas.openxmlformats.org/officeDocument/2006/relationships" xmlns:p="http://schemas.openxmlformats.org/presentationml/2006/main">
+  <p:cSld name="Slide 49">
+    <p:bg>
+      <p:bgPr>
+        <a:solidFill>
+          <a:srgbClr val="070C16"/>
+        </a:solidFill>
+      </p:bgPr>
+    </p:bg>
+    <p:spTree>
+      <p:nvGrpSpPr>
+        <p:cNvPr id="1" name=""/>
+        <p:cNvGrpSpPr/>
+        <p:nvPr/>
+      </p:nvGrpSpPr>
+      <p:grpSpPr>
+        <a:xfrm>
+          <a:off x="0" y="0"/>
+          <a:ext cx="0" cy="0"/>
+          <a:chOff x="0" y="0"/>
+          <a:chExt cx="0" cy="0"/>
+        </a:xfrm>
+      </p:grpSpPr>
+      <p:sp>
+        <p:nvSpPr>
+          <p:cNvPr id="2" name="Shape 0"/>
+          <p:cNvSpPr/>
+          <p:nvPr/>
+        </p:nvSpPr>
+        <p:spPr>
+          <a:xfrm rot="5400000">
+            <a:off x="7635240" y="-658368"/>
+            <a:ext cx="1554480" cy="1325880"/>
+          </a:xfrm>
+          <a:prstGeom prst="triangle">
+            <a:avLst/>
+          </a:prstGeom>
+          <a:solidFill>
+            <a:srgbClr val="3B9DF5"/>
+          </a:solidFill>
+          <a:ln w="12700">
+            <a:solidFill>
+              <a:srgbClr val="333333"/>
+            </a:solidFill>
+            <a:prstDash val="solid"/>
+          </a:ln>
+        </p:spPr>
+      </p:sp>
+      <p:sp>
+        <p:nvSpPr>
+          <p:cNvPr id="3" name="Text 1"/>
+          <p:cNvSpPr/>
+          <p:nvPr/>
+        </p:nvSpPr>
+        <p:spPr>
+          <a:xfrm rot="2700000">
+            <a:off x="7882128" y="118872"/>
+            <a:ext cx="1005840" cy="182880"/>
+          </a:xfrm>
+          <a:prstGeom prst="rect">
+            <a:avLst/>
+          </a:prstGeom>
+          <a:noFill/>
+          <a:ln/>
+        </p:spPr>
+        <p:txBody>
+          <a:bodyPr wrap="square" lIns="0" tIns="0" rIns="0" bIns="0" rtlCol="0" anchor="ctr"/>
+          <a:lstStyle/>
+          <a:p>
+            <a:pPr algn="ctr" indent="0" marL="0">
+              <a:buNone/>
+            </a:pPr>
+            <a:r>
+              <a:rPr lang="en-US" sz="750" b="1" spc="60" kern="0" dirty="0">
+                <a:solidFill>
+                  <a:srgbClr val="FFFFFF"/>
+                </a:solidFill>
+                <a:latin typeface="Arial" pitchFamily="34" charset="0"/>
+                <a:ea typeface="Arial" pitchFamily="34" charset="-122"/>
+                <a:cs typeface="Arial" pitchFamily="34" charset="-120"/>
+              </a:rPr>
+              <a:t>ATÉ AMANHÃ</a:t>
+            </a:r>
+            <a:endParaRPr lang="en-US" sz="750" dirty="0"/>
+          </a:p>
+        </p:txBody>
+      </p:sp>
+      <p:sp>
+        <p:nvSpPr>
+          <p:cNvPr id="4" name="Text 2"/>
+          <p:cNvSpPr/>
+          <p:nvPr/>
+        </p:nvSpPr>
+        <p:spPr>
+          <a:xfrm>
+            <a:off x="411480" y="1554480"/>
+            <a:ext cx="7315200" cy="320040"/>
+          </a:xfrm>
+          <a:prstGeom prst="rect">
+            <a:avLst/>
+          </a:prstGeom>
+          <a:noFill/>
+          <a:ln/>
+        </p:spPr>
+        <p:txBody>
+          <a:bodyPr wrap="square" lIns="0" tIns="0" rIns="0" bIns="0" rtlCol="0" anchor="ctr"/>
+          <a:lstStyle/>
+          <a:p>
+            <a:pPr indent="0" marL="0">
+              <a:buNone/>
+            </a:pPr>
+            <a:r>
+              <a:rPr lang="en-US" sz="1200" b="1" spc="200" kern="0" dirty="0">
+                <a:solidFill>
+                  <a:srgbClr val="3B9DF5"/>
+                </a:solidFill>
+                <a:latin typeface="Arial" pitchFamily="34" charset="0"/>
+                <a:ea typeface="Arial" pitchFamily="34" charset="-122"/>
+                <a:cs typeface="Arial" pitchFamily="34" charset="-120"/>
+              </a:rPr>
+              <a:t>OBRIGADO POR HOJE</a:t>
+            </a:r>
+            <a:endParaRPr lang="en-US" sz="1200" dirty="0"/>
+          </a:p>
+        </p:txBody>
+      </p:sp>
+      <p:sp>
+        <p:nvSpPr>
+          <p:cNvPr id="5" name="Text 3"/>
+          <p:cNvSpPr/>
+          <p:nvPr/>
+        </p:nvSpPr>
+        <p:spPr>
+          <a:xfrm>
+            <a:off x="411480" y="1965960"/>
+            <a:ext cx="8229600" cy="1371600"/>
+          </a:xfrm>
+          <a:prstGeom prst="rect">
+            <a:avLst/>
+          </a:prstGeom>
+          <a:noFill/>
+          <a:ln/>
+        </p:spPr>
+        <p:txBody>
+          <a:bodyPr wrap="square" lIns="0" tIns="0" rIns="0" bIns="0" rtlCol="0" anchor="ctr"/>
+          <a:lstStyle/>
+          <a:p>
+            <a:pPr indent="0" marL="0">
+              <a:lnSpc>
+                <a:spcPts val="4600"/>
+              </a:lnSpc>
+              <a:buNone/>
+            </a:pPr>
+            <a:r>
+              <a:rPr lang="en-US" sz="4000" b="1" dirty="0">
+                <a:solidFill>
+                  <a:srgbClr val="FFFFFF"/>
+                </a:solidFill>
+                <a:latin typeface="Arial" pitchFamily="34" charset="0"/>
+                <a:ea typeface="Arial" pitchFamily="34" charset="-122"/>
+                <a:cs typeface="Arial" pitchFamily="34" charset="-120"/>
+              </a:rPr>
+              <a:t>Terça, 19h30.</a:t>
+            </a:r>
+            <a:endParaRPr lang="en-US" sz="4000" dirty="0"/>
+          </a:p>
+          <a:p>
+            <a:pPr indent="0" marL="0">
+              <a:lnSpc>
+                <a:spcPts val="4600"/>
+              </a:lnSpc>
+              <a:buNone/>
+            </a:pPr>
+            <a:r>
+              <a:rPr lang="en-US" sz="4000" b="1" dirty="0">
+                <a:solidFill>
+                  <a:srgbClr val="FFFFFF"/>
+                </a:solidFill>
+                <a:latin typeface="Arial" pitchFamily="34" charset="0"/>
+                <a:ea typeface="Arial" pitchFamily="34" charset="-122"/>
+                <a:cs typeface="Arial" pitchFamily="34" charset="-120"/>
+              </a:rPr>
+              <a:t>Mesmo lugar.</a:t>
+            </a:r>
+            <a:endParaRPr lang="en-US" sz="4000" dirty="0"/>
+          </a:p>
+        </p:txBody>
+      </p:sp>
+      <p:sp>
+        <p:nvSpPr>
+          <p:cNvPr id="6" name="Text 4"/>
+          <p:cNvSpPr/>
+          <p:nvPr/>
+        </p:nvSpPr>
+        <p:spPr>
+          <a:xfrm>
+            <a:off x="411480" y="3520440"/>
+            <a:ext cx="7863840" cy="548640"/>
+          </a:xfrm>
+          <a:prstGeom prst="rect">
+            <a:avLst/>
+          </a:prstGeom>
+          <a:noFill/>
+          <a:ln/>
+        </p:spPr>
+        <p:txBody>
+          <a:bodyPr wrap="square" lIns="0" tIns="0" rIns="0" bIns="0" rtlCol="0" anchor="ctr"/>
+          <a:lstStyle/>
+          <a:p>
+            <a:pPr indent="0" marL="0">
+              <a:lnSpc>
+                <a:spcPts val="2000"/>
+              </a:lnSpc>
+              <a:buNone/>
+            </a:pPr>
+            <a:r>
+              <a:rPr lang="en-US" sz="1400" dirty="0">
+                <a:solidFill>
+                  <a:srgbClr val="9BAAC0"/>
+                </a:solidFill>
+                <a:latin typeface="Arial" pitchFamily="34" charset="0"/>
+                <a:ea typeface="Arial" pitchFamily="34" charset="-122"/>
+                <a:cs typeface="Arial" pitchFamily="34" charset="-120"/>
+              </a:rPr>
+              <a:t>Entra no grupo do WhatsApp — é lá que eu mando o repositório, a base de dados e respondo dúvida.</a:t>
+            </a:r>
+            <a:endParaRPr lang="en-US" sz="1400" dirty="0"/>
+          </a:p>
+        </p:txBody>
+      </p:sp>
+      <p:sp>
+        <p:nvSpPr>
+          <p:cNvPr id="7" name="Text 5"/>
+          <p:cNvSpPr/>
+          <p:nvPr/>
+        </p:nvSpPr>
+        <p:spPr>
+          <a:xfrm>
+            <a:off x="411480" y="4681728"/>
+            <a:ext cx="2743200" cy="228600"/>
+          </a:xfrm>
+          <a:prstGeom prst="rect">
+            <a:avLst/>
+          </a:prstGeom>
+          <a:noFill/>
+          <a:ln/>
+        </p:spPr>
+        <p:txBody>
+          <a:bodyPr wrap="square" lIns="0" tIns="0" rIns="0" bIns="0" rtlCol="0" anchor="ctr"/>
+          <a:lstStyle/>
+          <a:p>
+            <a:pPr indent="0" marL="0">
+              <a:buNone/>
+            </a:pPr>
+            <a:r>
+              <a:rPr lang="en-US" sz="800" b="1" spc="200" kern="0" dirty="0">
+                <a:solidFill>
+                  <a:srgbClr val="566A85"/>
+                </a:solidFill>
+                <a:latin typeface="Arial" pitchFamily="34" charset="0"/>
+                <a:ea typeface="Arial" pitchFamily="34" charset="-122"/>
+                <a:cs typeface="Arial" pitchFamily="34" charset="-120"/>
+              </a:rPr>
+              <a:t>JORNADA DE DADOS</a:t>
+            </a:r>
+            <a:endParaRPr lang="en-US" sz="800" dirty="0"/>
+          </a:p>
+        </p:txBody>
+      </p:sp>
+    </p:spTree>
+  </p:cSld>
+  <p:clrMapOvr>
+    <a:masterClrMapping/>
+  </p:clrMapOvr>
+</p:sld>
+</file>
+
+<file path=ppt/slides/slide53.xml><?xml version="1.0" encoding="utf-8"?>
 <p:sld xmlns:a="http://schemas.openxmlformats.org/drawingml/2006/main" xmlns:p="http://schemas.openxmlformats.org/presentationml/2006/main" xmlns:r="http://schemas.openxmlformats.org/officeDocument/2006/relationships">
   <p:cSld>
     <p:spTree>
@@ -35496,7 +37472,7 @@
                 <a:ea typeface="Arial" pitchFamily="34" charset="-122"/>
                 <a:cs typeface="Arial" pitchFamily="34" charset="-120"/>
               </a:rPr>
-              <a:t>O NÚMERO QUE A GENTE PROCURAVA</a:t>
+              <a:t>PASSO A PASSO · NA INTERFACE</a:t>
             </a:r>
             <a:endParaRPr lang="en-US" sz="1100" dirty="0"/>
           </a:p>
@@ -35530,6 +37506,503 @@
               <a:buNone/>
             </a:pPr>
             <a:r>
+              <a:rPr lang="en-US" sz="3100" b="1" dirty="0">
+                <a:solidFill>
+                  <a:srgbClr val="FFFFFF"/>
+                </a:solidFill>
+                <a:latin typeface="Arial" pitchFamily="34" charset="0"/>
+                <a:ea typeface="Arial" pitchFamily="34" charset="-122"/>
+                <a:cs typeface="Arial" pitchFamily="34" charset="-120"/>
+              </a:rPr>
+              <a:t>Criar o catálogo</a:t>
+            </a:r>
+            <a:endParaRPr lang="en-US" sz="3100" dirty="0"/>
+          </a:p>
+        </p:txBody>
+      </p:sp>
+      <p:sp>
+        <p:nvSpPr>
+          <p:cNvPr id="4" name="Shape 2"/>
+          <p:cNvSpPr/>
+          <p:nvPr/>
+        </p:nvSpPr>
+        <p:spPr>
+          <a:xfrm>
+            <a:off x="457200" y="2157984"/>
+            <a:ext cx="91440" cy="91440"/>
+          </a:xfrm>
+          <a:prstGeom prst="ellipse">
+            <a:avLst/>
+          </a:prstGeom>
+          <a:solidFill>
+            <a:srgbClr val="3B9DF5"/>
+          </a:solidFill>
+          <a:ln w="12700">
+            <a:solidFill>
+              <a:srgbClr val="333333"/>
+            </a:solidFill>
+            <a:prstDash val="solid"/>
+          </a:ln>
+        </p:spPr>
+      </p:sp>
+      <p:sp>
+        <p:nvSpPr>
+          <p:cNvPr id="5" name="Text 3"/>
+          <p:cNvSpPr/>
+          <p:nvPr/>
+        </p:nvSpPr>
+        <p:spPr>
+          <a:xfrm>
+            <a:off x="713232" y="2057400"/>
+            <a:ext cx="7955280" cy="347472"/>
+          </a:xfrm>
+          <a:prstGeom prst="rect">
+            <a:avLst/>
+          </a:prstGeom>
+          <a:noFill/>
+          <a:ln/>
+        </p:spPr>
+        <p:txBody>
+          <a:bodyPr wrap="square" lIns="0" tIns="0" rIns="0" bIns="0" rtlCol="0" anchor="ctr"/>
+          <a:lstStyle/>
+          <a:p>
+            <a:pPr indent="0" marL="0">
+              <a:buNone/>
+            </a:pPr>
+            <a:r>
+              <a:rPr lang="en-US" sz="1500" dirty="0">
+                <a:solidFill>
+                  <a:srgbClr val="D9CFD1"/>
+                </a:solidFill>
+                <a:latin typeface="Arial" pitchFamily="34" charset="0"/>
+                <a:ea typeface="Arial" pitchFamily="34" charset="-122"/>
+                <a:cs typeface="Arial" pitchFamily="34" charset="-120"/>
+              </a:rPr>
+              <a:t>No menu lateral: Catalog → botão Create catalog, no canto superior</a:t>
+            </a:r>
+            <a:endParaRPr lang="en-US" sz="1500" dirty="0"/>
+          </a:p>
+        </p:txBody>
+      </p:sp>
+      <p:sp>
+        <p:nvSpPr>
+          <p:cNvPr id="6" name="Shape 4"/>
+          <p:cNvSpPr/>
+          <p:nvPr/>
+        </p:nvSpPr>
+        <p:spPr>
+          <a:xfrm>
+            <a:off x="457200" y="2578608"/>
+            <a:ext cx="91440" cy="91440"/>
+          </a:xfrm>
+          <a:prstGeom prst="ellipse">
+            <a:avLst/>
+          </a:prstGeom>
+          <a:solidFill>
+            <a:srgbClr val="3B9DF5"/>
+          </a:solidFill>
+          <a:ln w="12700">
+            <a:solidFill>
+              <a:srgbClr val="333333"/>
+            </a:solidFill>
+            <a:prstDash val="solid"/>
+          </a:ln>
+        </p:spPr>
+      </p:sp>
+      <p:sp>
+        <p:nvSpPr>
+          <p:cNvPr id="7" name="Text 5"/>
+          <p:cNvSpPr/>
+          <p:nvPr/>
+        </p:nvSpPr>
+        <p:spPr>
+          <a:xfrm>
+            <a:off x="713232" y="2478024"/>
+            <a:ext cx="7955280" cy="347472"/>
+          </a:xfrm>
+          <a:prstGeom prst="rect">
+            <a:avLst/>
+          </a:prstGeom>
+          <a:noFill/>
+          <a:ln/>
+        </p:spPr>
+        <p:txBody>
+          <a:bodyPr wrap="square" lIns="0" tIns="0" rIns="0" bIns="0" rtlCol="0" anchor="ctr"/>
+          <a:lstStyle/>
+          <a:p>
+            <a:pPr indent="0" marL="0">
+              <a:buNone/>
+            </a:pPr>
+            <a:r>
+              <a:rPr lang="en-US" sz="1500" dirty="0">
+                <a:solidFill>
+                  <a:srgbClr val="D9CFD1"/>
+                </a:solidFill>
+                <a:latin typeface="Arial" pitchFamily="34" charset="0"/>
+                <a:ea typeface="Arial" pitchFamily="34" charset="-122"/>
+                <a:cs typeface="Arial" pitchFamily="34" charset="-120"/>
+              </a:rPr>
+              <a:t>Catalog name: rota_perfume — minúsculo, sem espaço e sem acento</a:t>
+            </a:r>
+            <a:endParaRPr lang="en-US" sz="1500" dirty="0"/>
+          </a:p>
+        </p:txBody>
+      </p:sp>
+      <p:sp>
+        <p:nvSpPr>
+          <p:cNvPr id="8" name="Shape 6"/>
+          <p:cNvSpPr/>
+          <p:nvPr/>
+        </p:nvSpPr>
+        <p:spPr>
+          <a:xfrm>
+            <a:off x="457200" y="2999232"/>
+            <a:ext cx="91440" cy="91440"/>
+          </a:xfrm>
+          <a:prstGeom prst="ellipse">
+            <a:avLst/>
+          </a:prstGeom>
+          <a:solidFill>
+            <a:srgbClr val="3B9DF5"/>
+          </a:solidFill>
+          <a:ln w="12700">
+            <a:solidFill>
+              <a:srgbClr val="333333"/>
+            </a:solidFill>
+            <a:prstDash val="solid"/>
+          </a:ln>
+        </p:spPr>
+      </p:sp>
+      <p:sp>
+        <p:nvSpPr>
+          <p:cNvPr id="9" name="Text 7"/>
+          <p:cNvSpPr/>
+          <p:nvPr/>
+        </p:nvSpPr>
+        <p:spPr>
+          <a:xfrm>
+            <a:off x="713232" y="2898648"/>
+            <a:ext cx="7955280" cy="347472"/>
+          </a:xfrm>
+          <a:prstGeom prst="rect">
+            <a:avLst/>
+          </a:prstGeom>
+          <a:noFill/>
+          <a:ln/>
+        </p:spPr>
+        <p:txBody>
+          <a:bodyPr wrap="square" lIns="0" tIns="0" rIns="0" bIns="0" rtlCol="0" anchor="ctr"/>
+          <a:lstStyle/>
+          <a:p>
+            <a:pPr indent="0" marL="0">
+              <a:buNone/>
+            </a:pPr>
+            <a:r>
+              <a:rPr lang="en-US" sz="1500" dirty="0">
+                <a:solidFill>
+                  <a:srgbClr val="D9CFD1"/>
+                </a:solidFill>
+                <a:latin typeface="Arial" pitchFamily="34" charset="0"/>
+                <a:ea typeface="Arial" pitchFamily="34" charset="-122"/>
+                <a:cs typeface="Arial" pitchFamily="34" charset="-120"/>
+              </a:rPr>
+              <a:t>Type: Standard. É o managed — o Databricks decide onde guardar o arquivo</a:t>
+            </a:r>
+            <a:endParaRPr lang="en-US" sz="1500" dirty="0"/>
+          </a:p>
+        </p:txBody>
+      </p:sp>
+      <p:sp>
+        <p:nvSpPr>
+          <p:cNvPr id="10" name="Shape 8"/>
+          <p:cNvSpPr/>
+          <p:nvPr/>
+        </p:nvSpPr>
+        <p:spPr>
+          <a:xfrm>
+            <a:off x="457200" y="3419856"/>
+            <a:ext cx="91440" cy="91440"/>
+          </a:xfrm>
+          <a:prstGeom prst="ellipse">
+            <a:avLst/>
+          </a:prstGeom>
+          <a:solidFill>
+            <a:srgbClr val="3B9DF5"/>
+          </a:solidFill>
+          <a:ln w="12700">
+            <a:solidFill>
+              <a:srgbClr val="333333"/>
+            </a:solidFill>
+            <a:prstDash val="solid"/>
+          </a:ln>
+        </p:spPr>
+      </p:sp>
+      <p:sp>
+        <p:nvSpPr>
+          <p:cNvPr id="11" name="Text 9"/>
+          <p:cNvSpPr/>
+          <p:nvPr/>
+        </p:nvSpPr>
+        <p:spPr>
+          <a:xfrm>
+            <a:off x="713232" y="3319272"/>
+            <a:ext cx="7955280" cy="347472"/>
+          </a:xfrm>
+          <a:prstGeom prst="rect">
+            <a:avLst/>
+          </a:prstGeom>
+          <a:noFill/>
+          <a:ln/>
+        </p:spPr>
+        <p:txBody>
+          <a:bodyPr wrap="square" lIns="0" tIns="0" rIns="0" bIns="0" rtlCol="0" anchor="ctr"/>
+          <a:lstStyle/>
+          <a:p>
+            <a:pPr indent="0" marL="0">
+              <a:buNone/>
+            </a:pPr>
+            <a:r>
+              <a:rPr lang="en-US" sz="1500" dirty="0">
+                <a:solidFill>
+                  <a:srgbClr val="D9CFD1"/>
+                </a:solidFill>
+                <a:latin typeface="Arial" pitchFamily="34" charset="0"/>
+                <a:ea typeface="Arial" pitchFamily="34" charset="-122"/>
+                <a:cs typeface="Arial" pitchFamily="34" charset="-120"/>
+              </a:rPr>
+              <a:t>Create. O catálogo nasce vazio, com um schema default que não vamos usar</a:t>
+            </a:r>
+            <a:endParaRPr lang="en-US" sz="1500" dirty="0"/>
+          </a:p>
+        </p:txBody>
+      </p:sp>
+      <p:sp>
+        <p:nvSpPr>
+          <p:cNvPr id="12" name="Shape 10"/>
+          <p:cNvSpPr/>
+          <p:nvPr/>
+        </p:nvSpPr>
+        <p:spPr>
+          <a:xfrm>
+            <a:off x="457200" y="3840480"/>
+            <a:ext cx="91440" cy="91440"/>
+          </a:xfrm>
+          <a:prstGeom prst="ellipse">
+            <a:avLst/>
+          </a:prstGeom>
+          <a:solidFill>
+            <a:srgbClr val="3B9DF5"/>
+          </a:solidFill>
+          <a:ln w="12700">
+            <a:solidFill>
+              <a:srgbClr val="333333"/>
+            </a:solidFill>
+            <a:prstDash val="solid"/>
+          </a:ln>
+        </p:spPr>
+      </p:sp>
+      <p:sp>
+        <p:nvSpPr>
+          <p:cNvPr id="13" name="Text 11"/>
+          <p:cNvSpPr/>
+          <p:nvPr/>
+        </p:nvSpPr>
+        <p:spPr>
+          <a:xfrm>
+            <a:off x="713232" y="3739896"/>
+            <a:ext cx="7955280" cy="347472"/>
+          </a:xfrm>
+          <a:prstGeom prst="rect">
+            <a:avLst/>
+          </a:prstGeom>
+          <a:noFill/>
+          <a:ln/>
+        </p:spPr>
+        <p:txBody>
+          <a:bodyPr wrap="square" lIns="0" tIns="0" rIns="0" bIns="0" rtlCol="0" anchor="ctr"/>
+          <a:lstStyle/>
+          <a:p>
+            <a:pPr indent="0" marL="0">
+              <a:buNone/>
+            </a:pPr>
+            <a:r>
+              <a:rPr lang="en-US" sz="1500" dirty="0">
+                <a:solidFill>
+                  <a:srgbClr val="D9CFD1"/>
+                </a:solidFill>
+                <a:latin typeface="Arial" pitchFamily="34" charset="0"/>
+                <a:ea typeface="Arial" pitchFamily="34" charset="-122"/>
+                <a:cs typeface="Arial" pitchFamily="34" charset="-120"/>
+              </a:rPr>
+              <a:t>Na tela seguinte, Grant access: deixe em All workspaces por enquanto</a:t>
+            </a:r>
+            <a:endParaRPr lang="en-US" sz="1500" dirty="0"/>
+          </a:p>
+        </p:txBody>
+      </p:sp>
+      <p:sp>
+        <p:nvSpPr>
+          <p:cNvPr id="14" name="Text 12"/>
+          <p:cNvSpPr/>
+          <p:nvPr/>
+        </p:nvSpPr>
+        <p:spPr>
+          <a:xfrm>
+            <a:off x="411480" y="4297680"/>
+            <a:ext cx="8229600" cy="365760"/>
+          </a:xfrm>
+          <a:prstGeom prst="rect">
+            <a:avLst/>
+          </a:prstGeom>
+          <a:noFill/>
+          <a:ln/>
+        </p:spPr>
+        <p:txBody>
+          <a:bodyPr wrap="square" lIns="0" tIns="0" rIns="0" bIns="0" rtlCol="0" anchor="ctr"/>
+          <a:lstStyle/>
+          <a:p>
+            <a:pPr indent="0" marL="0">
+              <a:buNone/>
+            </a:pPr>
+            <a:r>
+              <a:rPr lang="en-US" sz="1300" dirty="0">
+                <a:solidFill>
+                  <a:srgbClr val="7CC8FF"/>
+                </a:solidFill>
+                <a:latin typeface="Arial" pitchFamily="34" charset="0"/>
+                <a:ea typeface="Arial" pitchFamily="34" charset="-122"/>
+                <a:cs typeface="Arial" pitchFamily="34" charset="-120"/>
+              </a:rPr>
+              <a:t>A tela avisa: 'A catalog is the first layer of Unity Catalog's three-level namespace'. É isso que o nome de três partes significa.</a:t>
+            </a:r>
+            <a:endParaRPr lang="en-US" sz="1300" dirty="0"/>
+          </a:p>
+        </p:txBody>
+      </p:sp>
+      <p:sp>
+        <p:nvSpPr>
+          <p:cNvPr id="15" name="Text 13"/>
+          <p:cNvSpPr/>
+          <p:nvPr/>
+        </p:nvSpPr>
+        <p:spPr>
+          <a:xfrm>
+            <a:off x="411480" y="4681728"/>
+            <a:ext cx="2743200" cy="228600"/>
+          </a:xfrm>
+          <a:prstGeom prst="rect">
+            <a:avLst/>
+          </a:prstGeom>
+          <a:noFill/>
+          <a:ln/>
+        </p:spPr>
+        <p:txBody>
+          <a:bodyPr wrap="square" lIns="0" tIns="0" rIns="0" bIns="0" rtlCol="0" anchor="ctr"/>
+          <a:lstStyle/>
+          <a:p>
+            <a:pPr indent="0" marL="0">
+              <a:buNone/>
+            </a:pPr>
+            <a:r>
+              <a:rPr lang="en-US" sz="800" b="1" spc="200" kern="0" dirty="0">
+                <a:solidFill>
+                  <a:srgbClr val="566A85"/>
+                </a:solidFill>
+                <a:latin typeface="Arial" pitchFamily="34" charset="0"/>
+                <a:ea typeface="Arial" pitchFamily="34" charset="-122"/>
+                <a:cs typeface="Arial" pitchFamily="34" charset="-120"/>
+              </a:rPr>
+              <a:t>JORNADA DE DADOS</a:t>
+            </a:r>
+            <a:endParaRPr lang="en-US" sz="800" dirty="0"/>
+          </a:p>
+        </p:txBody>
+      </p:sp>
+    </p:spTree>
+  </p:cSld>
+  <p:clrMapOvr>
+    <a:masterClrMapping/>
+  </p:clrMapOvr>
+</p:sld>
+</file>
+
+<file path=ppt/slides/slide54.xml><?xml version="1.0" encoding="utf-8"?>
+<p:sld xmlns:a="http://schemas.openxmlformats.org/drawingml/2006/main" xmlns:p="http://schemas.openxmlformats.org/presentationml/2006/main" xmlns:r="http://schemas.openxmlformats.org/officeDocument/2006/relationships">
+  <p:cSld>
+    <p:spTree>
+      <p:nvGrpSpPr>
+        <p:cNvPr id="1" name=""/>
+        <p:cNvGrpSpPr/>
+        <p:nvPr/>
+      </p:nvGrpSpPr>
+      <p:grpSpPr/>
+      <p:sp>
+        <p:nvSpPr>
+          <p:cNvPr id="2" name="Text 0"/>
+          <p:cNvSpPr/>
+          <p:nvPr/>
+        </p:nvSpPr>
+        <p:spPr>
+          <a:xfrm>
+            <a:off x="411480" y="411480"/>
+            <a:ext cx="7315200" cy="256032"/>
+          </a:xfrm>
+          <a:prstGeom prst="rect">
+            <a:avLst/>
+          </a:prstGeom>
+          <a:noFill/>
+          <a:ln/>
+        </p:spPr>
+        <p:txBody>
+          <a:bodyPr wrap="square" lIns="0" tIns="0" rIns="0" bIns="0" rtlCol="0" anchor="ctr"/>
+          <a:lstStyle/>
+          <a:p>
+            <a:pPr indent="0" marL="0">
+              <a:buNone/>
+            </a:pPr>
+            <a:r>
+              <a:rPr lang="en-US" sz="1100" b="1" spc="160" kern="0" dirty="0">
+                <a:solidFill>
+                  <a:srgbClr val="3B9DF5"/>
+                </a:solidFill>
+                <a:latin typeface="Arial" pitchFamily="34" charset="0"/>
+                <a:ea typeface="Arial" pitchFamily="34" charset="-122"/>
+                <a:cs typeface="Arial" pitchFamily="34" charset="-120"/>
+              </a:rPr>
+              <a:t>O NOME DE TRÊS PARTES</a:t>
+            </a:r>
+            <a:endParaRPr lang="en-US" sz="1100" dirty="0"/>
+          </a:p>
+        </p:txBody>
+      </p:sp>
+      <p:sp>
+        <p:nvSpPr>
+          <p:cNvPr id="3" name="Text 1"/>
+          <p:cNvSpPr/>
+          <p:nvPr/>
+        </p:nvSpPr>
+        <p:spPr>
+          <a:xfrm>
+            <a:off x="411480" y="822960"/>
+            <a:ext cx="8321040" cy="1005840"/>
+          </a:xfrm>
+          <a:prstGeom prst="rect">
+            <a:avLst/>
+          </a:prstGeom>
+          <a:noFill/>
+          <a:ln/>
+        </p:spPr>
+        <p:txBody>
+          <a:bodyPr wrap="square" lIns="0" tIns="0" rIns="0" bIns="0" rtlCol="0" anchor="ctr"/>
+          <a:lstStyle/>
+          <a:p>
+            <a:pPr indent="0" marL="0">
+              <a:lnSpc>
+                <a:spcPts val="4000"/>
+              </a:lnSpc>
+              <a:buNone/>
+            </a:pPr>
+            <a:r>
               <a:rPr lang="en-US" sz="3200" b="1" dirty="0">
                 <a:solidFill>
                   <a:srgbClr val="FFFFFF"/>
@@ -35538,7 +38011,7 @@
                 <a:ea typeface="Arial" pitchFamily="34" charset="-122"/>
                 <a:cs typeface="Arial" pitchFamily="34" charset="-120"/>
               </a:rPr>
-              <a:t>A resposta da noite</a:t>
+              <a:t>catálogo · schema · tabela</a:t>
             </a:r>
             <a:endParaRPr lang="en-US" sz="3200" dirty="0"/>
           </a:p>
@@ -35604,7 +38077,7 @@
                 <a:ea typeface="Arial" pitchFamily="34" charset="-122"/>
                 <a:cs typeface="Arial" pitchFamily="34" charset="-120"/>
               </a:rPr>
-              <a:t>R$</a:t>
+              <a:t>01</a:t>
             </a:r>
             <a:endParaRPr lang="en-US" sz="1100" dirty="0"/>
           </a:p>
@@ -35646,7 +38119,7 @@
                 <a:ea typeface="Arial" pitchFamily="34" charset="-122"/>
                 <a:cs typeface="Arial" pitchFamily="34" charset="-120"/>
               </a:rPr>
-              <a:t>102,3 milhões</a:t>
+              <a:t>rota_perfume</a:t>
             </a:r>
             <a:endParaRPr lang="en-US" sz="1450" dirty="0"/>
           </a:p>
@@ -35688,7 +38161,7 @@
                 <a:ea typeface="Arial" pitchFamily="34" charset="-122"/>
                 <a:cs typeface="Arial" pitchFamily="34" charset="-120"/>
               </a:rPr>
-              <a:t>Receita dos 24 meses, 27.772 pedidos faturados</a:t>
+              <a:t>O catálogo. Um por projeto — é a fronteira de governança</a:t>
             </a:r>
             <a:endParaRPr lang="en-US" sz="1050" dirty="0"/>
           </a:p>
@@ -35754,7 +38227,7 @@
                 <a:ea typeface="Arial" pitchFamily="34" charset="-122"/>
                 <a:cs typeface="Arial" pitchFamily="34" charset="-120"/>
               </a:rPr>
-              <a:t>R$</a:t>
+              <a:t>02</a:t>
             </a:r>
             <a:endParaRPr lang="en-US" sz="1100" dirty="0"/>
           </a:p>
@@ -35796,7 +38269,7 @@
                 <a:ea typeface="Arial" pitchFamily="34" charset="-122"/>
                 <a:cs typeface="Arial" pitchFamily="34" charset="-120"/>
               </a:rPr>
-              <a:t>3.683,70</a:t>
+              <a:t>bronze</a:t>
             </a:r>
             <a:endParaRPr lang="en-US" sz="1450" dirty="0"/>
           </a:p>
@@ -35838,7 +38311,7 @@
                 <a:ea typeface="Arial" pitchFamily="34" charset="-122"/>
                 <a:cs typeface="Arial" pitchFamily="34" charset="-120"/>
               </a:rPr>
-              <a:t>Ticket médio por pedido</a:t>
+              <a:t>O schema. Aqui o dado entra cru, do jeito que veio</a:t>
             </a:r>
             <a:endParaRPr lang="en-US" sz="1050" dirty="0"/>
           </a:p>
@@ -35904,7 +38377,7 @@
                 <a:ea typeface="Arial" pitchFamily="34" charset="-122"/>
                 <a:cs typeface="Arial" pitchFamily="34" charset="-120"/>
               </a:rPr>
-              <a:t>↑</a:t>
+              <a:t>03</a:t>
             </a:r>
             <a:endParaRPr lang="en-US" sz="1100" dirty="0"/>
           </a:p>
@@ -35946,7 +38419,7 @@
                 <a:ea typeface="Arial" pitchFamily="34" charset="-122"/>
                 <a:cs typeface="Arial" pitchFamily="34" charset="-120"/>
               </a:rPr>
-              <a:t>Outubro/2025</a:t>
+              <a:t>pedidos</a:t>
             </a:r>
             <a:endParaRPr lang="en-US" sz="1450" dirty="0"/>
           </a:p>
@@ -35988,7 +38461,7 @@
                 <a:ea typeface="Arial" pitchFamily="34" charset="-122"/>
                 <a:cs typeface="Arial" pitchFamily="34" charset="-120"/>
               </a:rPr>
-              <a:t>O pico: R$ 7,0 milhões em um mês</a:t>
+              <a:t>A tabela. 28.729 linhas, todas as colunas em texto</a:t>
             </a:r>
             <a:endParaRPr lang="en-US" sz="1050" dirty="0"/>
           </a:p>
@@ -36054,7 +38527,7 @@
                 <a:ea typeface="Arial" pitchFamily="34" charset="-122"/>
                 <a:cs typeface="Arial" pitchFamily="34" charset="-120"/>
               </a:rPr>
-              <a:t>↓</a:t>
+              <a:t>→</a:t>
             </a:r>
             <a:endParaRPr lang="en-US" sz="1100" dirty="0"/>
           </a:p>
@@ -36096,7 +38569,7 @@
                 <a:ea typeface="Arial" pitchFamily="34" charset="-122"/>
                 <a:cs typeface="Arial" pitchFamily="34" charset="-120"/>
               </a:rPr>
-              <a:t>Janeiro/2026</a:t>
+              <a:t>o caminho</a:t>
             </a:r>
             <a:endParaRPr lang="en-US" sz="1450" dirty="0"/>
           </a:p>
@@ -36138,7 +38611,7 @@
                 <a:ea typeface="Arial" pitchFamily="34" charset="-122"/>
                 <a:cs typeface="Arial" pitchFamily="34" charset="-120"/>
               </a:rPr>
-              <a:t>O vale: R$ 2,5 milhões — o varejo já abasteceu</a:t>
+              <a:t>rota_perfume.bronze.pedidos — sempre os três níveis</a:t>
             </a:r>
             <a:endParaRPr lang="en-US" sz="1050" dirty="0"/>
           </a:p>
@@ -36191,7 +38664,7 @@
 </p:sld>
 </file>
 
-<file path=ppt/slides/slide51.xml><?xml version="1.0" encoding="utf-8"?>
+<file path=ppt/slides/slide55.xml><?xml version="1.0" encoding="utf-8"?>
 <p:sld xmlns:a="http://schemas.openxmlformats.org/drawingml/2006/main" xmlns:p="http://schemas.openxmlformats.org/presentationml/2006/main" xmlns:r="http://schemas.openxmlformats.org/officeDocument/2006/relationships">
   <p:cSld>
     <p:spTree>
@@ -36234,7 +38707,7 @@
                 <a:ea typeface="Arial" pitchFamily="34" charset="-122"/>
                 <a:cs typeface="Arial" pitchFamily="34" charset="-120"/>
               </a:rPr>
-              <a:t>O MOMENTO DA VERDADE</a:t>
+              <a:t>O MESMO RESULTADO, SEM CLICAR</a:t>
             </a:r>
             <a:endParaRPr lang="en-US" sz="1100" dirty="0"/>
           </a:p>
@@ -36276,7 +38749,7 @@
                 <a:ea typeface="Arial" pitchFamily="34" charset="-122"/>
                 <a:cs typeface="Arial" pitchFamily="34" charset="-120"/>
               </a:rPr>
-              <a:t>A query que não roda</a:t>
+              <a:t>Ou em cinco linhas de SQL</a:t>
             </a:r>
             <a:endParaRPr lang="en-US" sz="3100" dirty="0"/>
           </a:p>
@@ -36340,7 +38813,7 @@
                 <a:ea typeface="Arial" pitchFamily="34" charset="-122"/>
                 <a:cs typeface="Arial" pitchFamily="34" charset="-120"/>
               </a:rPr>
-              <a:t>3.443 pedidos (12%) têm a data escrita como 15/10/2025 em vez de 2025-10-15</a:t>
+              <a:t>CREATE CATALOG IF NOT EXISTS rota_perfume;</a:t>
             </a:r>
             <a:endParaRPr lang="en-US" sz="1500" dirty="0"/>
           </a:p>
@@ -36404,7 +38877,7 @@
                 <a:ea typeface="Arial" pitchFamily="34" charset="-122"/>
                 <a:cs typeface="Arial" pitchFamily="34" charset="-120"/>
               </a:rPr>
-              <a:t>date_trunc('month', data_pedido) tenta converter, não consegue e derruba a query</a:t>
+              <a:t>CREATE SCHEMA IF NOT EXISTS rota_perfume.bronze;   -- dado cru</a:t>
             </a:r>
             <a:endParaRPr lang="en-US" sz="1500" dirty="0"/>
           </a:p>
@@ -36468,7 +38941,7 @@
                 <a:ea typeface="Arial" pitchFamily="34" charset="-122"/>
                 <a:cs typeface="Arial" pitchFamily="34" charset="-120"/>
               </a:rPr>
-              <a:t>Não é resposta errada em silêncio: é erro na cara, e isso é melhor</a:t>
+              <a:t>CREATE SCHEMA IF NOT EXISTS rota_perfume.silver;   -- limpo</a:t>
             </a:r>
             <a:endParaRPr lang="en-US" sz="1500" dirty="0"/>
           </a:p>
@@ -36532,7 +39005,7 @@
                 <a:ea typeface="Arial" pitchFamily="34" charset="-122"/>
                 <a:cs typeface="Arial" pitchFamily="34" charset="-120"/>
               </a:rPr>
-              <a:t>try_to_date devolve NULL em vez de quebrar — aí o coalesce tenta os dois formatos</a:t>
+              <a:t>CREATE SCHEMA IF NOT EXISTS rota_perfume.gold;     -- pronto para consumo</a:t>
             </a:r>
             <a:endParaRPr lang="en-US" sz="1500" dirty="0"/>
           </a:p>
@@ -36596,7 +39069,7 @@
                 <a:ea typeface="Arial" pitchFamily="34" charset="-122"/>
                 <a:cs typeface="Arial" pitchFamily="34" charset="-120"/>
               </a:rPr>
-              <a:t>Esse coalesce é um rascunho da camada silver. Amanhã ele vira pipeline</a:t>
+              <a:t>CREATE VOLUME IF NOT EXISTS rota_perfume.bronze.raw;  -- onde o CSV chega</a:t>
             </a:r>
             <a:endParaRPr lang="en-US" sz="1500" dirty="0"/>
           </a:p>
@@ -36635,7 +39108,7 @@
                 <a:ea typeface="Arial" pitchFamily="34" charset="-122"/>
                 <a:cs typeface="Arial" pitchFamily="34" charset="-120"/>
               </a:rPr>
-              <a:t>Repara na ordem: eu rodo a query errada primeiro, de propósito. O erro é que explica por que a noite 2 existe.</a:t>
+              <a:t>A UI é boa para entender. O SQL é o que você versiona no Git e consegue repetir amanhã sem lembrar de onde clicou.</a:t>
             </a:r>
             <a:endParaRPr lang="en-US" sz="1300" dirty="0"/>
           </a:p>
@@ -36644,744 +39117,6 @@
       <p:sp>
         <p:nvSpPr>
           <p:cNvPr id="15" name="Text 13"/>
-          <p:cNvSpPr/>
-          <p:nvPr/>
-        </p:nvSpPr>
-        <p:spPr>
-          <a:xfrm>
-            <a:off x="411480" y="4681728"/>
-            <a:ext cx="2743200" cy="228600"/>
-          </a:xfrm>
-          <a:prstGeom prst="rect">
-            <a:avLst/>
-          </a:prstGeom>
-          <a:noFill/>
-          <a:ln/>
-        </p:spPr>
-        <p:txBody>
-          <a:bodyPr wrap="square" lIns="0" tIns="0" rIns="0" bIns="0" rtlCol="0" anchor="ctr"/>
-          <a:lstStyle/>
-          <a:p>
-            <a:pPr indent="0" marL="0">
-              <a:buNone/>
-            </a:pPr>
-            <a:r>
-              <a:rPr lang="en-US" sz="800" b="1" spc="200" kern="0" dirty="0">
-                <a:solidFill>
-                  <a:srgbClr val="566A85"/>
-                </a:solidFill>
-                <a:latin typeface="Arial" pitchFamily="34" charset="0"/>
-                <a:ea typeface="Arial" pitchFamily="34" charset="-122"/>
-                <a:cs typeface="Arial" pitchFamily="34" charset="-120"/>
-              </a:rPr>
-              <a:t>JORNADA DE DADOS</a:t>
-            </a:r>
-            <a:endParaRPr lang="en-US" sz="800" dirty="0"/>
-          </a:p>
-        </p:txBody>
-      </p:sp>
-    </p:spTree>
-  </p:cSld>
-  <p:clrMapOvr>
-    <a:masterClrMapping/>
-  </p:clrMapOvr>
-</p:sld>
-</file>
-
-<file path=ppt/slides/slide52.xml><?xml version="1.0" encoding="utf-8"?>
-<p:sld xmlns:a="http://schemas.openxmlformats.org/drawingml/2006/main" xmlns:p="http://schemas.openxmlformats.org/presentationml/2006/main" xmlns:r="http://schemas.openxmlformats.org/officeDocument/2006/relationships">
-  <p:cSld>
-    <p:spTree>
-      <p:nvGrpSpPr>
-        <p:cNvPr id="1" name=""/>
-        <p:cNvGrpSpPr/>
-        <p:nvPr/>
-      </p:nvGrpSpPr>
-      <p:grpSpPr/>
-      <p:sp>
-        <p:nvSpPr>
-          <p:cNvPr id="2" name="Text 0"/>
-          <p:cNvSpPr/>
-          <p:nvPr/>
-        </p:nvSpPr>
-        <p:spPr>
-          <a:xfrm>
-            <a:off x="411480" y="411480"/>
-            <a:ext cx="7315200" cy="256032"/>
-          </a:xfrm>
-          <a:prstGeom prst="rect">
-            <a:avLst/>
-          </a:prstGeom>
-          <a:noFill/>
-          <a:ln/>
-        </p:spPr>
-        <p:txBody>
-          <a:bodyPr wrap="square" lIns="0" tIns="0" rIns="0" bIns="0" rtlCol="0" anchor="ctr"/>
-          <a:lstStyle/>
-          <a:p>
-            <a:pPr indent="0" marL="0">
-              <a:buNone/>
-            </a:pPr>
-            <a:r>
-              <a:rPr lang="en-US" sz="1100" b="1" spc="160" kern="0" dirty="0">
-                <a:solidFill>
-                  <a:srgbClr val="3B9DF5"/>
-                </a:solidFill>
-                <a:latin typeface="Arial" pitchFamily="34" charset="0"/>
-                <a:ea typeface="Arial" pitchFamily="34" charset="-122"/>
-                <a:cs typeface="Arial" pitchFamily="34" charset="-120"/>
-              </a:rPr>
-              <a:t>ARQUITETURA MEDALLION</a:t>
-            </a:r>
-            <a:endParaRPr lang="en-US" sz="1100" dirty="0"/>
-          </a:p>
-        </p:txBody>
-      </p:sp>
-      <p:sp>
-        <p:nvSpPr>
-          <p:cNvPr id="3" name="Text 1"/>
-          <p:cNvSpPr/>
-          <p:nvPr/>
-        </p:nvSpPr>
-        <p:spPr>
-          <a:xfrm>
-            <a:off x="411480" y="822960"/>
-            <a:ext cx="8321040" cy="1005840"/>
-          </a:xfrm>
-          <a:prstGeom prst="rect">
-            <a:avLst/>
-          </a:prstGeom>
-          <a:noFill/>
-          <a:ln/>
-        </p:spPr>
-        <p:txBody>
-          <a:bodyPr wrap="square" lIns="0" tIns="0" rIns="0" bIns="0" rtlCol="0" anchor="ctr"/>
-          <a:lstStyle/>
-          <a:p>
-            <a:pPr indent="0" marL="0">
-              <a:lnSpc>
-                <a:spcPts val="4000"/>
-              </a:lnSpc>
-              <a:buNone/>
-            </a:pPr>
-            <a:r>
-              <a:rPr lang="en-US" sz="3200" b="1" dirty="0">
-                <a:solidFill>
-                  <a:srgbClr val="FFFFFF"/>
-                </a:solidFill>
-                <a:latin typeface="Arial" pitchFamily="34" charset="0"/>
-                <a:ea typeface="Arial" pitchFamily="34" charset="-122"/>
-                <a:cs typeface="Arial" pitchFamily="34" charset="-120"/>
-              </a:rPr>
-              <a:t>O que ficou de pé no catálogo</a:t>
-            </a:r>
-            <a:endParaRPr lang="en-US" sz="3200" dirty="0"/>
-          </a:p>
-        </p:txBody>
-      </p:sp>
-      <p:sp>
-        <p:nvSpPr>
-          <p:cNvPr id="4" name="Shape 2"/>
-          <p:cNvSpPr/>
-          <p:nvPr/>
-        </p:nvSpPr>
-        <p:spPr>
-          <a:xfrm>
-            <a:off x="411480" y="2194560"/>
-            <a:ext cx="1956816" cy="1737360"/>
-          </a:xfrm>
-          <a:prstGeom prst="roundRect">
-            <a:avLst>
-              <a:gd name="adj" fmla="val 2632"/>
-            </a:avLst>
-          </a:prstGeom>
-          <a:solidFill>
-            <a:srgbClr val="0D1522"/>
-          </a:solidFill>
-          <a:ln w="12700">
-            <a:solidFill>
-              <a:srgbClr val="1F3A5A"/>
-            </a:solidFill>
-            <a:prstDash val="solid"/>
-          </a:ln>
-        </p:spPr>
-      </p:sp>
-      <p:sp>
-        <p:nvSpPr>
-          <p:cNvPr id="5" name="Text 3"/>
-          <p:cNvSpPr/>
-          <p:nvPr/>
-        </p:nvSpPr>
-        <p:spPr>
-          <a:xfrm>
-            <a:off x="612648" y="2359152"/>
-            <a:ext cx="1554480" cy="274320"/>
-          </a:xfrm>
-          <a:prstGeom prst="rect">
-            <a:avLst/>
-          </a:prstGeom>
-          <a:noFill/>
-          <a:ln/>
-        </p:spPr>
-        <p:txBody>
-          <a:bodyPr wrap="square" lIns="0" tIns="0" rIns="0" bIns="0" rtlCol="0" anchor="ctr"/>
-          <a:lstStyle/>
-          <a:p>
-            <a:pPr indent="0" marL="0">
-              <a:buNone/>
-            </a:pPr>
-            <a:r>
-              <a:rPr lang="en-US" sz="1100" b="1" dirty="0">
-                <a:solidFill>
-                  <a:srgbClr val="3B9DF5"/>
-                </a:solidFill>
-                <a:latin typeface="Arial" pitchFamily="34" charset="0"/>
-                <a:ea typeface="Arial" pitchFamily="34" charset="-122"/>
-                <a:cs typeface="Arial" pitchFamily="34" charset="-120"/>
-              </a:rPr>
-              <a:t>01</a:t>
-            </a:r>
-            <a:endParaRPr lang="en-US" sz="1100" dirty="0"/>
-          </a:p>
-        </p:txBody>
-      </p:sp>
-      <p:sp>
-        <p:nvSpPr>
-          <p:cNvPr id="6" name="Text 4"/>
-          <p:cNvSpPr/>
-          <p:nvPr/>
-        </p:nvSpPr>
-        <p:spPr>
-          <a:xfrm>
-            <a:off x="612648" y="2633472"/>
-            <a:ext cx="1554480" cy="512064"/>
-          </a:xfrm>
-          <a:prstGeom prst="rect">
-            <a:avLst/>
-          </a:prstGeom>
-          <a:noFill/>
-          <a:ln/>
-        </p:spPr>
-        <p:txBody>
-          <a:bodyPr wrap="square" lIns="0" tIns="0" rIns="0" bIns="0" rtlCol="0" anchor="t"/>
-          <a:lstStyle/>
-          <a:p>
-            <a:pPr indent="0" marL="0">
-              <a:lnSpc>
-                <a:spcPts val="1800"/>
-              </a:lnSpc>
-              <a:buNone/>
-            </a:pPr>
-            <a:r>
-              <a:rPr lang="en-US" sz="1450" b="1" dirty="0">
-                <a:solidFill>
-                  <a:srgbClr val="FFFFFF"/>
-                </a:solidFill>
-                <a:latin typeface="Arial" pitchFamily="34" charset="0"/>
-                <a:ea typeface="Arial" pitchFamily="34" charset="-122"/>
-                <a:cs typeface="Arial" pitchFamily="34" charset="-120"/>
-              </a:rPr>
-              <a:t>bronze</a:t>
-            </a:r>
-            <a:endParaRPr lang="en-US" sz="1450" dirty="0"/>
-          </a:p>
-        </p:txBody>
-      </p:sp>
-      <p:sp>
-        <p:nvSpPr>
-          <p:cNvPr id="7" name="Text 5"/>
-          <p:cNvSpPr/>
-          <p:nvPr/>
-        </p:nvSpPr>
-        <p:spPr>
-          <a:xfrm>
-            <a:off x="612648" y="3163824"/>
-            <a:ext cx="1554480" cy="621792"/>
-          </a:xfrm>
-          <a:prstGeom prst="rect">
-            <a:avLst/>
-          </a:prstGeom>
-          <a:noFill/>
-          <a:ln/>
-        </p:spPr>
-        <p:txBody>
-          <a:bodyPr wrap="square" lIns="0" tIns="0" rIns="0" bIns="0" rtlCol="0" anchor="ctr"/>
-          <a:lstStyle/>
-          <a:p>
-            <a:pPr indent="0" marL="0">
-              <a:lnSpc>
-                <a:spcPts val="1400"/>
-              </a:lnSpc>
-              <a:buNone/>
-            </a:pPr>
-            <a:r>
-              <a:rPr lang="en-US" sz="1050" dirty="0">
-                <a:solidFill>
-                  <a:srgbClr val="9BAAC0"/>
-                </a:solidFill>
-                <a:latin typeface="Arial" pitchFamily="34" charset="0"/>
-                <a:ea typeface="Arial" pitchFamily="34" charset="-122"/>
-                <a:cs typeface="Arial" pitchFamily="34" charset="-120"/>
-              </a:rPr>
-              <a:t>10 tabelas, 313.551 linhas. Tudo texto, sujeira preservada</a:t>
-            </a:r>
-            <a:endParaRPr lang="en-US" sz="1050" dirty="0"/>
-          </a:p>
-        </p:txBody>
-      </p:sp>
-      <p:sp>
-        <p:nvSpPr>
-          <p:cNvPr id="8" name="Shape 6"/>
-          <p:cNvSpPr/>
-          <p:nvPr/>
-        </p:nvSpPr>
-        <p:spPr>
-          <a:xfrm>
-            <a:off x="2532888" y="2194560"/>
-            <a:ext cx="1956816" cy="1737360"/>
-          </a:xfrm>
-          <a:prstGeom prst="roundRect">
-            <a:avLst>
-              <a:gd name="adj" fmla="val 2632"/>
-            </a:avLst>
-          </a:prstGeom>
-          <a:solidFill>
-            <a:srgbClr val="0D1522"/>
-          </a:solidFill>
-          <a:ln w="12700">
-            <a:solidFill>
-              <a:srgbClr val="1F3A5A"/>
-            </a:solidFill>
-            <a:prstDash val="solid"/>
-          </a:ln>
-        </p:spPr>
-      </p:sp>
-      <p:sp>
-        <p:nvSpPr>
-          <p:cNvPr id="9" name="Text 7"/>
-          <p:cNvSpPr/>
-          <p:nvPr/>
-        </p:nvSpPr>
-        <p:spPr>
-          <a:xfrm>
-            <a:off x="2734056" y="2359152"/>
-            <a:ext cx="1554480" cy="274320"/>
-          </a:xfrm>
-          <a:prstGeom prst="rect">
-            <a:avLst/>
-          </a:prstGeom>
-          <a:noFill/>
-          <a:ln/>
-        </p:spPr>
-        <p:txBody>
-          <a:bodyPr wrap="square" lIns="0" tIns="0" rIns="0" bIns="0" rtlCol="0" anchor="ctr"/>
-          <a:lstStyle/>
-          <a:p>
-            <a:pPr indent="0" marL="0">
-              <a:buNone/>
-            </a:pPr>
-            <a:r>
-              <a:rPr lang="en-US" sz="1100" b="1" dirty="0">
-                <a:solidFill>
-                  <a:srgbClr val="3B9DF5"/>
-                </a:solidFill>
-                <a:latin typeface="Arial" pitchFamily="34" charset="0"/>
-                <a:ea typeface="Arial" pitchFamily="34" charset="-122"/>
-                <a:cs typeface="Arial" pitchFamily="34" charset="-120"/>
-              </a:rPr>
-              <a:t>02</a:t>
-            </a:r>
-            <a:endParaRPr lang="en-US" sz="1100" dirty="0"/>
-          </a:p>
-        </p:txBody>
-      </p:sp>
-      <p:sp>
-        <p:nvSpPr>
-          <p:cNvPr id="10" name="Text 8"/>
-          <p:cNvSpPr/>
-          <p:nvPr/>
-        </p:nvSpPr>
-        <p:spPr>
-          <a:xfrm>
-            <a:off x="2734056" y="2633472"/>
-            <a:ext cx="1554480" cy="512064"/>
-          </a:xfrm>
-          <a:prstGeom prst="rect">
-            <a:avLst/>
-          </a:prstGeom>
-          <a:noFill/>
-          <a:ln/>
-        </p:spPr>
-        <p:txBody>
-          <a:bodyPr wrap="square" lIns="0" tIns="0" rIns="0" bIns="0" rtlCol="0" anchor="t"/>
-          <a:lstStyle/>
-          <a:p>
-            <a:pPr indent="0" marL="0">
-              <a:lnSpc>
-                <a:spcPts val="1800"/>
-              </a:lnSpc>
-              <a:buNone/>
-            </a:pPr>
-            <a:r>
-              <a:rPr lang="en-US" sz="1450" b="1" dirty="0">
-                <a:solidFill>
-                  <a:srgbClr val="FFFFFF"/>
-                </a:solidFill>
-                <a:latin typeface="Arial" pitchFamily="34" charset="0"/>
-                <a:ea typeface="Arial" pitchFamily="34" charset="-122"/>
-                <a:cs typeface="Arial" pitchFamily="34" charset="-120"/>
-              </a:rPr>
-              <a:t>silver</a:t>
-            </a:r>
-            <a:endParaRPr lang="en-US" sz="1450" dirty="0"/>
-          </a:p>
-        </p:txBody>
-      </p:sp>
-      <p:sp>
-        <p:nvSpPr>
-          <p:cNvPr id="11" name="Text 9"/>
-          <p:cNvSpPr/>
-          <p:nvPr/>
-        </p:nvSpPr>
-        <p:spPr>
-          <a:xfrm>
-            <a:off x="2734056" y="3163824"/>
-            <a:ext cx="1554480" cy="621792"/>
-          </a:xfrm>
-          <a:prstGeom prst="rect">
-            <a:avLst/>
-          </a:prstGeom>
-          <a:noFill/>
-          <a:ln/>
-        </p:spPr>
-        <p:txBody>
-          <a:bodyPr wrap="square" lIns="0" tIns="0" rIns="0" bIns="0" rtlCol="0" anchor="ctr"/>
-          <a:lstStyle/>
-          <a:p>
-            <a:pPr indent="0" marL="0">
-              <a:lnSpc>
-                <a:spcPts val="1400"/>
-              </a:lnSpc>
-              <a:buNone/>
-            </a:pPr>
-            <a:r>
-              <a:rPr lang="en-US" sz="1050" dirty="0">
-                <a:solidFill>
-                  <a:srgbClr val="9BAAC0"/>
-                </a:solidFill>
-                <a:latin typeface="Arial" pitchFamily="34" charset="0"/>
-                <a:ea typeface="Arial" pitchFamily="34" charset="-122"/>
-                <a:cs typeface="Arial" pitchFamily="34" charset="-120"/>
-              </a:rPr>
-              <a:t>Criada e vazia. É o trabalho de amanhã</a:t>
-            </a:r>
-            <a:endParaRPr lang="en-US" sz="1050" dirty="0"/>
-          </a:p>
-        </p:txBody>
-      </p:sp>
-      <p:sp>
-        <p:nvSpPr>
-          <p:cNvPr id="12" name="Shape 10"/>
-          <p:cNvSpPr/>
-          <p:nvPr/>
-        </p:nvSpPr>
-        <p:spPr>
-          <a:xfrm>
-            <a:off x="4654296" y="2194560"/>
-            <a:ext cx="1956816" cy="1737360"/>
-          </a:xfrm>
-          <a:prstGeom prst="roundRect">
-            <a:avLst>
-              <a:gd name="adj" fmla="val 2632"/>
-            </a:avLst>
-          </a:prstGeom>
-          <a:solidFill>
-            <a:srgbClr val="0D1522"/>
-          </a:solidFill>
-          <a:ln w="12700">
-            <a:solidFill>
-              <a:srgbClr val="1F3A5A"/>
-            </a:solidFill>
-            <a:prstDash val="solid"/>
-          </a:ln>
-        </p:spPr>
-      </p:sp>
-      <p:sp>
-        <p:nvSpPr>
-          <p:cNvPr id="13" name="Text 11"/>
-          <p:cNvSpPr/>
-          <p:nvPr/>
-        </p:nvSpPr>
-        <p:spPr>
-          <a:xfrm>
-            <a:off x="4855464" y="2359152"/>
-            <a:ext cx="1554480" cy="274320"/>
-          </a:xfrm>
-          <a:prstGeom prst="rect">
-            <a:avLst/>
-          </a:prstGeom>
-          <a:noFill/>
-          <a:ln/>
-        </p:spPr>
-        <p:txBody>
-          <a:bodyPr wrap="square" lIns="0" tIns="0" rIns="0" bIns="0" rtlCol="0" anchor="ctr"/>
-          <a:lstStyle/>
-          <a:p>
-            <a:pPr indent="0" marL="0">
-              <a:buNone/>
-            </a:pPr>
-            <a:r>
-              <a:rPr lang="en-US" sz="1100" b="1" dirty="0">
-                <a:solidFill>
-                  <a:srgbClr val="3B9DF5"/>
-                </a:solidFill>
-                <a:latin typeface="Arial" pitchFamily="34" charset="0"/>
-                <a:ea typeface="Arial" pitchFamily="34" charset="-122"/>
-                <a:cs typeface="Arial" pitchFamily="34" charset="-120"/>
-              </a:rPr>
-              <a:t>03</a:t>
-            </a:r>
-            <a:endParaRPr lang="en-US" sz="1100" dirty="0"/>
-          </a:p>
-        </p:txBody>
-      </p:sp>
-      <p:sp>
-        <p:nvSpPr>
-          <p:cNvPr id="14" name="Text 12"/>
-          <p:cNvSpPr/>
-          <p:nvPr/>
-        </p:nvSpPr>
-        <p:spPr>
-          <a:xfrm>
-            <a:off x="4855464" y="2633472"/>
-            <a:ext cx="1554480" cy="512064"/>
-          </a:xfrm>
-          <a:prstGeom prst="rect">
-            <a:avLst/>
-          </a:prstGeom>
-          <a:noFill/>
-          <a:ln/>
-        </p:spPr>
-        <p:txBody>
-          <a:bodyPr wrap="square" lIns="0" tIns="0" rIns="0" bIns="0" rtlCol="0" anchor="t"/>
-          <a:lstStyle/>
-          <a:p>
-            <a:pPr indent="0" marL="0">
-              <a:lnSpc>
-                <a:spcPts val="1800"/>
-              </a:lnSpc>
-              <a:buNone/>
-            </a:pPr>
-            <a:r>
-              <a:rPr lang="en-US" sz="1450" b="1" dirty="0">
-                <a:solidFill>
-                  <a:srgbClr val="FFFFFF"/>
-                </a:solidFill>
-                <a:latin typeface="Arial" pitchFamily="34" charset="0"/>
-                <a:ea typeface="Arial" pitchFamily="34" charset="-122"/>
-                <a:cs typeface="Arial" pitchFamily="34" charset="-120"/>
-              </a:rPr>
-              <a:t>gold</a:t>
-            </a:r>
-            <a:endParaRPr lang="en-US" sz="1450" dirty="0"/>
-          </a:p>
-        </p:txBody>
-      </p:sp>
-      <p:sp>
-        <p:nvSpPr>
-          <p:cNvPr id="15" name="Text 13"/>
-          <p:cNvSpPr/>
-          <p:nvPr/>
-        </p:nvSpPr>
-        <p:spPr>
-          <a:xfrm>
-            <a:off x="4855464" y="3163824"/>
-            <a:ext cx="1554480" cy="621792"/>
-          </a:xfrm>
-          <a:prstGeom prst="rect">
-            <a:avLst/>
-          </a:prstGeom>
-          <a:noFill/>
-          <a:ln/>
-        </p:spPr>
-        <p:txBody>
-          <a:bodyPr wrap="square" lIns="0" tIns="0" rIns="0" bIns="0" rtlCol="0" anchor="ctr"/>
-          <a:lstStyle/>
-          <a:p>
-            <a:pPr indent="0" marL="0">
-              <a:lnSpc>
-                <a:spcPts val="1400"/>
-              </a:lnSpc>
-              <a:buNone/>
-            </a:pPr>
-            <a:r>
-              <a:rPr lang="en-US" sz="1050" dirty="0">
-                <a:solidFill>
-                  <a:srgbClr val="9BAAC0"/>
-                </a:solidFill>
-                <a:latin typeface="Arial" pitchFamily="34" charset="0"/>
-                <a:ea typeface="Arial" pitchFamily="34" charset="-122"/>
-                <a:cs typeface="Arial" pitchFamily="34" charset="-120"/>
-              </a:rPr>
-              <a:t>Criada e vazia. Fatos e dimensões vêm depois</a:t>
-            </a:r>
-            <a:endParaRPr lang="en-US" sz="1050" dirty="0"/>
-          </a:p>
-        </p:txBody>
-      </p:sp>
-      <p:sp>
-        <p:nvSpPr>
-          <p:cNvPr id="16" name="Shape 14"/>
-          <p:cNvSpPr/>
-          <p:nvPr/>
-        </p:nvSpPr>
-        <p:spPr>
-          <a:xfrm>
-            <a:off x="6775704" y="2194560"/>
-            <a:ext cx="1956816" cy="1737360"/>
-          </a:xfrm>
-          <a:prstGeom prst="roundRect">
-            <a:avLst>
-              <a:gd name="adj" fmla="val 2632"/>
-            </a:avLst>
-          </a:prstGeom>
-          <a:solidFill>
-            <a:srgbClr val="0D1522"/>
-          </a:solidFill>
-          <a:ln w="12700">
-            <a:solidFill>
-              <a:srgbClr val="1F3A5A"/>
-            </a:solidFill>
-            <a:prstDash val="solid"/>
-          </a:ln>
-        </p:spPr>
-      </p:sp>
-      <p:sp>
-        <p:nvSpPr>
-          <p:cNvPr id="17" name="Text 15"/>
-          <p:cNvSpPr/>
-          <p:nvPr/>
-        </p:nvSpPr>
-        <p:spPr>
-          <a:xfrm>
-            <a:off x="6976872" y="2359152"/>
-            <a:ext cx="1554480" cy="274320"/>
-          </a:xfrm>
-          <a:prstGeom prst="rect">
-            <a:avLst/>
-          </a:prstGeom>
-          <a:noFill/>
-          <a:ln/>
-        </p:spPr>
-        <p:txBody>
-          <a:bodyPr wrap="square" lIns="0" tIns="0" rIns="0" bIns="0" rtlCol="0" anchor="ctr"/>
-          <a:lstStyle/>
-          <a:p>
-            <a:pPr indent="0" marL="0">
-              <a:buNone/>
-            </a:pPr>
-            <a:r>
-              <a:rPr lang="en-US" sz="1100" b="1" dirty="0">
-                <a:solidFill>
-                  <a:srgbClr val="3B9DF5"/>
-                </a:solidFill>
-                <a:latin typeface="Arial" pitchFamily="34" charset="0"/>
-                <a:ea typeface="Arial" pitchFamily="34" charset="-122"/>
-                <a:cs typeface="Arial" pitchFamily="34" charset="-120"/>
-              </a:rPr>
-              <a:t>04</a:t>
-            </a:r>
-            <a:endParaRPr lang="en-US" sz="1100" dirty="0"/>
-          </a:p>
-        </p:txBody>
-      </p:sp>
-      <p:sp>
-        <p:nvSpPr>
-          <p:cNvPr id="18" name="Text 16"/>
-          <p:cNvSpPr/>
-          <p:nvPr/>
-        </p:nvSpPr>
-        <p:spPr>
-          <a:xfrm>
-            <a:off x="6976872" y="2633472"/>
-            <a:ext cx="1554480" cy="512064"/>
-          </a:xfrm>
-          <a:prstGeom prst="rect">
-            <a:avLst/>
-          </a:prstGeom>
-          <a:noFill/>
-          <a:ln/>
-        </p:spPr>
-        <p:txBody>
-          <a:bodyPr wrap="square" lIns="0" tIns="0" rIns="0" bIns="0" rtlCol="0" anchor="t"/>
-          <a:lstStyle/>
-          <a:p>
-            <a:pPr indent="0" marL="0">
-              <a:lnSpc>
-                <a:spcPts val="1800"/>
-              </a:lnSpc>
-              <a:buNone/>
-            </a:pPr>
-            <a:r>
-              <a:rPr lang="en-US" sz="1450" b="1" dirty="0">
-                <a:solidFill>
-                  <a:srgbClr val="FFFFFF"/>
-                </a:solidFill>
-                <a:latin typeface="Arial" pitchFamily="34" charset="0"/>
-                <a:ea typeface="Arial" pitchFamily="34" charset="-122"/>
-                <a:cs typeface="Arial" pitchFamily="34" charset="-120"/>
-              </a:rPr>
-              <a:t>job</a:t>
-            </a:r>
-            <a:endParaRPr lang="en-US" sz="1450" dirty="0"/>
-          </a:p>
-        </p:txBody>
-      </p:sp>
-      <p:sp>
-        <p:nvSpPr>
-          <p:cNvPr id="19" name="Text 17"/>
-          <p:cNvSpPr/>
-          <p:nvPr/>
-        </p:nvSpPr>
-        <p:spPr>
-          <a:xfrm>
-            <a:off x="6976872" y="3163824"/>
-            <a:ext cx="1554480" cy="621792"/>
-          </a:xfrm>
-          <a:prstGeom prst="rect">
-            <a:avLst/>
-          </a:prstGeom>
-          <a:noFill/>
-          <a:ln/>
-        </p:spPr>
-        <p:txBody>
-          <a:bodyPr wrap="square" lIns="0" tIns="0" rIns="0" bIns="0" rtlCol="0" anchor="ctr"/>
-          <a:lstStyle/>
-          <a:p>
-            <a:pPr indent="0" marL="0">
-              <a:lnSpc>
-                <a:spcPts val="1400"/>
-              </a:lnSpc>
-              <a:buNone/>
-            </a:pPr>
-            <a:r>
-              <a:rPr lang="en-US" sz="1050" dirty="0">
-                <a:solidFill>
-                  <a:srgbClr val="9BAAC0"/>
-                </a:solidFill>
-                <a:latin typeface="Arial" pitchFamily="34" charset="0"/>
-                <a:ea typeface="Arial" pitchFamily="34" charset="-122"/>
-                <a:cs typeface="Arial" pitchFamily="34" charset="-120"/>
-              </a:rPr>
-              <a:t>Deploy por bundle, 2 tarefas, 9 verificações passando</a:t>
-            </a:r>
-            <a:endParaRPr lang="en-US" sz="1050" dirty="0"/>
-          </a:p>
-        </p:txBody>
-      </p:sp>
-      <p:sp>
-        <p:nvSpPr>
-          <p:cNvPr id="20" name="Text 18"/>
           <p:cNvSpPr/>
           <p:nvPr/>
         </p:nvSpPr>
